--- a/downloads/group/interdisciplinary_framework.pptx
+++ b/downloads/group/interdisciplinary_framework.pptx
@@ -2,7 +2,7 @@
 <file path=ppt/presentation.xml><?xml version="1.0" encoding="utf-8"?>
 <p:presentation xmlns:a="http://schemas.openxmlformats.org/drawingml/2006/main" xmlns:r="http://schemas.openxmlformats.org/officeDocument/2006/relationships" xmlns:p="http://schemas.openxmlformats.org/presentationml/2006/main" saveSubsetFonts="1" autoCompressPictures="0">
   <p:sldMasterIdLst>
-    <p:sldMasterId id="2147483660" r:id="rId1"/>
+    <p:sldMasterId id="2147483684" r:id="rId1"/>
   </p:sldMasterIdLst>
   <p:notesMasterIdLst>
     <p:notesMasterId r:id="rId3"/>
@@ -10,7 +10,7 @@
   <p:sldIdLst>
     <p:sldId id="257" r:id="rId2"/>
   </p:sldIdLst>
-  <p:sldSz cx="12192000" cy="5608638"/>
+  <p:sldSz cx="9971088" cy="4319588"/>
   <p:notesSz cx="6858000" cy="9144000"/>
   <p:defaultTextStyle>
     <a:defPPr>
@@ -115,30 +115,79 @@
 </p:presentation>
 </file>
 
+<file path=ppt/revisionInfo.xml><?xml version="1.0" encoding="utf-8"?>
+<p1510:revInfo xmlns:a="http://schemas.openxmlformats.org/drawingml/2006/main" xmlns:r="http://schemas.openxmlformats.org/officeDocument/2006/relationships" xmlns:p1510="http://schemas.microsoft.com/office/powerpoint/2015/10/main">
+  <p1510:revLst>
+    <p1510:client id="{4D1EFAD2-52D1-2B4F-A032-C23A1705D536}" v="48" dt="2026-01-17T17:22:55.301"/>
+  </p1510:revLst>
+</p1510:revInfo>
+</file>
+
 <file path=ppt/changesInfos/changesInfo1.xml><?xml version="1.0" encoding="utf-8"?>
 <pc:chgInfo xmlns:a="http://schemas.openxmlformats.org/drawingml/2006/main" xmlns:r="http://schemas.openxmlformats.org/officeDocument/2006/relationships" xmlns:ac="http://schemas.microsoft.com/office/drawing/2013/main/command" xmlns:pc="http://schemas.microsoft.com/office/powerpoint/2013/main/command">
   <pc:docChgLst>
     <pc:chgData name="Fei Yao" userId="0f76fc2f-86db-4f00-832a-b92dc6cb86c5" providerId="ADAL" clId="{3542449D-0F28-5F63-A95F-E350D95EFEF5}"/>
-    <pc:docChg chg="delSld modSld">
-      <pc:chgData name="Fei Yao" userId="0f76fc2f-86db-4f00-832a-b92dc6cb86c5" providerId="ADAL" clId="{3542449D-0F28-5F63-A95F-E350D95EFEF5}" dt="2025-12-19T08:54:27.020" v="51" actId="20577"/>
+    <pc:docChg chg="custSel delSld modSld modMainMaster modNotesMaster">
+      <pc:chgData name="Fei Yao" userId="0f76fc2f-86db-4f00-832a-b92dc6cb86c5" providerId="ADAL" clId="{3542449D-0F28-5F63-A95F-E350D95EFEF5}" dt="2026-01-17T17:27:34.718" v="324" actId="20577"/>
       <pc:docMkLst>
         <pc:docMk/>
       </pc:docMkLst>
-      <pc:sldChg chg="del">
-        <pc:chgData name="Fei Yao" userId="0f76fc2f-86db-4f00-832a-b92dc6cb86c5" providerId="ADAL" clId="{3542449D-0F28-5F63-A95F-E350D95EFEF5}" dt="2025-12-19T08:53:27.239" v="0" actId="2696"/>
-        <pc:sldMkLst>
-          <pc:docMk/>
-          <pc:sldMk cId="2239425004" sldId="256"/>
-        </pc:sldMkLst>
-      </pc:sldChg>
-      <pc:sldChg chg="modSp mod">
-        <pc:chgData name="Fei Yao" userId="0f76fc2f-86db-4f00-832a-b92dc6cb86c5" providerId="ADAL" clId="{3542449D-0F28-5F63-A95F-E350D95EFEF5}" dt="2025-12-19T08:54:27.020" v="51" actId="20577"/>
+      <pc:sldChg chg="addSp delSp modSp mod modNotes">
+        <pc:chgData name="Fei Yao" userId="0f76fc2f-86db-4f00-832a-b92dc6cb86c5" providerId="ADAL" clId="{3542449D-0F28-5F63-A95F-E350D95EFEF5}" dt="2026-01-17T17:27:34.718" v="324" actId="20577"/>
         <pc:sldMkLst>
           <pc:docMk/>
           <pc:sldMk cId="4040458237" sldId="257"/>
         </pc:sldMkLst>
         <pc:spChg chg="mod">
-          <ac:chgData name="Fei Yao" userId="0f76fc2f-86db-4f00-832a-b92dc6cb86c5" providerId="ADAL" clId="{3542449D-0F28-5F63-A95F-E350D95EFEF5}" dt="2025-12-19T08:54:27.020" v="51" actId="20577"/>
+          <ac:chgData name="Fei Yao" userId="0f76fc2f-86db-4f00-832a-b92dc6cb86c5" providerId="ADAL" clId="{3542449D-0F28-5F63-A95F-E350D95EFEF5}" dt="2026-01-17T17:05:07.571" v="61" actId="207"/>
+          <ac:spMkLst>
+            <pc:docMk/>
+            <pc:sldMk cId="4040458237" sldId="257"/>
+            <ac:spMk id="2" creationId="{851D8764-AB40-28F7-A611-D6285B0F80D4}"/>
+          </ac:spMkLst>
+        </pc:spChg>
+        <pc:spChg chg="mod">
+          <ac:chgData name="Fei Yao" userId="0f76fc2f-86db-4f00-832a-b92dc6cb86c5" providerId="ADAL" clId="{3542449D-0F28-5F63-A95F-E350D95EFEF5}" dt="2026-01-17T17:05:07.571" v="61" actId="207"/>
+          <ac:spMkLst>
+            <pc:docMk/>
+            <pc:sldMk cId="4040458237" sldId="257"/>
+            <ac:spMk id="3" creationId="{BDDDC990-7797-D6B8-46B1-ACB026647C78}"/>
+          </ac:spMkLst>
+        </pc:spChg>
+        <pc:spChg chg="mod">
+          <ac:chgData name="Fei Yao" userId="0f76fc2f-86db-4f00-832a-b92dc6cb86c5" providerId="ADAL" clId="{3542449D-0F28-5F63-A95F-E350D95EFEF5}" dt="2026-01-17T17:05:07.571" v="61" actId="207"/>
+          <ac:spMkLst>
+            <pc:docMk/>
+            <pc:sldMk cId="4040458237" sldId="257"/>
+            <ac:spMk id="5" creationId="{07EE841B-6CAB-D8FD-E69A-01AE77DDE515}"/>
+          </ac:spMkLst>
+        </pc:spChg>
+        <pc:spChg chg="mod topLvl">
+          <ac:chgData name="Fei Yao" userId="0f76fc2f-86db-4f00-832a-b92dc6cb86c5" providerId="ADAL" clId="{3542449D-0F28-5F63-A95F-E350D95EFEF5}" dt="2026-01-17T17:19:35.749" v="305" actId="164"/>
+          <ac:spMkLst>
+            <pc:docMk/>
+            <pc:sldMk cId="4040458237" sldId="257"/>
+            <ac:spMk id="16" creationId="{CA36BCB0-D7E3-69BC-4AE8-EFD622F01320}"/>
+          </ac:spMkLst>
+        </pc:spChg>
+        <pc:spChg chg="add mod">
+          <ac:chgData name="Fei Yao" userId="0f76fc2f-86db-4f00-832a-b92dc6cb86c5" providerId="ADAL" clId="{3542449D-0F28-5F63-A95F-E350D95EFEF5}" dt="2026-01-17T17:19:17.505" v="302" actId="1076"/>
+          <ac:spMkLst>
+            <pc:docMk/>
+            <pc:sldMk cId="4040458237" sldId="257"/>
+            <ac:spMk id="17" creationId="{C7777CCE-2A99-24E3-1D0F-D0941AAFF4F2}"/>
+          </ac:spMkLst>
+        </pc:spChg>
+        <pc:spChg chg="mod topLvl">
+          <ac:chgData name="Fei Yao" userId="0f76fc2f-86db-4f00-832a-b92dc6cb86c5" providerId="ADAL" clId="{3542449D-0F28-5F63-A95F-E350D95EFEF5}" dt="2026-01-17T17:19:35.749" v="305" actId="164"/>
+          <ac:spMkLst>
+            <pc:docMk/>
+            <pc:sldMk cId="4040458237" sldId="257"/>
+            <ac:spMk id="18" creationId="{216D4596-62A5-A759-A679-A3D22BDF1170}"/>
+          </ac:spMkLst>
+        </pc:spChg>
+        <pc:spChg chg="mod topLvl">
+          <ac:chgData name="Fei Yao" userId="0f76fc2f-86db-4f00-832a-b92dc6cb86c5" providerId="ADAL" clId="{3542449D-0F28-5F63-A95F-E350D95EFEF5}" dt="2026-01-17T17:25:00.787" v="315" actId="20577"/>
           <ac:spMkLst>
             <pc:docMk/>
             <pc:sldMk cId="4040458237" sldId="257"/>
@@ -146,22 +195,834 @@
           </ac:spMkLst>
         </pc:spChg>
         <pc:spChg chg="mod">
-          <ac:chgData name="Fei Yao" userId="0f76fc2f-86db-4f00-832a-b92dc6cb86c5" providerId="ADAL" clId="{3542449D-0F28-5F63-A95F-E350D95EFEF5}" dt="2025-12-19T08:53:38.381" v="29" actId="20577"/>
+          <ac:chgData name="Fei Yao" userId="0f76fc2f-86db-4f00-832a-b92dc6cb86c5" providerId="ADAL" clId="{3542449D-0F28-5F63-A95F-E350D95EFEF5}" dt="2026-01-17T17:15:20.976" v="263" actId="404"/>
+          <ac:spMkLst>
+            <pc:docMk/>
+            <pc:sldMk cId="4040458237" sldId="257"/>
+            <ac:spMk id="27" creationId="{13DAE1D3-5DDB-00C7-EDAC-ACC3852BE914}"/>
+          </ac:spMkLst>
+        </pc:spChg>
+        <pc:spChg chg="mod">
+          <ac:chgData name="Fei Yao" userId="0f76fc2f-86db-4f00-832a-b92dc6cb86c5" providerId="ADAL" clId="{3542449D-0F28-5F63-A95F-E350D95EFEF5}" dt="2026-01-17T17:03:36.805" v="54" actId="404"/>
+          <ac:spMkLst>
+            <pc:docMk/>
+            <pc:sldMk cId="4040458237" sldId="257"/>
+            <ac:spMk id="33" creationId="{A581067A-2D99-D1EC-6E7D-4C0702D8F943}"/>
+          </ac:spMkLst>
+        </pc:spChg>
+        <pc:spChg chg="mod">
+          <ac:chgData name="Fei Yao" userId="0f76fc2f-86db-4f00-832a-b92dc6cb86c5" providerId="ADAL" clId="{3542449D-0F28-5F63-A95F-E350D95EFEF5}" dt="2026-01-17T17:27:34.718" v="324" actId="20577"/>
           <ac:spMkLst>
             <pc:docMk/>
             <pc:sldMk cId="4040458237" sldId="257"/>
             <ac:spMk id="35" creationId="{FA74D224-EE6A-02C6-DE69-55D1243903E5}"/>
           </ac:spMkLst>
         </pc:spChg>
+        <pc:spChg chg="mod topLvl">
+          <ac:chgData name="Fei Yao" userId="0f76fc2f-86db-4f00-832a-b92dc6cb86c5" providerId="ADAL" clId="{3542449D-0F28-5F63-A95F-E350D95EFEF5}" dt="2026-01-17T17:19:27.292" v="304" actId="164"/>
+          <ac:spMkLst>
+            <pc:docMk/>
+            <pc:sldMk cId="4040458237" sldId="257"/>
+            <ac:spMk id="45" creationId="{B4C40E10-D9B0-AB23-813B-F977BF6CCD71}"/>
+          </ac:spMkLst>
+        </pc:spChg>
+        <pc:spChg chg="mod topLvl">
+          <ac:chgData name="Fei Yao" userId="0f76fc2f-86db-4f00-832a-b92dc6cb86c5" providerId="ADAL" clId="{3542449D-0F28-5F63-A95F-E350D95EFEF5}" dt="2026-01-17T17:19:27.292" v="304" actId="164"/>
+          <ac:spMkLst>
+            <pc:docMk/>
+            <pc:sldMk cId="4040458237" sldId="257"/>
+            <ac:spMk id="46" creationId="{78493220-81F3-114C-2306-8D2703043720}"/>
+          </ac:spMkLst>
+        </pc:spChg>
+        <pc:spChg chg="mod topLvl">
+          <ac:chgData name="Fei Yao" userId="0f76fc2f-86db-4f00-832a-b92dc6cb86c5" providerId="ADAL" clId="{3542449D-0F28-5F63-A95F-E350D95EFEF5}" dt="2026-01-17T17:19:27.292" v="304" actId="164"/>
+          <ac:spMkLst>
+            <pc:docMk/>
+            <pc:sldMk cId="4040458237" sldId="257"/>
+            <ac:spMk id="47" creationId="{BAC3C435-66F3-A799-9EC8-B3E881F7FB9A}"/>
+          </ac:spMkLst>
+        </pc:spChg>
         <pc:spChg chg="mod">
-          <ac:chgData name="Fei Yao" userId="0f76fc2f-86db-4f00-832a-b92dc6cb86c5" providerId="ADAL" clId="{3542449D-0F28-5F63-A95F-E350D95EFEF5}" dt="2025-12-19T08:54:14.120" v="49" actId="20577"/>
+          <ac:chgData name="Fei Yao" userId="0f76fc2f-86db-4f00-832a-b92dc6cb86c5" providerId="ADAL" clId="{3542449D-0F28-5F63-A95F-E350D95EFEF5}" dt="2026-01-17T17:03:42.346" v="56" actId="404"/>
+          <ac:spMkLst>
+            <pc:docMk/>
+            <pc:sldMk cId="4040458237" sldId="257"/>
+            <ac:spMk id="56" creationId="{DDFCF179-2F67-F31B-88D1-14CECD5B360A}"/>
+          </ac:spMkLst>
+        </pc:spChg>
+        <pc:spChg chg="mod">
+          <ac:chgData name="Fei Yao" userId="0f76fc2f-86db-4f00-832a-b92dc6cb86c5" providerId="ADAL" clId="{3542449D-0F28-5F63-A95F-E350D95EFEF5}" dt="2026-01-17T17:15:00.463" v="262" actId="166"/>
+          <ac:spMkLst>
+            <pc:docMk/>
+            <pc:sldMk cId="4040458237" sldId="257"/>
+            <ac:spMk id="60" creationId="{38D8ADD4-FD38-32E8-5E10-7F1AEC8506AD}"/>
+          </ac:spMkLst>
+        </pc:spChg>
+        <pc:spChg chg="mod">
+          <ac:chgData name="Fei Yao" userId="0f76fc2f-86db-4f00-832a-b92dc6cb86c5" providerId="ADAL" clId="{3542449D-0F28-5F63-A95F-E350D95EFEF5}" dt="2026-01-17T17:22:55.301" v="306"/>
+          <ac:spMkLst>
+            <pc:docMk/>
+            <pc:sldMk cId="4040458237" sldId="257"/>
+            <ac:spMk id="142" creationId="{2845559A-73CD-2160-2AE3-F8F7A25A28E6}"/>
+          </ac:spMkLst>
+        </pc:spChg>
+        <pc:spChg chg="mod">
+          <ac:chgData name="Fei Yao" userId="0f76fc2f-86db-4f00-832a-b92dc6cb86c5" providerId="ADAL" clId="{3542449D-0F28-5F63-A95F-E350D95EFEF5}" dt="2026-01-17T17:22:55.301" v="306"/>
+          <ac:spMkLst>
+            <pc:docMk/>
+            <pc:sldMk cId="4040458237" sldId="257"/>
+            <ac:spMk id="156" creationId="{27DED6A3-4735-6BCE-D3A2-75317F4CF2A3}"/>
+          </ac:spMkLst>
+        </pc:spChg>
+        <pc:spChg chg="mod">
+          <ac:chgData name="Fei Yao" userId="0f76fc2f-86db-4f00-832a-b92dc6cb86c5" providerId="ADAL" clId="{3542449D-0F28-5F63-A95F-E350D95EFEF5}" dt="2026-01-17T17:22:55.301" v="306"/>
+          <ac:spMkLst>
+            <pc:docMk/>
+            <pc:sldMk cId="4040458237" sldId="257"/>
+            <ac:spMk id="160" creationId="{1D4D2178-BC29-7932-C546-D8BD3EB8EB4B}"/>
+          </ac:spMkLst>
+        </pc:spChg>
+        <pc:spChg chg="mod">
+          <ac:chgData name="Fei Yao" userId="0f76fc2f-86db-4f00-832a-b92dc6cb86c5" providerId="ADAL" clId="{3542449D-0F28-5F63-A95F-E350D95EFEF5}" dt="2026-01-17T17:22:55.301" v="306"/>
+          <ac:spMkLst>
+            <pc:docMk/>
+            <pc:sldMk cId="4040458237" sldId="257"/>
+            <ac:spMk id="163" creationId="{4355ECF0-5F09-ECAE-53F4-69A73F2B5C9F}"/>
+          </ac:spMkLst>
+        </pc:spChg>
+        <pc:spChg chg="mod">
+          <ac:chgData name="Fei Yao" userId="0f76fc2f-86db-4f00-832a-b92dc6cb86c5" providerId="ADAL" clId="{3542449D-0F28-5F63-A95F-E350D95EFEF5}" dt="2026-01-17T17:22:55.301" v="306"/>
+          <ac:spMkLst>
+            <pc:docMk/>
+            <pc:sldMk cId="4040458237" sldId="257"/>
+            <ac:spMk id="173" creationId="{0A134438-33FD-438A-E6B5-52593D8566C9}"/>
+          </ac:spMkLst>
+        </pc:spChg>
+        <pc:spChg chg="mod">
+          <ac:chgData name="Fei Yao" userId="0f76fc2f-86db-4f00-832a-b92dc6cb86c5" providerId="ADAL" clId="{3542449D-0F28-5F63-A95F-E350D95EFEF5}" dt="2026-01-17T17:22:55.301" v="306"/>
+          <ac:spMkLst>
+            <pc:docMk/>
+            <pc:sldMk cId="4040458237" sldId="257"/>
+            <ac:spMk id="176" creationId="{6D5FF824-A8D7-6E59-9FDC-19BB0FCFB6C3}"/>
+          </ac:spMkLst>
+        </pc:spChg>
+        <pc:spChg chg="mod">
+          <ac:chgData name="Fei Yao" userId="0f76fc2f-86db-4f00-832a-b92dc6cb86c5" providerId="ADAL" clId="{3542449D-0F28-5F63-A95F-E350D95EFEF5}" dt="2026-01-17T17:22:55.301" v="306"/>
+          <ac:spMkLst>
+            <pc:docMk/>
+            <pc:sldMk cId="4040458237" sldId="257"/>
+            <ac:spMk id="180" creationId="{F847BAEE-33F8-804A-A6F7-17C23F3FA3AE}"/>
+          </ac:spMkLst>
+        </pc:spChg>
+        <pc:spChg chg="mod">
+          <ac:chgData name="Fei Yao" userId="0f76fc2f-86db-4f00-832a-b92dc6cb86c5" providerId="ADAL" clId="{3542449D-0F28-5F63-A95F-E350D95EFEF5}" dt="2026-01-17T17:22:55.301" v="306"/>
+          <ac:spMkLst>
+            <pc:docMk/>
+            <pc:sldMk cId="4040458237" sldId="257"/>
+            <ac:spMk id="195" creationId="{A28335C9-6850-3D06-E157-F94145F17D6F}"/>
+          </ac:spMkLst>
+        </pc:spChg>
+        <pc:spChg chg="mod">
+          <ac:chgData name="Fei Yao" userId="0f76fc2f-86db-4f00-832a-b92dc6cb86c5" providerId="ADAL" clId="{3542449D-0F28-5F63-A95F-E350D95EFEF5}" dt="2026-01-17T17:22:55.301" v="306"/>
+          <ac:spMkLst>
+            <pc:docMk/>
+            <pc:sldMk cId="4040458237" sldId="257"/>
+            <ac:spMk id="199" creationId="{4BD217C6-BE8D-870E-27EE-E3C6BCDCE390}"/>
+          </ac:spMkLst>
+        </pc:spChg>
+        <pc:spChg chg="mod">
+          <ac:chgData name="Fei Yao" userId="0f76fc2f-86db-4f00-832a-b92dc6cb86c5" providerId="ADAL" clId="{3542449D-0F28-5F63-A95F-E350D95EFEF5}" dt="2026-01-17T17:22:55.301" v="306"/>
+          <ac:spMkLst>
+            <pc:docMk/>
+            <pc:sldMk cId="4040458237" sldId="257"/>
+            <ac:spMk id="203" creationId="{B3B474F4-4879-C115-363A-3B129E6B0EB8}"/>
+          </ac:spMkLst>
+        </pc:spChg>
+        <pc:spChg chg="mod">
+          <ac:chgData name="Fei Yao" userId="0f76fc2f-86db-4f00-832a-b92dc6cb86c5" providerId="ADAL" clId="{3542449D-0F28-5F63-A95F-E350D95EFEF5}" dt="2026-01-17T17:14:51.643" v="261" actId="1076"/>
           <ac:spMkLst>
             <pc:docMk/>
             <pc:sldMk cId="4040458237" sldId="257"/>
             <ac:spMk id="206" creationId="{71B9B351-4253-8A39-AA97-39660F884343}"/>
           </ac:spMkLst>
         </pc:spChg>
+        <pc:grpChg chg="add del mod">
+          <ac:chgData name="Fei Yao" userId="0f76fc2f-86db-4f00-832a-b92dc6cb86c5" providerId="ADAL" clId="{3542449D-0F28-5F63-A95F-E350D95EFEF5}" dt="2026-01-17T17:18:26.343" v="294" actId="165"/>
+          <ac:grpSpMkLst>
+            <pc:docMk/>
+            <pc:sldMk cId="4040458237" sldId="257"/>
+            <ac:grpSpMk id="7" creationId="{BA3D1CC0-6AC3-62E6-AAEC-3CC9DE64965A}"/>
+          </ac:grpSpMkLst>
+        </pc:grpChg>
+        <pc:grpChg chg="add mod">
+          <ac:chgData name="Fei Yao" userId="0f76fc2f-86db-4f00-832a-b92dc6cb86c5" providerId="ADAL" clId="{3542449D-0F28-5F63-A95F-E350D95EFEF5}" dt="2026-01-17T17:19:35.749" v="305" actId="164"/>
+          <ac:grpSpMkLst>
+            <pc:docMk/>
+            <pc:sldMk cId="4040458237" sldId="257"/>
+            <ac:grpSpMk id="14" creationId="{E88C62F9-2CEB-C0F3-B96E-5F3B4EAD0CEE}"/>
+          </ac:grpSpMkLst>
+        </pc:grpChg>
+        <pc:grpChg chg="del mod topLvl">
+          <ac:chgData name="Fei Yao" userId="0f76fc2f-86db-4f00-832a-b92dc6cb86c5" providerId="ADAL" clId="{3542449D-0F28-5F63-A95F-E350D95EFEF5}" dt="2026-01-17T17:13:19.106" v="246" actId="165"/>
+          <ac:grpSpMkLst>
+            <pc:docMk/>
+            <pc:sldMk cId="4040458237" sldId="257"/>
+            <ac:grpSpMk id="15" creationId="{6FDAF13A-D98A-2A24-C919-E4C439842305}"/>
+          </ac:grpSpMkLst>
+        </pc:grpChg>
+        <pc:grpChg chg="add mod">
+          <ac:chgData name="Fei Yao" userId="0f76fc2f-86db-4f00-832a-b92dc6cb86c5" providerId="ADAL" clId="{3542449D-0F28-5F63-A95F-E350D95EFEF5}" dt="2026-01-17T17:19:27.292" v="304" actId="164"/>
+          <ac:grpSpMkLst>
+            <pc:docMk/>
+            <pc:sldMk cId="4040458237" sldId="257"/>
+            <ac:grpSpMk id="20" creationId="{93100638-5B02-B883-8B55-5B0B9E4B9A67}"/>
+          </ac:grpSpMkLst>
+        </pc:grpChg>
+        <pc:grpChg chg="add mod">
+          <ac:chgData name="Fei Yao" userId="0f76fc2f-86db-4f00-832a-b92dc6cb86c5" providerId="ADAL" clId="{3542449D-0F28-5F63-A95F-E350D95EFEF5}" dt="2026-01-17T17:19:27.292" v="304" actId="164"/>
+          <ac:grpSpMkLst>
+            <pc:docMk/>
+            <pc:sldMk cId="4040458237" sldId="257"/>
+            <ac:grpSpMk id="21" creationId="{F0E8C558-6F1C-4035-8DCB-523A74430986}"/>
+          </ac:grpSpMkLst>
+        </pc:grpChg>
+        <pc:grpChg chg="add mod">
+          <ac:chgData name="Fei Yao" userId="0f76fc2f-86db-4f00-832a-b92dc6cb86c5" providerId="ADAL" clId="{3542449D-0F28-5F63-A95F-E350D95EFEF5}" dt="2026-01-17T17:19:35.749" v="305" actId="164"/>
+          <ac:grpSpMkLst>
+            <pc:docMk/>
+            <pc:sldMk cId="4040458237" sldId="257"/>
+            <ac:grpSpMk id="22" creationId="{2F437EA7-D324-F190-DCE8-BE1E67653815}"/>
+          </ac:grpSpMkLst>
+        </pc:grpChg>
+        <pc:grpChg chg="del mod topLvl">
+          <ac:chgData name="Fei Yao" userId="0f76fc2f-86db-4f00-832a-b92dc6cb86c5" providerId="ADAL" clId="{3542449D-0F28-5F63-A95F-E350D95EFEF5}" dt="2026-01-17T17:06:29.144" v="166" actId="478"/>
+          <ac:grpSpMkLst>
+            <pc:docMk/>
+            <pc:sldMk cId="4040458237" sldId="257"/>
+            <ac:grpSpMk id="25" creationId="{4406F021-0E03-596F-67B9-4F6855EBECC6}"/>
+          </ac:grpSpMkLst>
+        </pc:grpChg>
+        <pc:grpChg chg="del">
+          <ac:chgData name="Fei Yao" userId="0f76fc2f-86db-4f00-832a-b92dc6cb86c5" providerId="ADAL" clId="{3542449D-0F28-5F63-A95F-E350D95EFEF5}" dt="2026-01-17T17:13:11.437" v="245" actId="165"/>
+          <ac:grpSpMkLst>
+            <pc:docMk/>
+            <pc:sldMk cId="4040458237" sldId="257"/>
+            <ac:grpSpMk id="48" creationId="{2994C83C-4054-F153-4E3E-A00C801418A8}"/>
+          </ac:grpSpMkLst>
+        </pc:grpChg>
+        <pc:grpChg chg="del">
+          <ac:chgData name="Fei Yao" userId="0f76fc2f-86db-4f00-832a-b92dc6cb86c5" providerId="ADAL" clId="{3542449D-0F28-5F63-A95F-E350D95EFEF5}" dt="2026-01-17T17:06:26.544" v="165" actId="165"/>
+          <ac:grpSpMkLst>
+            <pc:docMk/>
+            <pc:sldMk cId="4040458237" sldId="257"/>
+            <ac:grpSpMk id="53" creationId="{41D873E6-2210-B5AD-BA4C-37894CB9A0E7}"/>
+          </ac:grpSpMkLst>
+        </pc:grpChg>
+        <pc:picChg chg="mod">
+          <ac:chgData name="Fei Yao" userId="0f76fc2f-86db-4f00-832a-b92dc6cb86c5" providerId="ADAL" clId="{3542449D-0F28-5F63-A95F-E350D95EFEF5}" dt="2026-01-17T17:06:26.544" v="165" actId="165"/>
+          <ac:picMkLst>
+            <pc:docMk/>
+            <pc:sldMk cId="4040458237" sldId="257"/>
+            <ac:picMk id="6" creationId="{61D95559-F04F-B9A9-951E-ABB33C6B3959}"/>
+          </ac:picMkLst>
+        </pc:picChg>
+        <pc:picChg chg="mod topLvl">
+          <ac:chgData name="Fei Yao" userId="0f76fc2f-86db-4f00-832a-b92dc6cb86c5" providerId="ADAL" clId="{3542449D-0F28-5F63-A95F-E350D95EFEF5}" dt="2026-01-17T17:14:00.272" v="256" actId="164"/>
+          <ac:picMkLst>
+            <pc:docMk/>
+            <pc:sldMk cId="4040458237" sldId="257"/>
+            <ac:picMk id="8" creationId="{B32B273F-412B-951C-3990-4859932A98B7}"/>
+          </ac:picMkLst>
+        </pc:picChg>
+        <pc:picChg chg="mod topLvl">
+          <ac:chgData name="Fei Yao" userId="0f76fc2f-86db-4f00-832a-b92dc6cb86c5" providerId="ADAL" clId="{3542449D-0F28-5F63-A95F-E350D95EFEF5}" dt="2026-01-17T17:19:17.505" v="302" actId="1076"/>
+          <ac:picMkLst>
+            <pc:docMk/>
+            <pc:sldMk cId="4040458237" sldId="257"/>
+            <ac:picMk id="9" creationId="{F741769C-D5AA-7480-B87B-21EB5C91A35F}"/>
+          </ac:picMkLst>
+        </pc:picChg>
+        <pc:picChg chg="mod">
+          <ac:chgData name="Fei Yao" userId="0f76fc2f-86db-4f00-832a-b92dc6cb86c5" providerId="ADAL" clId="{3542449D-0F28-5F63-A95F-E350D95EFEF5}" dt="2026-01-17T17:06:26.544" v="165" actId="165"/>
+          <ac:picMkLst>
+            <pc:docMk/>
+            <pc:sldMk cId="4040458237" sldId="257"/>
+            <ac:picMk id="10" creationId="{D2BE00DF-8707-891C-53FA-60E4BAB6D36B}"/>
+          </ac:picMkLst>
+        </pc:picChg>
+        <pc:picChg chg="mod topLvl">
+          <ac:chgData name="Fei Yao" userId="0f76fc2f-86db-4f00-832a-b92dc6cb86c5" providerId="ADAL" clId="{3542449D-0F28-5F63-A95F-E350D95EFEF5}" dt="2026-01-17T17:19:17.505" v="302" actId="1076"/>
+          <ac:picMkLst>
+            <pc:docMk/>
+            <pc:sldMk cId="4040458237" sldId="257"/>
+            <ac:picMk id="11" creationId="{7CF1955A-01A2-F126-9BCE-81C4BC5EFA72}"/>
+          </ac:picMkLst>
+        </pc:picChg>
+        <pc:picChg chg="del mod topLvl">
+          <ac:chgData name="Fei Yao" userId="0f76fc2f-86db-4f00-832a-b92dc6cb86c5" providerId="ADAL" clId="{3542449D-0F28-5F63-A95F-E350D95EFEF5}" dt="2026-01-17T17:13:56.469" v="255" actId="478"/>
+          <ac:picMkLst>
+            <pc:docMk/>
+            <pc:sldMk cId="4040458237" sldId="257"/>
+            <ac:picMk id="12" creationId="{44384A69-19BB-4A95-01F6-072E4D5BDE28}"/>
+          </ac:picMkLst>
+        </pc:picChg>
+        <pc:picChg chg="add mod">
+          <ac:chgData name="Fei Yao" userId="0f76fc2f-86db-4f00-832a-b92dc6cb86c5" providerId="ADAL" clId="{3542449D-0F28-5F63-A95F-E350D95EFEF5}" dt="2026-01-17T17:14:00.272" v="256" actId="164"/>
+          <ac:picMkLst>
+            <pc:docMk/>
+            <pc:sldMk cId="4040458237" sldId="257"/>
+            <ac:picMk id="13" creationId="{DB022340-FA5F-8274-2888-F2D3B0059FB5}"/>
+          </ac:picMkLst>
+        </pc:picChg>
       </pc:sldChg>
+      <pc:sldMasterChg chg="modSp modSldLayout">
+        <pc:chgData name="Fei Yao" userId="0f76fc2f-86db-4f00-832a-b92dc6cb86c5" providerId="ADAL" clId="{3542449D-0F28-5F63-A95F-E350D95EFEF5}" dt="2026-01-17T17:03:18.292" v="52"/>
+        <pc:sldMasterMkLst>
+          <pc:docMk/>
+          <pc:sldMasterMk cId="2567449288" sldId="2147483660"/>
+        </pc:sldMasterMkLst>
+        <pc:spChg chg="mod">
+          <ac:chgData name="Fei Yao" userId="0f76fc2f-86db-4f00-832a-b92dc6cb86c5" providerId="ADAL" clId="{3542449D-0F28-5F63-A95F-E350D95EFEF5}" dt="2026-01-17T17:03:18.292" v="52"/>
+          <ac:spMkLst>
+            <pc:docMk/>
+            <pc:sldMasterMk cId="2567449288" sldId="2147483660"/>
+            <ac:spMk id="2" creationId="{00000000-0000-0000-0000-000000000000}"/>
+          </ac:spMkLst>
+        </pc:spChg>
+        <pc:spChg chg="mod">
+          <ac:chgData name="Fei Yao" userId="0f76fc2f-86db-4f00-832a-b92dc6cb86c5" providerId="ADAL" clId="{3542449D-0F28-5F63-A95F-E350D95EFEF5}" dt="2026-01-17T17:03:18.292" v="52"/>
+          <ac:spMkLst>
+            <pc:docMk/>
+            <pc:sldMasterMk cId="2567449288" sldId="2147483660"/>
+            <ac:spMk id="3" creationId="{00000000-0000-0000-0000-000000000000}"/>
+          </ac:spMkLst>
+        </pc:spChg>
+        <pc:spChg chg="mod">
+          <ac:chgData name="Fei Yao" userId="0f76fc2f-86db-4f00-832a-b92dc6cb86c5" providerId="ADAL" clId="{3542449D-0F28-5F63-A95F-E350D95EFEF5}" dt="2026-01-17T17:03:18.292" v="52"/>
+          <ac:spMkLst>
+            <pc:docMk/>
+            <pc:sldMasterMk cId="2567449288" sldId="2147483660"/>
+            <ac:spMk id="4" creationId="{00000000-0000-0000-0000-000000000000}"/>
+          </ac:spMkLst>
+        </pc:spChg>
+        <pc:spChg chg="mod">
+          <ac:chgData name="Fei Yao" userId="0f76fc2f-86db-4f00-832a-b92dc6cb86c5" providerId="ADAL" clId="{3542449D-0F28-5F63-A95F-E350D95EFEF5}" dt="2026-01-17T17:03:18.292" v="52"/>
+          <ac:spMkLst>
+            <pc:docMk/>
+            <pc:sldMasterMk cId="2567449288" sldId="2147483660"/>
+            <ac:spMk id="5" creationId="{00000000-0000-0000-0000-000000000000}"/>
+          </ac:spMkLst>
+        </pc:spChg>
+        <pc:spChg chg="mod">
+          <ac:chgData name="Fei Yao" userId="0f76fc2f-86db-4f00-832a-b92dc6cb86c5" providerId="ADAL" clId="{3542449D-0F28-5F63-A95F-E350D95EFEF5}" dt="2026-01-17T17:03:18.292" v="52"/>
+          <ac:spMkLst>
+            <pc:docMk/>
+            <pc:sldMasterMk cId="2567449288" sldId="2147483660"/>
+            <ac:spMk id="6" creationId="{00000000-0000-0000-0000-000000000000}"/>
+          </ac:spMkLst>
+        </pc:spChg>
+        <pc:sldLayoutChg chg="modSp">
+          <pc:chgData name="Fei Yao" userId="0f76fc2f-86db-4f00-832a-b92dc6cb86c5" providerId="ADAL" clId="{3542449D-0F28-5F63-A95F-E350D95EFEF5}" dt="2026-01-17T17:03:18.292" v="52"/>
+          <pc:sldLayoutMkLst>
+            <pc:docMk/>
+            <pc:sldMasterMk cId="2567449288" sldId="2147483660"/>
+            <pc:sldLayoutMk cId="2769730494" sldId="2147483661"/>
+          </pc:sldLayoutMkLst>
+          <pc:spChg chg="mod">
+            <ac:chgData name="Fei Yao" userId="0f76fc2f-86db-4f00-832a-b92dc6cb86c5" providerId="ADAL" clId="{3542449D-0F28-5F63-A95F-E350D95EFEF5}" dt="2026-01-17T17:03:18.292" v="52"/>
+            <ac:spMkLst>
+              <pc:docMk/>
+              <pc:sldMasterMk cId="2567449288" sldId="2147483660"/>
+              <pc:sldLayoutMk cId="2769730494" sldId="2147483661"/>
+              <ac:spMk id="2" creationId="{00000000-0000-0000-0000-000000000000}"/>
+            </ac:spMkLst>
+          </pc:spChg>
+          <pc:spChg chg="mod">
+            <ac:chgData name="Fei Yao" userId="0f76fc2f-86db-4f00-832a-b92dc6cb86c5" providerId="ADAL" clId="{3542449D-0F28-5F63-A95F-E350D95EFEF5}" dt="2026-01-17T17:03:18.292" v="52"/>
+            <ac:spMkLst>
+              <pc:docMk/>
+              <pc:sldMasterMk cId="2567449288" sldId="2147483660"/>
+              <pc:sldLayoutMk cId="2769730494" sldId="2147483661"/>
+              <ac:spMk id="3" creationId="{00000000-0000-0000-0000-000000000000}"/>
+            </ac:spMkLst>
+          </pc:spChg>
+        </pc:sldLayoutChg>
+        <pc:sldLayoutChg chg="modSp">
+          <pc:chgData name="Fei Yao" userId="0f76fc2f-86db-4f00-832a-b92dc6cb86c5" providerId="ADAL" clId="{3542449D-0F28-5F63-A95F-E350D95EFEF5}" dt="2026-01-17T17:03:18.292" v="52"/>
+          <pc:sldLayoutMkLst>
+            <pc:docMk/>
+            <pc:sldMasterMk cId="2567449288" sldId="2147483660"/>
+            <pc:sldLayoutMk cId="4021746503" sldId="2147483663"/>
+          </pc:sldLayoutMkLst>
+          <pc:spChg chg="mod">
+            <ac:chgData name="Fei Yao" userId="0f76fc2f-86db-4f00-832a-b92dc6cb86c5" providerId="ADAL" clId="{3542449D-0F28-5F63-A95F-E350D95EFEF5}" dt="2026-01-17T17:03:18.292" v="52"/>
+            <ac:spMkLst>
+              <pc:docMk/>
+              <pc:sldMasterMk cId="2567449288" sldId="2147483660"/>
+              <pc:sldLayoutMk cId="4021746503" sldId="2147483663"/>
+              <ac:spMk id="2" creationId="{00000000-0000-0000-0000-000000000000}"/>
+            </ac:spMkLst>
+          </pc:spChg>
+          <pc:spChg chg="mod">
+            <ac:chgData name="Fei Yao" userId="0f76fc2f-86db-4f00-832a-b92dc6cb86c5" providerId="ADAL" clId="{3542449D-0F28-5F63-A95F-E350D95EFEF5}" dt="2026-01-17T17:03:18.292" v="52"/>
+            <ac:spMkLst>
+              <pc:docMk/>
+              <pc:sldMasterMk cId="2567449288" sldId="2147483660"/>
+              <pc:sldLayoutMk cId="4021746503" sldId="2147483663"/>
+              <ac:spMk id="3" creationId="{00000000-0000-0000-0000-000000000000}"/>
+            </ac:spMkLst>
+          </pc:spChg>
+        </pc:sldLayoutChg>
+        <pc:sldLayoutChg chg="modSp">
+          <pc:chgData name="Fei Yao" userId="0f76fc2f-86db-4f00-832a-b92dc6cb86c5" providerId="ADAL" clId="{3542449D-0F28-5F63-A95F-E350D95EFEF5}" dt="2026-01-17T17:03:18.292" v="52"/>
+          <pc:sldLayoutMkLst>
+            <pc:docMk/>
+            <pc:sldMasterMk cId="2567449288" sldId="2147483660"/>
+            <pc:sldLayoutMk cId="2202309142" sldId="2147483664"/>
+          </pc:sldLayoutMkLst>
+          <pc:spChg chg="mod">
+            <ac:chgData name="Fei Yao" userId="0f76fc2f-86db-4f00-832a-b92dc6cb86c5" providerId="ADAL" clId="{3542449D-0F28-5F63-A95F-E350D95EFEF5}" dt="2026-01-17T17:03:18.292" v="52"/>
+            <ac:spMkLst>
+              <pc:docMk/>
+              <pc:sldMasterMk cId="2567449288" sldId="2147483660"/>
+              <pc:sldLayoutMk cId="2202309142" sldId="2147483664"/>
+              <ac:spMk id="3" creationId="{00000000-0000-0000-0000-000000000000}"/>
+            </ac:spMkLst>
+          </pc:spChg>
+          <pc:spChg chg="mod">
+            <ac:chgData name="Fei Yao" userId="0f76fc2f-86db-4f00-832a-b92dc6cb86c5" providerId="ADAL" clId="{3542449D-0F28-5F63-A95F-E350D95EFEF5}" dt="2026-01-17T17:03:18.292" v="52"/>
+            <ac:spMkLst>
+              <pc:docMk/>
+              <pc:sldMasterMk cId="2567449288" sldId="2147483660"/>
+              <pc:sldLayoutMk cId="2202309142" sldId="2147483664"/>
+              <ac:spMk id="4" creationId="{00000000-0000-0000-0000-000000000000}"/>
+            </ac:spMkLst>
+          </pc:spChg>
+        </pc:sldLayoutChg>
+        <pc:sldLayoutChg chg="modSp">
+          <pc:chgData name="Fei Yao" userId="0f76fc2f-86db-4f00-832a-b92dc6cb86c5" providerId="ADAL" clId="{3542449D-0F28-5F63-A95F-E350D95EFEF5}" dt="2026-01-17T17:03:18.292" v="52"/>
+          <pc:sldLayoutMkLst>
+            <pc:docMk/>
+            <pc:sldMasterMk cId="2567449288" sldId="2147483660"/>
+            <pc:sldLayoutMk cId="1910660356" sldId="2147483665"/>
+          </pc:sldLayoutMkLst>
+          <pc:spChg chg="mod">
+            <ac:chgData name="Fei Yao" userId="0f76fc2f-86db-4f00-832a-b92dc6cb86c5" providerId="ADAL" clId="{3542449D-0F28-5F63-A95F-E350D95EFEF5}" dt="2026-01-17T17:03:18.292" v="52"/>
+            <ac:spMkLst>
+              <pc:docMk/>
+              <pc:sldMasterMk cId="2567449288" sldId="2147483660"/>
+              <pc:sldLayoutMk cId="1910660356" sldId="2147483665"/>
+              <ac:spMk id="2" creationId="{00000000-0000-0000-0000-000000000000}"/>
+            </ac:spMkLst>
+          </pc:spChg>
+          <pc:spChg chg="mod">
+            <ac:chgData name="Fei Yao" userId="0f76fc2f-86db-4f00-832a-b92dc6cb86c5" providerId="ADAL" clId="{3542449D-0F28-5F63-A95F-E350D95EFEF5}" dt="2026-01-17T17:03:18.292" v="52"/>
+            <ac:spMkLst>
+              <pc:docMk/>
+              <pc:sldMasterMk cId="2567449288" sldId="2147483660"/>
+              <pc:sldLayoutMk cId="1910660356" sldId="2147483665"/>
+              <ac:spMk id="3" creationId="{00000000-0000-0000-0000-000000000000}"/>
+            </ac:spMkLst>
+          </pc:spChg>
+          <pc:spChg chg="mod">
+            <ac:chgData name="Fei Yao" userId="0f76fc2f-86db-4f00-832a-b92dc6cb86c5" providerId="ADAL" clId="{3542449D-0F28-5F63-A95F-E350D95EFEF5}" dt="2026-01-17T17:03:18.292" v="52"/>
+            <ac:spMkLst>
+              <pc:docMk/>
+              <pc:sldMasterMk cId="2567449288" sldId="2147483660"/>
+              <pc:sldLayoutMk cId="1910660356" sldId="2147483665"/>
+              <ac:spMk id="4" creationId="{00000000-0000-0000-0000-000000000000}"/>
+            </ac:spMkLst>
+          </pc:spChg>
+          <pc:spChg chg="mod">
+            <ac:chgData name="Fei Yao" userId="0f76fc2f-86db-4f00-832a-b92dc6cb86c5" providerId="ADAL" clId="{3542449D-0F28-5F63-A95F-E350D95EFEF5}" dt="2026-01-17T17:03:18.292" v="52"/>
+            <ac:spMkLst>
+              <pc:docMk/>
+              <pc:sldMasterMk cId="2567449288" sldId="2147483660"/>
+              <pc:sldLayoutMk cId="1910660356" sldId="2147483665"/>
+              <ac:spMk id="5" creationId="{00000000-0000-0000-0000-000000000000}"/>
+            </ac:spMkLst>
+          </pc:spChg>
+          <pc:spChg chg="mod">
+            <ac:chgData name="Fei Yao" userId="0f76fc2f-86db-4f00-832a-b92dc6cb86c5" providerId="ADAL" clId="{3542449D-0F28-5F63-A95F-E350D95EFEF5}" dt="2026-01-17T17:03:18.292" v="52"/>
+            <ac:spMkLst>
+              <pc:docMk/>
+              <pc:sldMasterMk cId="2567449288" sldId="2147483660"/>
+              <pc:sldLayoutMk cId="1910660356" sldId="2147483665"/>
+              <ac:spMk id="6" creationId="{00000000-0000-0000-0000-000000000000}"/>
+            </ac:spMkLst>
+          </pc:spChg>
+        </pc:sldLayoutChg>
+        <pc:sldLayoutChg chg="modSp">
+          <pc:chgData name="Fei Yao" userId="0f76fc2f-86db-4f00-832a-b92dc6cb86c5" providerId="ADAL" clId="{3542449D-0F28-5F63-A95F-E350D95EFEF5}" dt="2026-01-17T17:03:18.292" v="52"/>
+          <pc:sldLayoutMkLst>
+            <pc:docMk/>
+            <pc:sldMasterMk cId="2567449288" sldId="2147483660"/>
+            <pc:sldLayoutMk cId="467248445" sldId="2147483668"/>
+          </pc:sldLayoutMkLst>
+          <pc:spChg chg="mod">
+            <ac:chgData name="Fei Yao" userId="0f76fc2f-86db-4f00-832a-b92dc6cb86c5" providerId="ADAL" clId="{3542449D-0F28-5F63-A95F-E350D95EFEF5}" dt="2026-01-17T17:03:18.292" v="52"/>
+            <ac:spMkLst>
+              <pc:docMk/>
+              <pc:sldMasterMk cId="2567449288" sldId="2147483660"/>
+              <pc:sldLayoutMk cId="467248445" sldId="2147483668"/>
+              <ac:spMk id="2" creationId="{00000000-0000-0000-0000-000000000000}"/>
+            </ac:spMkLst>
+          </pc:spChg>
+          <pc:spChg chg="mod">
+            <ac:chgData name="Fei Yao" userId="0f76fc2f-86db-4f00-832a-b92dc6cb86c5" providerId="ADAL" clId="{3542449D-0F28-5F63-A95F-E350D95EFEF5}" dt="2026-01-17T17:03:18.292" v="52"/>
+            <ac:spMkLst>
+              <pc:docMk/>
+              <pc:sldMasterMk cId="2567449288" sldId="2147483660"/>
+              <pc:sldLayoutMk cId="467248445" sldId="2147483668"/>
+              <ac:spMk id="3" creationId="{00000000-0000-0000-0000-000000000000}"/>
+            </ac:spMkLst>
+          </pc:spChg>
+          <pc:spChg chg="mod">
+            <ac:chgData name="Fei Yao" userId="0f76fc2f-86db-4f00-832a-b92dc6cb86c5" providerId="ADAL" clId="{3542449D-0F28-5F63-A95F-E350D95EFEF5}" dt="2026-01-17T17:03:18.292" v="52"/>
+            <ac:spMkLst>
+              <pc:docMk/>
+              <pc:sldMasterMk cId="2567449288" sldId="2147483660"/>
+              <pc:sldLayoutMk cId="467248445" sldId="2147483668"/>
+              <ac:spMk id="4" creationId="{00000000-0000-0000-0000-000000000000}"/>
+            </ac:spMkLst>
+          </pc:spChg>
+        </pc:sldLayoutChg>
+        <pc:sldLayoutChg chg="modSp">
+          <pc:chgData name="Fei Yao" userId="0f76fc2f-86db-4f00-832a-b92dc6cb86c5" providerId="ADAL" clId="{3542449D-0F28-5F63-A95F-E350D95EFEF5}" dt="2026-01-17T17:03:18.292" v="52"/>
+          <pc:sldLayoutMkLst>
+            <pc:docMk/>
+            <pc:sldMasterMk cId="2567449288" sldId="2147483660"/>
+            <pc:sldLayoutMk cId="1152997500" sldId="2147483669"/>
+          </pc:sldLayoutMkLst>
+          <pc:spChg chg="mod">
+            <ac:chgData name="Fei Yao" userId="0f76fc2f-86db-4f00-832a-b92dc6cb86c5" providerId="ADAL" clId="{3542449D-0F28-5F63-A95F-E350D95EFEF5}" dt="2026-01-17T17:03:18.292" v="52"/>
+            <ac:spMkLst>
+              <pc:docMk/>
+              <pc:sldMasterMk cId="2567449288" sldId="2147483660"/>
+              <pc:sldLayoutMk cId="1152997500" sldId="2147483669"/>
+              <ac:spMk id="2" creationId="{00000000-0000-0000-0000-000000000000}"/>
+            </ac:spMkLst>
+          </pc:spChg>
+          <pc:spChg chg="mod">
+            <ac:chgData name="Fei Yao" userId="0f76fc2f-86db-4f00-832a-b92dc6cb86c5" providerId="ADAL" clId="{3542449D-0F28-5F63-A95F-E350D95EFEF5}" dt="2026-01-17T17:03:18.292" v="52"/>
+            <ac:spMkLst>
+              <pc:docMk/>
+              <pc:sldMasterMk cId="2567449288" sldId="2147483660"/>
+              <pc:sldLayoutMk cId="1152997500" sldId="2147483669"/>
+              <ac:spMk id="3" creationId="{00000000-0000-0000-0000-000000000000}"/>
+            </ac:spMkLst>
+          </pc:spChg>
+          <pc:spChg chg="mod">
+            <ac:chgData name="Fei Yao" userId="0f76fc2f-86db-4f00-832a-b92dc6cb86c5" providerId="ADAL" clId="{3542449D-0F28-5F63-A95F-E350D95EFEF5}" dt="2026-01-17T17:03:18.292" v="52"/>
+            <ac:spMkLst>
+              <pc:docMk/>
+              <pc:sldMasterMk cId="2567449288" sldId="2147483660"/>
+              <pc:sldLayoutMk cId="1152997500" sldId="2147483669"/>
+              <ac:spMk id="4" creationId="{00000000-0000-0000-0000-000000000000}"/>
+            </ac:spMkLst>
+          </pc:spChg>
+        </pc:sldLayoutChg>
+        <pc:sldLayoutChg chg="modSp">
+          <pc:chgData name="Fei Yao" userId="0f76fc2f-86db-4f00-832a-b92dc6cb86c5" providerId="ADAL" clId="{3542449D-0F28-5F63-A95F-E350D95EFEF5}" dt="2026-01-17T17:03:18.292" v="52"/>
+          <pc:sldLayoutMkLst>
+            <pc:docMk/>
+            <pc:sldMasterMk cId="2567449288" sldId="2147483660"/>
+            <pc:sldLayoutMk cId="1971221869" sldId="2147483671"/>
+          </pc:sldLayoutMkLst>
+          <pc:spChg chg="mod">
+            <ac:chgData name="Fei Yao" userId="0f76fc2f-86db-4f00-832a-b92dc6cb86c5" providerId="ADAL" clId="{3542449D-0F28-5F63-A95F-E350D95EFEF5}" dt="2026-01-17T17:03:18.292" v="52"/>
+            <ac:spMkLst>
+              <pc:docMk/>
+              <pc:sldMasterMk cId="2567449288" sldId="2147483660"/>
+              <pc:sldLayoutMk cId="1971221869" sldId="2147483671"/>
+              <ac:spMk id="2" creationId="{00000000-0000-0000-0000-000000000000}"/>
+            </ac:spMkLst>
+          </pc:spChg>
+          <pc:spChg chg="mod">
+            <ac:chgData name="Fei Yao" userId="0f76fc2f-86db-4f00-832a-b92dc6cb86c5" providerId="ADAL" clId="{3542449D-0F28-5F63-A95F-E350D95EFEF5}" dt="2026-01-17T17:03:18.292" v="52"/>
+            <ac:spMkLst>
+              <pc:docMk/>
+              <pc:sldMasterMk cId="2567449288" sldId="2147483660"/>
+              <pc:sldLayoutMk cId="1971221869" sldId="2147483671"/>
+              <ac:spMk id="3" creationId="{00000000-0000-0000-0000-000000000000}"/>
+            </ac:spMkLst>
+          </pc:spChg>
+        </pc:sldLayoutChg>
+      </pc:sldMasterChg>
+      <pc:sldMasterChg chg="modSp modSldLayout">
+        <pc:chgData name="Fei Yao" userId="0f76fc2f-86db-4f00-832a-b92dc6cb86c5" providerId="ADAL" clId="{3542449D-0F28-5F63-A95F-E350D95EFEF5}" dt="2026-01-17T17:22:55.301" v="306"/>
+        <pc:sldMasterMkLst>
+          <pc:docMk/>
+          <pc:sldMasterMk cId="4084635865" sldId="2147483672"/>
+        </pc:sldMasterMkLst>
+        <pc:spChg chg="mod">
+          <ac:chgData name="Fei Yao" userId="0f76fc2f-86db-4f00-832a-b92dc6cb86c5" providerId="ADAL" clId="{3542449D-0F28-5F63-A95F-E350D95EFEF5}" dt="2026-01-17T17:22:55.301" v="306"/>
+          <ac:spMkLst>
+            <pc:docMk/>
+            <pc:sldMasterMk cId="4084635865" sldId="2147483672"/>
+            <ac:spMk id="2" creationId="{00000000-0000-0000-0000-000000000000}"/>
+          </ac:spMkLst>
+        </pc:spChg>
+        <pc:spChg chg="mod">
+          <ac:chgData name="Fei Yao" userId="0f76fc2f-86db-4f00-832a-b92dc6cb86c5" providerId="ADAL" clId="{3542449D-0F28-5F63-A95F-E350D95EFEF5}" dt="2026-01-17T17:22:55.301" v="306"/>
+          <ac:spMkLst>
+            <pc:docMk/>
+            <pc:sldMasterMk cId="4084635865" sldId="2147483672"/>
+            <ac:spMk id="3" creationId="{00000000-0000-0000-0000-000000000000}"/>
+          </ac:spMkLst>
+        </pc:spChg>
+        <pc:spChg chg="mod">
+          <ac:chgData name="Fei Yao" userId="0f76fc2f-86db-4f00-832a-b92dc6cb86c5" providerId="ADAL" clId="{3542449D-0F28-5F63-A95F-E350D95EFEF5}" dt="2026-01-17T17:22:55.301" v="306"/>
+          <ac:spMkLst>
+            <pc:docMk/>
+            <pc:sldMasterMk cId="4084635865" sldId="2147483672"/>
+            <ac:spMk id="4" creationId="{00000000-0000-0000-0000-000000000000}"/>
+          </ac:spMkLst>
+        </pc:spChg>
+        <pc:spChg chg="mod">
+          <ac:chgData name="Fei Yao" userId="0f76fc2f-86db-4f00-832a-b92dc6cb86c5" providerId="ADAL" clId="{3542449D-0F28-5F63-A95F-E350D95EFEF5}" dt="2026-01-17T17:22:55.301" v="306"/>
+          <ac:spMkLst>
+            <pc:docMk/>
+            <pc:sldMasterMk cId="4084635865" sldId="2147483672"/>
+            <ac:spMk id="5" creationId="{00000000-0000-0000-0000-000000000000}"/>
+          </ac:spMkLst>
+        </pc:spChg>
+        <pc:spChg chg="mod">
+          <ac:chgData name="Fei Yao" userId="0f76fc2f-86db-4f00-832a-b92dc6cb86c5" providerId="ADAL" clId="{3542449D-0F28-5F63-A95F-E350D95EFEF5}" dt="2026-01-17T17:22:55.301" v="306"/>
+          <ac:spMkLst>
+            <pc:docMk/>
+            <pc:sldMasterMk cId="4084635865" sldId="2147483672"/>
+            <ac:spMk id="6" creationId="{00000000-0000-0000-0000-000000000000}"/>
+          </ac:spMkLst>
+        </pc:spChg>
+        <pc:sldLayoutChg chg="modSp">
+          <pc:chgData name="Fei Yao" userId="0f76fc2f-86db-4f00-832a-b92dc6cb86c5" providerId="ADAL" clId="{3542449D-0F28-5F63-A95F-E350D95EFEF5}" dt="2026-01-17T17:22:55.301" v="306"/>
+          <pc:sldLayoutMkLst>
+            <pc:docMk/>
+            <pc:sldMasterMk cId="4084635865" sldId="2147483672"/>
+            <pc:sldLayoutMk cId="501031944" sldId="2147483673"/>
+          </pc:sldLayoutMkLst>
+          <pc:spChg chg="mod">
+            <ac:chgData name="Fei Yao" userId="0f76fc2f-86db-4f00-832a-b92dc6cb86c5" providerId="ADAL" clId="{3542449D-0F28-5F63-A95F-E350D95EFEF5}" dt="2026-01-17T17:22:55.301" v="306"/>
+            <ac:spMkLst>
+              <pc:docMk/>
+              <pc:sldMasterMk cId="4084635865" sldId="2147483672"/>
+              <pc:sldLayoutMk cId="501031944" sldId="2147483673"/>
+              <ac:spMk id="2" creationId="{00000000-0000-0000-0000-000000000000}"/>
+            </ac:spMkLst>
+          </pc:spChg>
+          <pc:spChg chg="mod">
+            <ac:chgData name="Fei Yao" userId="0f76fc2f-86db-4f00-832a-b92dc6cb86c5" providerId="ADAL" clId="{3542449D-0F28-5F63-A95F-E350D95EFEF5}" dt="2026-01-17T17:22:55.301" v="306"/>
+            <ac:spMkLst>
+              <pc:docMk/>
+              <pc:sldMasterMk cId="4084635865" sldId="2147483672"/>
+              <pc:sldLayoutMk cId="501031944" sldId="2147483673"/>
+              <ac:spMk id="3" creationId="{00000000-0000-0000-0000-000000000000}"/>
+            </ac:spMkLst>
+          </pc:spChg>
+        </pc:sldLayoutChg>
+        <pc:sldLayoutChg chg="modSp">
+          <pc:chgData name="Fei Yao" userId="0f76fc2f-86db-4f00-832a-b92dc6cb86c5" providerId="ADAL" clId="{3542449D-0F28-5F63-A95F-E350D95EFEF5}" dt="2026-01-17T17:22:55.301" v="306"/>
+          <pc:sldLayoutMkLst>
+            <pc:docMk/>
+            <pc:sldMasterMk cId="4084635865" sldId="2147483672"/>
+            <pc:sldLayoutMk cId="1718565823" sldId="2147483675"/>
+          </pc:sldLayoutMkLst>
+          <pc:spChg chg="mod">
+            <ac:chgData name="Fei Yao" userId="0f76fc2f-86db-4f00-832a-b92dc6cb86c5" providerId="ADAL" clId="{3542449D-0F28-5F63-A95F-E350D95EFEF5}" dt="2026-01-17T17:22:55.301" v="306"/>
+            <ac:spMkLst>
+              <pc:docMk/>
+              <pc:sldMasterMk cId="4084635865" sldId="2147483672"/>
+              <pc:sldLayoutMk cId="1718565823" sldId="2147483675"/>
+              <ac:spMk id="2" creationId="{00000000-0000-0000-0000-000000000000}"/>
+            </ac:spMkLst>
+          </pc:spChg>
+          <pc:spChg chg="mod">
+            <ac:chgData name="Fei Yao" userId="0f76fc2f-86db-4f00-832a-b92dc6cb86c5" providerId="ADAL" clId="{3542449D-0F28-5F63-A95F-E350D95EFEF5}" dt="2026-01-17T17:22:55.301" v="306"/>
+            <ac:spMkLst>
+              <pc:docMk/>
+              <pc:sldMasterMk cId="4084635865" sldId="2147483672"/>
+              <pc:sldLayoutMk cId="1718565823" sldId="2147483675"/>
+              <ac:spMk id="3" creationId="{00000000-0000-0000-0000-000000000000}"/>
+            </ac:spMkLst>
+          </pc:spChg>
+        </pc:sldLayoutChg>
+        <pc:sldLayoutChg chg="modSp">
+          <pc:chgData name="Fei Yao" userId="0f76fc2f-86db-4f00-832a-b92dc6cb86c5" providerId="ADAL" clId="{3542449D-0F28-5F63-A95F-E350D95EFEF5}" dt="2026-01-17T17:22:55.301" v="306"/>
+          <pc:sldLayoutMkLst>
+            <pc:docMk/>
+            <pc:sldMasterMk cId="4084635865" sldId="2147483672"/>
+            <pc:sldLayoutMk cId="3330536153" sldId="2147483676"/>
+          </pc:sldLayoutMkLst>
+          <pc:spChg chg="mod">
+            <ac:chgData name="Fei Yao" userId="0f76fc2f-86db-4f00-832a-b92dc6cb86c5" providerId="ADAL" clId="{3542449D-0F28-5F63-A95F-E350D95EFEF5}" dt="2026-01-17T17:22:55.301" v="306"/>
+            <ac:spMkLst>
+              <pc:docMk/>
+              <pc:sldMasterMk cId="4084635865" sldId="2147483672"/>
+              <pc:sldLayoutMk cId="3330536153" sldId="2147483676"/>
+              <ac:spMk id="3" creationId="{00000000-0000-0000-0000-000000000000}"/>
+            </ac:spMkLst>
+          </pc:spChg>
+          <pc:spChg chg="mod">
+            <ac:chgData name="Fei Yao" userId="0f76fc2f-86db-4f00-832a-b92dc6cb86c5" providerId="ADAL" clId="{3542449D-0F28-5F63-A95F-E350D95EFEF5}" dt="2026-01-17T17:22:55.301" v="306"/>
+            <ac:spMkLst>
+              <pc:docMk/>
+              <pc:sldMasterMk cId="4084635865" sldId="2147483672"/>
+              <pc:sldLayoutMk cId="3330536153" sldId="2147483676"/>
+              <ac:spMk id="4" creationId="{00000000-0000-0000-0000-000000000000}"/>
+            </ac:spMkLst>
+          </pc:spChg>
+        </pc:sldLayoutChg>
+        <pc:sldLayoutChg chg="modSp">
+          <pc:chgData name="Fei Yao" userId="0f76fc2f-86db-4f00-832a-b92dc6cb86c5" providerId="ADAL" clId="{3542449D-0F28-5F63-A95F-E350D95EFEF5}" dt="2026-01-17T17:22:55.301" v="306"/>
+          <pc:sldLayoutMkLst>
+            <pc:docMk/>
+            <pc:sldMasterMk cId="4084635865" sldId="2147483672"/>
+            <pc:sldLayoutMk cId="2854878244" sldId="2147483677"/>
+          </pc:sldLayoutMkLst>
+          <pc:spChg chg="mod">
+            <ac:chgData name="Fei Yao" userId="0f76fc2f-86db-4f00-832a-b92dc6cb86c5" providerId="ADAL" clId="{3542449D-0F28-5F63-A95F-E350D95EFEF5}" dt="2026-01-17T17:22:55.301" v="306"/>
+            <ac:spMkLst>
+              <pc:docMk/>
+              <pc:sldMasterMk cId="4084635865" sldId="2147483672"/>
+              <pc:sldLayoutMk cId="2854878244" sldId="2147483677"/>
+              <ac:spMk id="2" creationId="{00000000-0000-0000-0000-000000000000}"/>
+            </ac:spMkLst>
+          </pc:spChg>
+          <pc:spChg chg="mod">
+            <ac:chgData name="Fei Yao" userId="0f76fc2f-86db-4f00-832a-b92dc6cb86c5" providerId="ADAL" clId="{3542449D-0F28-5F63-A95F-E350D95EFEF5}" dt="2026-01-17T17:22:55.301" v="306"/>
+            <ac:spMkLst>
+              <pc:docMk/>
+              <pc:sldMasterMk cId="4084635865" sldId="2147483672"/>
+              <pc:sldLayoutMk cId="2854878244" sldId="2147483677"/>
+              <ac:spMk id="3" creationId="{00000000-0000-0000-0000-000000000000}"/>
+            </ac:spMkLst>
+          </pc:spChg>
+          <pc:spChg chg="mod">
+            <ac:chgData name="Fei Yao" userId="0f76fc2f-86db-4f00-832a-b92dc6cb86c5" providerId="ADAL" clId="{3542449D-0F28-5F63-A95F-E350D95EFEF5}" dt="2026-01-17T17:22:55.301" v="306"/>
+            <ac:spMkLst>
+              <pc:docMk/>
+              <pc:sldMasterMk cId="4084635865" sldId="2147483672"/>
+              <pc:sldLayoutMk cId="2854878244" sldId="2147483677"/>
+              <ac:spMk id="4" creationId="{00000000-0000-0000-0000-000000000000}"/>
+            </ac:spMkLst>
+          </pc:spChg>
+          <pc:spChg chg="mod">
+            <ac:chgData name="Fei Yao" userId="0f76fc2f-86db-4f00-832a-b92dc6cb86c5" providerId="ADAL" clId="{3542449D-0F28-5F63-A95F-E350D95EFEF5}" dt="2026-01-17T17:22:55.301" v="306"/>
+            <ac:spMkLst>
+              <pc:docMk/>
+              <pc:sldMasterMk cId="4084635865" sldId="2147483672"/>
+              <pc:sldLayoutMk cId="2854878244" sldId="2147483677"/>
+              <ac:spMk id="5" creationId="{00000000-0000-0000-0000-000000000000}"/>
+            </ac:spMkLst>
+          </pc:spChg>
+          <pc:spChg chg="mod">
+            <ac:chgData name="Fei Yao" userId="0f76fc2f-86db-4f00-832a-b92dc6cb86c5" providerId="ADAL" clId="{3542449D-0F28-5F63-A95F-E350D95EFEF5}" dt="2026-01-17T17:22:55.301" v="306"/>
+            <ac:spMkLst>
+              <pc:docMk/>
+              <pc:sldMasterMk cId="4084635865" sldId="2147483672"/>
+              <pc:sldLayoutMk cId="2854878244" sldId="2147483677"/>
+              <ac:spMk id="6" creationId="{00000000-0000-0000-0000-000000000000}"/>
+            </ac:spMkLst>
+          </pc:spChg>
+        </pc:sldLayoutChg>
+        <pc:sldLayoutChg chg="modSp">
+          <pc:chgData name="Fei Yao" userId="0f76fc2f-86db-4f00-832a-b92dc6cb86c5" providerId="ADAL" clId="{3542449D-0F28-5F63-A95F-E350D95EFEF5}" dt="2026-01-17T17:22:55.301" v="306"/>
+          <pc:sldLayoutMkLst>
+            <pc:docMk/>
+            <pc:sldMasterMk cId="4084635865" sldId="2147483672"/>
+            <pc:sldLayoutMk cId="551084962" sldId="2147483680"/>
+          </pc:sldLayoutMkLst>
+          <pc:spChg chg="mod">
+            <ac:chgData name="Fei Yao" userId="0f76fc2f-86db-4f00-832a-b92dc6cb86c5" providerId="ADAL" clId="{3542449D-0F28-5F63-A95F-E350D95EFEF5}" dt="2026-01-17T17:22:55.301" v="306"/>
+            <ac:spMkLst>
+              <pc:docMk/>
+              <pc:sldMasterMk cId="4084635865" sldId="2147483672"/>
+              <pc:sldLayoutMk cId="551084962" sldId="2147483680"/>
+              <ac:spMk id="2" creationId="{00000000-0000-0000-0000-000000000000}"/>
+            </ac:spMkLst>
+          </pc:spChg>
+          <pc:spChg chg="mod">
+            <ac:chgData name="Fei Yao" userId="0f76fc2f-86db-4f00-832a-b92dc6cb86c5" providerId="ADAL" clId="{3542449D-0F28-5F63-A95F-E350D95EFEF5}" dt="2026-01-17T17:22:55.301" v="306"/>
+            <ac:spMkLst>
+              <pc:docMk/>
+              <pc:sldMasterMk cId="4084635865" sldId="2147483672"/>
+              <pc:sldLayoutMk cId="551084962" sldId="2147483680"/>
+              <ac:spMk id="3" creationId="{00000000-0000-0000-0000-000000000000}"/>
+            </ac:spMkLst>
+          </pc:spChg>
+          <pc:spChg chg="mod">
+            <ac:chgData name="Fei Yao" userId="0f76fc2f-86db-4f00-832a-b92dc6cb86c5" providerId="ADAL" clId="{3542449D-0F28-5F63-A95F-E350D95EFEF5}" dt="2026-01-17T17:22:55.301" v="306"/>
+            <ac:spMkLst>
+              <pc:docMk/>
+              <pc:sldMasterMk cId="4084635865" sldId="2147483672"/>
+              <pc:sldLayoutMk cId="551084962" sldId="2147483680"/>
+              <ac:spMk id="4" creationId="{00000000-0000-0000-0000-000000000000}"/>
+            </ac:spMkLst>
+          </pc:spChg>
+        </pc:sldLayoutChg>
+        <pc:sldLayoutChg chg="modSp">
+          <pc:chgData name="Fei Yao" userId="0f76fc2f-86db-4f00-832a-b92dc6cb86c5" providerId="ADAL" clId="{3542449D-0F28-5F63-A95F-E350D95EFEF5}" dt="2026-01-17T17:22:55.301" v="306"/>
+          <pc:sldLayoutMkLst>
+            <pc:docMk/>
+            <pc:sldMasterMk cId="4084635865" sldId="2147483672"/>
+            <pc:sldLayoutMk cId="2993806931" sldId="2147483681"/>
+          </pc:sldLayoutMkLst>
+          <pc:spChg chg="mod">
+            <ac:chgData name="Fei Yao" userId="0f76fc2f-86db-4f00-832a-b92dc6cb86c5" providerId="ADAL" clId="{3542449D-0F28-5F63-A95F-E350D95EFEF5}" dt="2026-01-17T17:22:55.301" v="306"/>
+            <ac:spMkLst>
+              <pc:docMk/>
+              <pc:sldMasterMk cId="4084635865" sldId="2147483672"/>
+              <pc:sldLayoutMk cId="2993806931" sldId="2147483681"/>
+              <ac:spMk id="2" creationId="{00000000-0000-0000-0000-000000000000}"/>
+            </ac:spMkLst>
+          </pc:spChg>
+          <pc:spChg chg="mod">
+            <ac:chgData name="Fei Yao" userId="0f76fc2f-86db-4f00-832a-b92dc6cb86c5" providerId="ADAL" clId="{3542449D-0F28-5F63-A95F-E350D95EFEF5}" dt="2026-01-17T17:22:55.301" v="306"/>
+            <ac:spMkLst>
+              <pc:docMk/>
+              <pc:sldMasterMk cId="4084635865" sldId="2147483672"/>
+              <pc:sldLayoutMk cId="2993806931" sldId="2147483681"/>
+              <ac:spMk id="3" creationId="{00000000-0000-0000-0000-000000000000}"/>
+            </ac:spMkLst>
+          </pc:spChg>
+          <pc:spChg chg="mod">
+            <ac:chgData name="Fei Yao" userId="0f76fc2f-86db-4f00-832a-b92dc6cb86c5" providerId="ADAL" clId="{3542449D-0F28-5F63-A95F-E350D95EFEF5}" dt="2026-01-17T17:22:55.301" v="306"/>
+            <ac:spMkLst>
+              <pc:docMk/>
+              <pc:sldMasterMk cId="4084635865" sldId="2147483672"/>
+              <pc:sldLayoutMk cId="2993806931" sldId="2147483681"/>
+              <ac:spMk id="4" creationId="{00000000-0000-0000-0000-000000000000}"/>
+            </ac:spMkLst>
+          </pc:spChg>
+        </pc:sldLayoutChg>
+        <pc:sldLayoutChg chg="modSp">
+          <pc:chgData name="Fei Yao" userId="0f76fc2f-86db-4f00-832a-b92dc6cb86c5" providerId="ADAL" clId="{3542449D-0F28-5F63-A95F-E350D95EFEF5}" dt="2026-01-17T17:22:55.301" v="306"/>
+          <pc:sldLayoutMkLst>
+            <pc:docMk/>
+            <pc:sldMasterMk cId="4084635865" sldId="2147483672"/>
+            <pc:sldLayoutMk cId="2916759855" sldId="2147483683"/>
+          </pc:sldLayoutMkLst>
+          <pc:spChg chg="mod">
+            <ac:chgData name="Fei Yao" userId="0f76fc2f-86db-4f00-832a-b92dc6cb86c5" providerId="ADAL" clId="{3542449D-0F28-5F63-A95F-E350D95EFEF5}" dt="2026-01-17T17:22:55.301" v="306"/>
+            <ac:spMkLst>
+              <pc:docMk/>
+              <pc:sldMasterMk cId="4084635865" sldId="2147483672"/>
+              <pc:sldLayoutMk cId="2916759855" sldId="2147483683"/>
+              <ac:spMk id="2" creationId="{00000000-0000-0000-0000-000000000000}"/>
+            </ac:spMkLst>
+          </pc:spChg>
+          <pc:spChg chg="mod">
+            <ac:chgData name="Fei Yao" userId="0f76fc2f-86db-4f00-832a-b92dc6cb86c5" providerId="ADAL" clId="{3542449D-0F28-5F63-A95F-E350D95EFEF5}" dt="2026-01-17T17:22:55.301" v="306"/>
+            <ac:spMkLst>
+              <pc:docMk/>
+              <pc:sldMasterMk cId="4084635865" sldId="2147483672"/>
+              <pc:sldLayoutMk cId="2916759855" sldId="2147483683"/>
+              <ac:spMk id="3" creationId="{00000000-0000-0000-0000-000000000000}"/>
+            </ac:spMkLst>
+          </pc:spChg>
+        </pc:sldLayoutChg>
+      </pc:sldMasterChg>
     </pc:docChg>
   </pc:docChgLst>
 </pc:chgInfo>
@@ -249,7 +1110,7 @@
           <a:p>
             <a:fld id="{2D5B012D-04D8-C041-B97B-CC7FDEBE0565}" type="datetimeFigureOut">
               <a:rPr lang="en-US" smtClean="0"/>
-              <a:t>12/19/25</a:t>
+              <a:t>1/17/26</a:t>
             </a:fld>
             <a:endParaRPr lang="en-US"/>
           </a:p>
@@ -267,8 +1128,8 @@
         </p:nvSpPr>
         <p:spPr>
           <a:xfrm>
-            <a:off x="76200" y="1143000"/>
-            <a:ext cx="6705600" cy="3086100"/>
+            <a:off x="-131763" y="1143000"/>
+            <a:ext cx="7121526" cy="3086100"/>
           </a:xfrm>
           <a:prstGeom prst="rect">
             <a:avLst/>
@@ -544,7 +1405,12 @@
             <p:ph type="sldImg"/>
           </p:nvPr>
         </p:nvSpPr>
-        <p:spPr/>
+        <p:spPr>
+          <a:xfrm>
+            <a:off x="-131763" y="1143000"/>
+            <a:ext cx="7121526" cy="3086100"/>
+          </a:xfrm>
+        </p:spPr>
       </p:sp>
       <p:sp>
         <p:nvSpPr>
@@ -630,15 +1496,15 @@
         </p:nvSpPr>
         <p:spPr>
           <a:xfrm>
-            <a:off x="1524000" y="917896"/>
-            <a:ext cx="9144000" cy="1952637"/>
+            <a:off x="1246386" y="706933"/>
+            <a:ext cx="7478316" cy="1503857"/>
           </a:xfrm>
         </p:spPr>
         <p:txBody>
           <a:bodyPr anchor="b"/>
           <a:lstStyle>
             <a:lvl1pPr algn="ctr">
-              <a:defRPr sz="4907"/>
+              <a:defRPr sz="3779"/>
             </a:lvl1pPr>
           </a:lstStyle>
           <a:p>
@@ -662,8 +1528,8 @@
         </p:nvSpPr>
         <p:spPr>
           <a:xfrm>
-            <a:off x="1524000" y="2945834"/>
-            <a:ext cx="9144000" cy="1354122"/>
+            <a:off x="1246386" y="2268784"/>
+            <a:ext cx="7478316" cy="1042900"/>
           </a:xfrm>
         </p:spPr>
         <p:txBody>
@@ -671,39 +1537,39 @@
           <a:lstStyle>
             <a:lvl1pPr marL="0" indent="0" algn="ctr">
               <a:buNone/>
-              <a:defRPr sz="1963"/>
+              <a:defRPr sz="1512"/>
             </a:lvl1pPr>
-            <a:lvl2pPr marL="373898" indent="0" algn="ctr">
+            <a:lvl2pPr marL="287990" indent="0" algn="ctr">
               <a:buNone/>
-              <a:defRPr sz="1636"/>
+              <a:defRPr sz="1260"/>
             </a:lvl2pPr>
-            <a:lvl3pPr marL="747796" indent="0" algn="ctr">
+            <a:lvl3pPr marL="575981" indent="0" algn="ctr">
               <a:buNone/>
-              <a:defRPr sz="1472"/>
+              <a:defRPr sz="1134"/>
             </a:lvl3pPr>
-            <a:lvl4pPr marL="1121694" indent="0" algn="ctr">
+            <a:lvl4pPr marL="863971" indent="0" algn="ctr">
               <a:buNone/>
-              <a:defRPr sz="1308"/>
+              <a:defRPr sz="1008"/>
             </a:lvl4pPr>
-            <a:lvl5pPr marL="1495593" indent="0" algn="ctr">
+            <a:lvl5pPr marL="1151961" indent="0" algn="ctr">
               <a:buNone/>
-              <a:defRPr sz="1308"/>
+              <a:defRPr sz="1008"/>
             </a:lvl5pPr>
-            <a:lvl6pPr marL="1869491" indent="0" algn="ctr">
+            <a:lvl6pPr marL="1439951" indent="0" algn="ctr">
               <a:buNone/>
-              <a:defRPr sz="1308"/>
+              <a:defRPr sz="1008"/>
             </a:lvl6pPr>
-            <a:lvl7pPr marL="2243389" indent="0" algn="ctr">
+            <a:lvl7pPr marL="1727942" indent="0" algn="ctr">
               <a:buNone/>
-              <a:defRPr sz="1308"/>
+              <a:defRPr sz="1008"/>
             </a:lvl7pPr>
-            <a:lvl8pPr marL="2617287" indent="0" algn="ctr">
+            <a:lvl8pPr marL="2015932" indent="0" algn="ctr">
               <a:buNone/>
-              <a:defRPr sz="1308"/>
+              <a:defRPr sz="1008"/>
             </a:lvl8pPr>
-            <a:lvl9pPr marL="2991185" indent="0" algn="ctr">
+            <a:lvl9pPr marL="2303922" indent="0" algn="ctr">
               <a:buNone/>
-              <a:defRPr sz="1308"/>
+              <a:defRPr sz="1008"/>
             </a:lvl9pPr>
           </a:lstStyle>
           <a:p>
@@ -732,7 +1598,7 @@
           <a:p>
             <a:fld id="{D1C87F3C-6FA4-D54F-AEDE-BC3ADE73DCD6}" type="datetimeFigureOut">
               <a:rPr lang="en-US" smtClean="0"/>
-              <a:t>12/19/25</a:t>
+              <a:t>1/17/26</a:t>
             </a:fld>
             <a:endParaRPr lang="en-US"/>
           </a:p>
@@ -783,7 +1649,7 @@
     </p:spTree>
     <p:extLst>
       <p:ext uri="{BB962C8B-B14F-4D97-AF65-F5344CB8AC3E}">
-        <p14:creationId xmlns:p14="http://schemas.microsoft.com/office/powerpoint/2010/main" val="2769730494"/>
+        <p14:creationId xmlns:p14="http://schemas.microsoft.com/office/powerpoint/2010/main" val="769498150"/>
       </p:ext>
     </p:extLst>
   </p:cSld>
@@ -902,7 +1768,7 @@
           <a:p>
             <a:fld id="{D1C87F3C-6FA4-D54F-AEDE-BC3ADE73DCD6}" type="datetimeFigureOut">
               <a:rPr lang="en-US" smtClean="0"/>
-              <a:t>12/19/25</a:t>
+              <a:t>1/17/26</a:t>
             </a:fld>
             <a:endParaRPr lang="en-US"/>
           </a:p>
@@ -953,7 +1819,7 @@
     </p:spTree>
     <p:extLst>
       <p:ext uri="{BB962C8B-B14F-4D97-AF65-F5344CB8AC3E}">
-        <p14:creationId xmlns:p14="http://schemas.microsoft.com/office/powerpoint/2010/main" val="2664593693"/>
+        <p14:creationId xmlns:p14="http://schemas.microsoft.com/office/powerpoint/2010/main" val="1451800506"/>
       </p:ext>
     </p:extLst>
   </p:cSld>
@@ -992,8 +1858,8 @@
         </p:nvSpPr>
         <p:spPr>
           <a:xfrm>
-            <a:off x="8724900" y="298608"/>
-            <a:ext cx="2628900" cy="4753061"/>
+            <a:off x="7135560" y="229978"/>
+            <a:ext cx="2150016" cy="3660651"/>
           </a:xfrm>
         </p:spPr>
         <p:txBody>
@@ -1020,8 +1886,8 @@
         </p:nvSpPr>
         <p:spPr>
           <a:xfrm>
-            <a:off x="838200" y="298608"/>
-            <a:ext cx="7734300" cy="4753061"/>
+            <a:off x="685512" y="229978"/>
+            <a:ext cx="6325409" cy="3660651"/>
           </a:xfrm>
         </p:spPr>
         <p:txBody>
@@ -1082,7 +1948,7 @@
           <a:p>
             <a:fld id="{D1C87F3C-6FA4-D54F-AEDE-BC3ADE73DCD6}" type="datetimeFigureOut">
               <a:rPr lang="en-US" smtClean="0"/>
-              <a:t>12/19/25</a:t>
+              <a:t>1/17/26</a:t>
             </a:fld>
             <a:endParaRPr lang="en-US"/>
           </a:p>
@@ -1133,7 +1999,7 @@
     </p:spTree>
     <p:extLst>
       <p:ext uri="{BB962C8B-B14F-4D97-AF65-F5344CB8AC3E}">
-        <p14:creationId xmlns:p14="http://schemas.microsoft.com/office/powerpoint/2010/main" val="1971221869"/>
+        <p14:creationId xmlns:p14="http://schemas.microsoft.com/office/powerpoint/2010/main" val="3453839713"/>
       </p:ext>
     </p:extLst>
   </p:cSld>
@@ -1252,7 +2118,7 @@
           <a:p>
             <a:fld id="{D1C87F3C-6FA4-D54F-AEDE-BC3ADE73DCD6}" type="datetimeFigureOut">
               <a:rPr lang="en-US" smtClean="0"/>
-              <a:t>12/19/25</a:t>
+              <a:t>1/17/26</a:t>
             </a:fld>
             <a:endParaRPr lang="en-US"/>
           </a:p>
@@ -1303,7 +2169,7 @@
     </p:spTree>
     <p:extLst>
       <p:ext uri="{BB962C8B-B14F-4D97-AF65-F5344CB8AC3E}">
-        <p14:creationId xmlns:p14="http://schemas.microsoft.com/office/powerpoint/2010/main" val="1694372914"/>
+        <p14:creationId xmlns:p14="http://schemas.microsoft.com/office/powerpoint/2010/main" val="3152399544"/>
       </p:ext>
     </p:extLst>
   </p:cSld>
@@ -1342,15 +2208,15 @@
         </p:nvSpPr>
         <p:spPr>
           <a:xfrm>
-            <a:off x="831850" y="1398266"/>
-            <a:ext cx="10515600" cy="2333037"/>
+            <a:off x="680319" y="1076898"/>
+            <a:ext cx="8600063" cy="1796828"/>
           </a:xfrm>
         </p:spPr>
         <p:txBody>
           <a:bodyPr anchor="b"/>
           <a:lstStyle>
             <a:lvl1pPr>
-              <a:defRPr sz="4907"/>
+              <a:defRPr sz="3779"/>
             </a:lvl1pPr>
           </a:lstStyle>
           <a:p>
@@ -1374,8 +2240,8 @@
         </p:nvSpPr>
         <p:spPr>
           <a:xfrm>
-            <a:off x="831850" y="3753374"/>
-            <a:ext cx="10515600" cy="1226889"/>
+            <a:off x="680319" y="2890725"/>
+            <a:ext cx="8600063" cy="944910"/>
           </a:xfrm>
         </p:spPr>
         <p:txBody>
@@ -1383,7 +2249,7 @@
           <a:lstStyle>
             <a:lvl1pPr marL="0" indent="0">
               <a:buNone/>
-              <a:defRPr sz="1963">
+              <a:defRPr sz="1512">
                 <a:solidFill>
                   <a:schemeClr val="tx1">
                     <a:tint val="82000"/>
@@ -1391,9 +2257,9 @@
                 </a:solidFill>
               </a:defRPr>
             </a:lvl1pPr>
-            <a:lvl2pPr marL="373898" indent="0">
+            <a:lvl2pPr marL="287990" indent="0">
               <a:buNone/>
-              <a:defRPr sz="1636">
+              <a:defRPr sz="1260">
                 <a:solidFill>
                   <a:schemeClr val="tx1">
                     <a:tint val="82000"/>
@@ -1401,9 +2267,9 @@
                 </a:solidFill>
               </a:defRPr>
             </a:lvl2pPr>
-            <a:lvl3pPr marL="747796" indent="0">
+            <a:lvl3pPr marL="575981" indent="0">
               <a:buNone/>
-              <a:defRPr sz="1472">
+              <a:defRPr sz="1134">
                 <a:solidFill>
                   <a:schemeClr val="tx1">
                     <a:tint val="82000"/>
@@ -1411,9 +2277,9 @@
                 </a:solidFill>
               </a:defRPr>
             </a:lvl3pPr>
-            <a:lvl4pPr marL="1121694" indent="0">
+            <a:lvl4pPr marL="863971" indent="0">
               <a:buNone/>
-              <a:defRPr sz="1308">
+              <a:defRPr sz="1008">
                 <a:solidFill>
                   <a:schemeClr val="tx1">
                     <a:tint val="82000"/>
@@ -1421,9 +2287,9 @@
                 </a:solidFill>
               </a:defRPr>
             </a:lvl4pPr>
-            <a:lvl5pPr marL="1495593" indent="0">
+            <a:lvl5pPr marL="1151961" indent="0">
               <a:buNone/>
-              <a:defRPr sz="1308">
+              <a:defRPr sz="1008">
                 <a:solidFill>
                   <a:schemeClr val="tx1">
                     <a:tint val="82000"/>
@@ -1431,9 +2297,9 @@
                 </a:solidFill>
               </a:defRPr>
             </a:lvl5pPr>
-            <a:lvl6pPr marL="1869491" indent="0">
+            <a:lvl6pPr marL="1439951" indent="0">
               <a:buNone/>
-              <a:defRPr sz="1308">
+              <a:defRPr sz="1008">
                 <a:solidFill>
                   <a:schemeClr val="tx1">
                     <a:tint val="82000"/>
@@ -1441,9 +2307,9 @@
                 </a:solidFill>
               </a:defRPr>
             </a:lvl6pPr>
-            <a:lvl7pPr marL="2243389" indent="0">
+            <a:lvl7pPr marL="1727942" indent="0">
               <a:buNone/>
-              <a:defRPr sz="1308">
+              <a:defRPr sz="1008">
                 <a:solidFill>
                   <a:schemeClr val="tx1">
                     <a:tint val="82000"/>
@@ -1451,9 +2317,9 @@
                 </a:solidFill>
               </a:defRPr>
             </a:lvl7pPr>
-            <a:lvl8pPr marL="2617287" indent="0">
+            <a:lvl8pPr marL="2015932" indent="0">
               <a:buNone/>
-              <a:defRPr sz="1308">
+              <a:defRPr sz="1008">
                 <a:solidFill>
                   <a:schemeClr val="tx1">
                     <a:tint val="82000"/>
@@ -1461,9 +2327,9 @@
                 </a:solidFill>
               </a:defRPr>
             </a:lvl8pPr>
-            <a:lvl9pPr marL="2991185" indent="0">
+            <a:lvl9pPr marL="2303922" indent="0">
               <a:buNone/>
-              <a:defRPr sz="1308">
+              <a:defRPr sz="1008">
                 <a:solidFill>
                   <a:schemeClr val="tx1">
                     <a:tint val="82000"/>
@@ -1498,7 +2364,7 @@
           <a:p>
             <a:fld id="{D1C87F3C-6FA4-D54F-AEDE-BC3ADE73DCD6}" type="datetimeFigureOut">
               <a:rPr lang="en-US" smtClean="0"/>
-              <a:t>12/19/25</a:t>
+              <a:t>1/17/26</a:t>
             </a:fld>
             <a:endParaRPr lang="en-US"/>
           </a:p>
@@ -1549,7 +2415,7 @@
     </p:spTree>
     <p:extLst>
       <p:ext uri="{BB962C8B-B14F-4D97-AF65-F5344CB8AC3E}">
-        <p14:creationId xmlns:p14="http://schemas.microsoft.com/office/powerpoint/2010/main" val="4021746503"/>
+        <p14:creationId xmlns:p14="http://schemas.microsoft.com/office/powerpoint/2010/main" val="419862367"/>
       </p:ext>
     </p:extLst>
   </p:cSld>
@@ -1611,8 +2477,8 @@
         </p:nvSpPr>
         <p:spPr>
           <a:xfrm>
-            <a:off x="838200" y="1493040"/>
-            <a:ext cx="5181600" cy="3558629"/>
+            <a:off x="685513" y="1149890"/>
+            <a:ext cx="4237712" cy="2740739"/>
           </a:xfrm>
         </p:spPr>
         <p:txBody>
@@ -1668,8 +2534,8 @@
         </p:nvSpPr>
         <p:spPr>
           <a:xfrm>
-            <a:off x="6172200" y="1493040"/>
-            <a:ext cx="5181600" cy="3558629"/>
+            <a:off x="5047864" y="1149890"/>
+            <a:ext cx="4237712" cy="2740739"/>
           </a:xfrm>
         </p:spPr>
         <p:txBody>
@@ -1730,7 +2596,7 @@
           <a:p>
             <a:fld id="{D1C87F3C-6FA4-D54F-AEDE-BC3ADE73DCD6}" type="datetimeFigureOut">
               <a:rPr lang="en-US" smtClean="0"/>
-              <a:t>12/19/25</a:t>
+              <a:t>1/17/26</a:t>
             </a:fld>
             <a:endParaRPr lang="en-US"/>
           </a:p>
@@ -1781,7 +2647,7 @@
     </p:spTree>
     <p:extLst>
       <p:ext uri="{BB962C8B-B14F-4D97-AF65-F5344CB8AC3E}">
-        <p14:creationId xmlns:p14="http://schemas.microsoft.com/office/powerpoint/2010/main" val="2202309142"/>
+        <p14:creationId xmlns:p14="http://schemas.microsoft.com/office/powerpoint/2010/main" val="3951699668"/>
       </p:ext>
     </p:extLst>
   </p:cSld>
@@ -1820,8 +2686,8 @@
         </p:nvSpPr>
         <p:spPr>
           <a:xfrm>
-            <a:off x="839788" y="298609"/>
-            <a:ext cx="10515600" cy="1084077"/>
+            <a:off x="686811" y="229978"/>
+            <a:ext cx="8600063" cy="834921"/>
           </a:xfrm>
         </p:spPr>
         <p:txBody>
@@ -1848,8 +2714,8 @@
         </p:nvSpPr>
         <p:spPr>
           <a:xfrm>
-            <a:off x="839789" y="1374896"/>
-            <a:ext cx="5157787" cy="673815"/>
+            <a:off x="686812" y="1058899"/>
+            <a:ext cx="4218237" cy="518950"/>
           </a:xfrm>
         </p:spPr>
         <p:txBody>
@@ -1857,39 +2723,39 @@
           <a:lstStyle>
             <a:lvl1pPr marL="0" indent="0">
               <a:buNone/>
-              <a:defRPr sz="1963" b="1"/>
+              <a:defRPr sz="1512" b="1"/>
             </a:lvl1pPr>
-            <a:lvl2pPr marL="373898" indent="0">
+            <a:lvl2pPr marL="287990" indent="0">
               <a:buNone/>
-              <a:defRPr sz="1636" b="1"/>
+              <a:defRPr sz="1260" b="1"/>
             </a:lvl2pPr>
-            <a:lvl3pPr marL="747796" indent="0">
+            <a:lvl3pPr marL="575981" indent="0">
               <a:buNone/>
-              <a:defRPr sz="1472" b="1"/>
+              <a:defRPr sz="1134" b="1"/>
             </a:lvl3pPr>
-            <a:lvl4pPr marL="1121694" indent="0">
+            <a:lvl4pPr marL="863971" indent="0">
               <a:buNone/>
-              <a:defRPr sz="1308" b="1"/>
+              <a:defRPr sz="1008" b="1"/>
             </a:lvl4pPr>
-            <a:lvl5pPr marL="1495593" indent="0">
+            <a:lvl5pPr marL="1151961" indent="0">
               <a:buNone/>
-              <a:defRPr sz="1308" b="1"/>
+              <a:defRPr sz="1008" b="1"/>
             </a:lvl5pPr>
-            <a:lvl6pPr marL="1869491" indent="0">
+            <a:lvl6pPr marL="1439951" indent="0">
               <a:buNone/>
-              <a:defRPr sz="1308" b="1"/>
+              <a:defRPr sz="1008" b="1"/>
             </a:lvl6pPr>
-            <a:lvl7pPr marL="2243389" indent="0">
+            <a:lvl7pPr marL="1727942" indent="0">
               <a:buNone/>
-              <a:defRPr sz="1308" b="1"/>
+              <a:defRPr sz="1008" b="1"/>
             </a:lvl7pPr>
-            <a:lvl8pPr marL="2617287" indent="0">
+            <a:lvl8pPr marL="2015932" indent="0">
               <a:buNone/>
-              <a:defRPr sz="1308" b="1"/>
+              <a:defRPr sz="1008" b="1"/>
             </a:lvl8pPr>
-            <a:lvl9pPr marL="2991185" indent="0">
+            <a:lvl9pPr marL="2303922" indent="0">
               <a:buNone/>
-              <a:defRPr sz="1308" b="1"/>
+              <a:defRPr sz="1008" b="1"/>
             </a:lvl9pPr>
           </a:lstStyle>
           <a:p>
@@ -1913,8 +2779,8 @@
         </p:nvSpPr>
         <p:spPr>
           <a:xfrm>
-            <a:off x="839789" y="2048711"/>
-            <a:ext cx="5157787" cy="3013345"/>
+            <a:off x="686812" y="1577849"/>
+            <a:ext cx="4218237" cy="2320779"/>
           </a:xfrm>
         </p:spPr>
         <p:txBody>
@@ -1970,8 +2836,8 @@
         </p:nvSpPr>
         <p:spPr>
           <a:xfrm>
-            <a:off x="6172200" y="1374896"/>
-            <a:ext cx="5183188" cy="673815"/>
+            <a:off x="5047863" y="1058899"/>
+            <a:ext cx="4239011" cy="518950"/>
           </a:xfrm>
         </p:spPr>
         <p:txBody>
@@ -1979,39 +2845,39 @@
           <a:lstStyle>
             <a:lvl1pPr marL="0" indent="0">
               <a:buNone/>
-              <a:defRPr sz="1963" b="1"/>
+              <a:defRPr sz="1512" b="1"/>
             </a:lvl1pPr>
-            <a:lvl2pPr marL="373898" indent="0">
+            <a:lvl2pPr marL="287990" indent="0">
               <a:buNone/>
-              <a:defRPr sz="1636" b="1"/>
+              <a:defRPr sz="1260" b="1"/>
             </a:lvl2pPr>
-            <a:lvl3pPr marL="747796" indent="0">
+            <a:lvl3pPr marL="575981" indent="0">
               <a:buNone/>
-              <a:defRPr sz="1472" b="1"/>
+              <a:defRPr sz="1134" b="1"/>
             </a:lvl3pPr>
-            <a:lvl4pPr marL="1121694" indent="0">
+            <a:lvl4pPr marL="863971" indent="0">
               <a:buNone/>
-              <a:defRPr sz="1308" b="1"/>
+              <a:defRPr sz="1008" b="1"/>
             </a:lvl4pPr>
-            <a:lvl5pPr marL="1495593" indent="0">
+            <a:lvl5pPr marL="1151961" indent="0">
               <a:buNone/>
-              <a:defRPr sz="1308" b="1"/>
+              <a:defRPr sz="1008" b="1"/>
             </a:lvl5pPr>
-            <a:lvl6pPr marL="1869491" indent="0">
+            <a:lvl6pPr marL="1439951" indent="0">
               <a:buNone/>
-              <a:defRPr sz="1308" b="1"/>
+              <a:defRPr sz="1008" b="1"/>
             </a:lvl6pPr>
-            <a:lvl7pPr marL="2243389" indent="0">
+            <a:lvl7pPr marL="1727942" indent="0">
               <a:buNone/>
-              <a:defRPr sz="1308" b="1"/>
+              <a:defRPr sz="1008" b="1"/>
             </a:lvl7pPr>
-            <a:lvl8pPr marL="2617287" indent="0">
+            <a:lvl8pPr marL="2015932" indent="0">
               <a:buNone/>
-              <a:defRPr sz="1308" b="1"/>
+              <a:defRPr sz="1008" b="1"/>
             </a:lvl8pPr>
-            <a:lvl9pPr marL="2991185" indent="0">
+            <a:lvl9pPr marL="2303922" indent="0">
               <a:buNone/>
-              <a:defRPr sz="1308" b="1"/>
+              <a:defRPr sz="1008" b="1"/>
             </a:lvl9pPr>
           </a:lstStyle>
           <a:p>
@@ -2035,8 +2901,8 @@
         </p:nvSpPr>
         <p:spPr>
           <a:xfrm>
-            <a:off x="6172200" y="2048711"/>
-            <a:ext cx="5183188" cy="3013345"/>
+            <a:off x="5047863" y="1577849"/>
+            <a:ext cx="4239011" cy="2320779"/>
           </a:xfrm>
         </p:spPr>
         <p:txBody>
@@ -2097,7 +2963,7 @@
           <a:p>
             <a:fld id="{D1C87F3C-6FA4-D54F-AEDE-BC3ADE73DCD6}" type="datetimeFigureOut">
               <a:rPr lang="en-US" smtClean="0"/>
-              <a:t>12/19/25</a:t>
+              <a:t>1/17/26</a:t>
             </a:fld>
             <a:endParaRPr lang="en-US"/>
           </a:p>
@@ -2148,7 +3014,7 @@
     </p:spTree>
     <p:extLst>
       <p:ext uri="{BB962C8B-B14F-4D97-AF65-F5344CB8AC3E}">
-        <p14:creationId xmlns:p14="http://schemas.microsoft.com/office/powerpoint/2010/main" val="1910660356"/>
+        <p14:creationId xmlns:p14="http://schemas.microsoft.com/office/powerpoint/2010/main" val="2669886773"/>
       </p:ext>
     </p:extLst>
   </p:cSld>
@@ -2215,7 +3081,7 @@
           <a:p>
             <a:fld id="{D1C87F3C-6FA4-D54F-AEDE-BC3ADE73DCD6}" type="datetimeFigureOut">
               <a:rPr lang="en-US" smtClean="0"/>
-              <a:t>12/19/25</a:t>
+              <a:t>1/17/26</a:t>
             </a:fld>
             <a:endParaRPr lang="en-US"/>
           </a:p>
@@ -2266,7 +3132,7 @@
     </p:spTree>
     <p:extLst>
       <p:ext uri="{BB962C8B-B14F-4D97-AF65-F5344CB8AC3E}">
-        <p14:creationId xmlns:p14="http://schemas.microsoft.com/office/powerpoint/2010/main" val="1722657793"/>
+        <p14:creationId xmlns:p14="http://schemas.microsoft.com/office/powerpoint/2010/main" val="2641409564"/>
       </p:ext>
     </p:extLst>
   </p:cSld>
@@ -2310,7 +3176,7 @@
           <a:p>
             <a:fld id="{D1C87F3C-6FA4-D54F-AEDE-BC3ADE73DCD6}" type="datetimeFigureOut">
               <a:rPr lang="en-US" smtClean="0"/>
-              <a:t>12/19/25</a:t>
+              <a:t>1/17/26</a:t>
             </a:fld>
             <a:endParaRPr lang="en-US"/>
           </a:p>
@@ -2361,7 +3227,7 @@
     </p:spTree>
     <p:extLst>
       <p:ext uri="{BB962C8B-B14F-4D97-AF65-F5344CB8AC3E}">
-        <p14:creationId xmlns:p14="http://schemas.microsoft.com/office/powerpoint/2010/main" val="804223753"/>
+        <p14:creationId xmlns:p14="http://schemas.microsoft.com/office/powerpoint/2010/main" val="3657358538"/>
       </p:ext>
     </p:extLst>
   </p:cSld>
@@ -2400,15 +3266,15 @@
         </p:nvSpPr>
         <p:spPr>
           <a:xfrm>
-            <a:off x="839789" y="373909"/>
-            <a:ext cx="3932237" cy="1308682"/>
+            <a:off x="686812" y="287972"/>
+            <a:ext cx="3215935" cy="1007904"/>
           </a:xfrm>
         </p:spPr>
         <p:txBody>
           <a:bodyPr anchor="b"/>
           <a:lstStyle>
             <a:lvl1pPr>
-              <a:defRPr sz="2617"/>
+              <a:defRPr sz="2016"/>
             </a:lvl1pPr>
           </a:lstStyle>
           <a:p>
@@ -2432,39 +3298,39 @@
         </p:nvSpPr>
         <p:spPr>
           <a:xfrm>
-            <a:off x="5183188" y="807541"/>
-            <a:ext cx="6172200" cy="3985768"/>
+            <a:off x="4239011" y="621941"/>
+            <a:ext cx="5047863" cy="3069707"/>
           </a:xfrm>
         </p:spPr>
         <p:txBody>
           <a:bodyPr/>
           <a:lstStyle>
             <a:lvl1pPr>
-              <a:defRPr sz="2617"/>
+              <a:defRPr sz="2016"/>
             </a:lvl1pPr>
             <a:lvl2pPr>
-              <a:defRPr sz="2290"/>
+              <a:defRPr sz="1764"/>
             </a:lvl2pPr>
             <a:lvl3pPr>
-              <a:defRPr sz="1963"/>
+              <a:defRPr sz="1512"/>
             </a:lvl3pPr>
             <a:lvl4pPr>
-              <a:defRPr sz="1636"/>
+              <a:defRPr sz="1260"/>
             </a:lvl4pPr>
             <a:lvl5pPr>
-              <a:defRPr sz="1636"/>
+              <a:defRPr sz="1260"/>
             </a:lvl5pPr>
             <a:lvl6pPr>
-              <a:defRPr sz="1636"/>
+              <a:defRPr sz="1260"/>
             </a:lvl6pPr>
             <a:lvl7pPr>
-              <a:defRPr sz="1636"/>
+              <a:defRPr sz="1260"/>
             </a:lvl7pPr>
             <a:lvl8pPr>
-              <a:defRPr sz="1636"/>
+              <a:defRPr sz="1260"/>
             </a:lvl8pPr>
             <a:lvl9pPr>
-              <a:defRPr sz="1636"/>
+              <a:defRPr sz="1260"/>
             </a:lvl9pPr>
           </a:lstStyle>
           <a:p>
@@ -2517,8 +3383,8 @@
         </p:nvSpPr>
         <p:spPr>
           <a:xfrm>
-            <a:off x="839789" y="1682591"/>
-            <a:ext cx="3932237" cy="3117209"/>
+            <a:off x="686812" y="1295877"/>
+            <a:ext cx="3215935" cy="2400771"/>
           </a:xfrm>
         </p:spPr>
         <p:txBody>
@@ -2526,39 +3392,39 @@
           <a:lstStyle>
             <a:lvl1pPr marL="0" indent="0">
               <a:buNone/>
-              <a:defRPr sz="1308"/>
+              <a:defRPr sz="1008"/>
             </a:lvl1pPr>
-            <a:lvl2pPr marL="373898" indent="0">
+            <a:lvl2pPr marL="287990" indent="0">
               <a:buNone/>
-              <a:defRPr sz="1145"/>
+              <a:defRPr sz="882"/>
             </a:lvl2pPr>
-            <a:lvl3pPr marL="747796" indent="0">
+            <a:lvl3pPr marL="575981" indent="0">
               <a:buNone/>
-              <a:defRPr sz="981"/>
+              <a:defRPr sz="756"/>
             </a:lvl3pPr>
-            <a:lvl4pPr marL="1121694" indent="0">
+            <a:lvl4pPr marL="863971" indent="0">
               <a:buNone/>
-              <a:defRPr sz="818"/>
+              <a:defRPr sz="630"/>
             </a:lvl4pPr>
-            <a:lvl5pPr marL="1495593" indent="0">
+            <a:lvl5pPr marL="1151961" indent="0">
               <a:buNone/>
-              <a:defRPr sz="818"/>
+              <a:defRPr sz="630"/>
             </a:lvl5pPr>
-            <a:lvl6pPr marL="1869491" indent="0">
+            <a:lvl6pPr marL="1439951" indent="0">
               <a:buNone/>
-              <a:defRPr sz="818"/>
+              <a:defRPr sz="630"/>
             </a:lvl6pPr>
-            <a:lvl7pPr marL="2243389" indent="0">
+            <a:lvl7pPr marL="1727942" indent="0">
               <a:buNone/>
-              <a:defRPr sz="818"/>
+              <a:defRPr sz="630"/>
             </a:lvl7pPr>
-            <a:lvl8pPr marL="2617287" indent="0">
+            <a:lvl8pPr marL="2015932" indent="0">
               <a:buNone/>
-              <a:defRPr sz="818"/>
+              <a:defRPr sz="630"/>
             </a:lvl8pPr>
-            <a:lvl9pPr marL="2991185" indent="0">
+            <a:lvl9pPr marL="2303922" indent="0">
               <a:buNone/>
-              <a:defRPr sz="818"/>
+              <a:defRPr sz="630"/>
             </a:lvl9pPr>
           </a:lstStyle>
           <a:p>
@@ -2587,7 +3453,7 @@
           <a:p>
             <a:fld id="{D1C87F3C-6FA4-D54F-AEDE-BC3ADE73DCD6}" type="datetimeFigureOut">
               <a:rPr lang="en-US" smtClean="0"/>
-              <a:t>12/19/25</a:t>
+              <a:t>1/17/26</a:t>
             </a:fld>
             <a:endParaRPr lang="en-US"/>
           </a:p>
@@ -2638,7 +3504,7 @@
     </p:spTree>
     <p:extLst>
       <p:ext uri="{BB962C8B-B14F-4D97-AF65-F5344CB8AC3E}">
-        <p14:creationId xmlns:p14="http://schemas.microsoft.com/office/powerpoint/2010/main" val="467248445"/>
+        <p14:creationId xmlns:p14="http://schemas.microsoft.com/office/powerpoint/2010/main" val="389889926"/>
       </p:ext>
     </p:extLst>
   </p:cSld>
@@ -2677,15 +3543,15 @@
         </p:nvSpPr>
         <p:spPr>
           <a:xfrm>
-            <a:off x="839789" y="373909"/>
-            <a:ext cx="3932237" cy="1308682"/>
+            <a:off x="686812" y="287972"/>
+            <a:ext cx="3215935" cy="1007904"/>
           </a:xfrm>
         </p:spPr>
         <p:txBody>
           <a:bodyPr anchor="b"/>
           <a:lstStyle>
             <a:lvl1pPr>
-              <a:defRPr sz="2617"/>
+              <a:defRPr sz="2016"/>
             </a:lvl1pPr>
           </a:lstStyle>
           <a:p>
@@ -2709,8 +3575,8 @@
         </p:nvSpPr>
         <p:spPr>
           <a:xfrm>
-            <a:off x="5183188" y="807541"/>
-            <a:ext cx="6172200" cy="3985768"/>
+            <a:off x="4239011" y="621941"/>
+            <a:ext cx="5047863" cy="3069707"/>
           </a:xfrm>
         </p:spPr>
         <p:txBody>
@@ -2718,39 +3584,39 @@
           <a:lstStyle>
             <a:lvl1pPr marL="0" indent="0">
               <a:buNone/>
-              <a:defRPr sz="2617"/>
+              <a:defRPr sz="2016"/>
             </a:lvl1pPr>
-            <a:lvl2pPr marL="373898" indent="0">
+            <a:lvl2pPr marL="287990" indent="0">
               <a:buNone/>
-              <a:defRPr sz="2290"/>
+              <a:defRPr sz="1764"/>
             </a:lvl2pPr>
-            <a:lvl3pPr marL="747796" indent="0">
+            <a:lvl3pPr marL="575981" indent="0">
               <a:buNone/>
-              <a:defRPr sz="1963"/>
+              <a:defRPr sz="1512"/>
             </a:lvl3pPr>
-            <a:lvl4pPr marL="1121694" indent="0">
+            <a:lvl4pPr marL="863971" indent="0">
               <a:buNone/>
-              <a:defRPr sz="1636"/>
+              <a:defRPr sz="1260"/>
             </a:lvl4pPr>
-            <a:lvl5pPr marL="1495593" indent="0">
+            <a:lvl5pPr marL="1151961" indent="0">
               <a:buNone/>
-              <a:defRPr sz="1636"/>
+              <a:defRPr sz="1260"/>
             </a:lvl5pPr>
-            <a:lvl6pPr marL="1869491" indent="0">
+            <a:lvl6pPr marL="1439951" indent="0">
               <a:buNone/>
-              <a:defRPr sz="1636"/>
+              <a:defRPr sz="1260"/>
             </a:lvl6pPr>
-            <a:lvl7pPr marL="2243389" indent="0">
+            <a:lvl7pPr marL="1727942" indent="0">
               <a:buNone/>
-              <a:defRPr sz="1636"/>
+              <a:defRPr sz="1260"/>
             </a:lvl7pPr>
-            <a:lvl8pPr marL="2617287" indent="0">
+            <a:lvl8pPr marL="2015932" indent="0">
               <a:buNone/>
-              <a:defRPr sz="1636"/>
+              <a:defRPr sz="1260"/>
             </a:lvl8pPr>
-            <a:lvl9pPr marL="2991185" indent="0">
+            <a:lvl9pPr marL="2303922" indent="0">
               <a:buNone/>
-              <a:defRPr sz="1636"/>
+              <a:defRPr sz="1260"/>
             </a:lvl9pPr>
           </a:lstStyle>
           <a:p>
@@ -2774,8 +3640,8 @@
         </p:nvSpPr>
         <p:spPr>
           <a:xfrm>
-            <a:off x="839789" y="1682591"/>
-            <a:ext cx="3932237" cy="3117209"/>
+            <a:off x="686812" y="1295877"/>
+            <a:ext cx="3215935" cy="2400771"/>
           </a:xfrm>
         </p:spPr>
         <p:txBody>
@@ -2783,39 +3649,39 @@
           <a:lstStyle>
             <a:lvl1pPr marL="0" indent="0">
               <a:buNone/>
-              <a:defRPr sz="1308"/>
+              <a:defRPr sz="1008"/>
             </a:lvl1pPr>
-            <a:lvl2pPr marL="373898" indent="0">
+            <a:lvl2pPr marL="287990" indent="0">
               <a:buNone/>
-              <a:defRPr sz="1145"/>
+              <a:defRPr sz="882"/>
             </a:lvl2pPr>
-            <a:lvl3pPr marL="747796" indent="0">
+            <a:lvl3pPr marL="575981" indent="0">
               <a:buNone/>
-              <a:defRPr sz="981"/>
+              <a:defRPr sz="756"/>
             </a:lvl3pPr>
-            <a:lvl4pPr marL="1121694" indent="0">
+            <a:lvl4pPr marL="863971" indent="0">
               <a:buNone/>
-              <a:defRPr sz="818"/>
+              <a:defRPr sz="630"/>
             </a:lvl4pPr>
-            <a:lvl5pPr marL="1495593" indent="0">
+            <a:lvl5pPr marL="1151961" indent="0">
               <a:buNone/>
-              <a:defRPr sz="818"/>
+              <a:defRPr sz="630"/>
             </a:lvl5pPr>
-            <a:lvl6pPr marL="1869491" indent="0">
+            <a:lvl6pPr marL="1439951" indent="0">
               <a:buNone/>
-              <a:defRPr sz="818"/>
+              <a:defRPr sz="630"/>
             </a:lvl6pPr>
-            <a:lvl7pPr marL="2243389" indent="0">
+            <a:lvl7pPr marL="1727942" indent="0">
               <a:buNone/>
-              <a:defRPr sz="818"/>
+              <a:defRPr sz="630"/>
             </a:lvl7pPr>
-            <a:lvl8pPr marL="2617287" indent="0">
+            <a:lvl8pPr marL="2015932" indent="0">
               <a:buNone/>
-              <a:defRPr sz="818"/>
+              <a:defRPr sz="630"/>
             </a:lvl8pPr>
-            <a:lvl9pPr marL="2991185" indent="0">
+            <a:lvl9pPr marL="2303922" indent="0">
               <a:buNone/>
-              <a:defRPr sz="818"/>
+              <a:defRPr sz="630"/>
             </a:lvl9pPr>
           </a:lstStyle>
           <a:p>
@@ -2844,7 +3710,7 @@
           <a:p>
             <a:fld id="{D1C87F3C-6FA4-D54F-AEDE-BC3ADE73DCD6}" type="datetimeFigureOut">
               <a:rPr lang="en-US" smtClean="0"/>
-              <a:t>12/19/25</a:t>
+              <a:t>1/17/26</a:t>
             </a:fld>
             <a:endParaRPr lang="en-US"/>
           </a:p>
@@ -2895,7 +3761,7 @@
     </p:spTree>
     <p:extLst>
       <p:ext uri="{BB962C8B-B14F-4D97-AF65-F5344CB8AC3E}">
-        <p14:creationId xmlns:p14="http://schemas.microsoft.com/office/powerpoint/2010/main" val="1152997500"/>
+        <p14:creationId xmlns:p14="http://schemas.microsoft.com/office/powerpoint/2010/main" val="1225302969"/>
       </p:ext>
     </p:extLst>
   </p:cSld>
@@ -2939,8 +3805,8 @@
         </p:nvSpPr>
         <p:spPr>
           <a:xfrm>
-            <a:off x="838200" y="298609"/>
-            <a:ext cx="10515600" cy="1084077"/>
+            <a:off x="685513" y="229978"/>
+            <a:ext cx="8600063" cy="834921"/>
           </a:xfrm>
           <a:prstGeom prst="rect">
             <a:avLst/>
@@ -2972,8 +3838,8 @@
         </p:nvSpPr>
         <p:spPr>
           <a:xfrm>
-            <a:off x="838200" y="1493040"/>
-            <a:ext cx="10515600" cy="3558629"/>
+            <a:off x="685513" y="1149890"/>
+            <a:ext cx="8600063" cy="2740739"/>
           </a:xfrm>
           <a:prstGeom prst="rect">
             <a:avLst/>
@@ -3034,8 +3900,8 @@
         </p:nvSpPr>
         <p:spPr>
           <a:xfrm>
-            <a:off x="838200" y="5198377"/>
-            <a:ext cx="2743200" cy="298608"/>
+            <a:off x="685512" y="4003618"/>
+            <a:ext cx="2243495" cy="229978"/>
           </a:xfrm>
           <a:prstGeom prst="rect">
             <a:avLst/>
@@ -3045,7 +3911,7 @@
           <a:bodyPr vert="horz" lIns="91440" tIns="45720" rIns="91440" bIns="45720" rtlCol="0" anchor="ctr"/>
           <a:lstStyle>
             <a:lvl1pPr algn="l">
-              <a:defRPr sz="981">
+              <a:defRPr sz="756">
                 <a:solidFill>
                   <a:schemeClr val="tx1">
                     <a:tint val="82000"/>
@@ -3057,7 +3923,7 @@
           <a:p>
             <a:fld id="{D1C87F3C-6FA4-D54F-AEDE-BC3ADE73DCD6}" type="datetimeFigureOut">
               <a:rPr lang="en-US" smtClean="0"/>
-              <a:t>12/19/25</a:t>
+              <a:t>1/17/26</a:t>
             </a:fld>
             <a:endParaRPr lang="en-US"/>
           </a:p>
@@ -3075,8 +3941,8 @@
         </p:nvSpPr>
         <p:spPr>
           <a:xfrm>
-            <a:off x="4038600" y="5198377"/>
-            <a:ext cx="4114800" cy="298608"/>
+            <a:off x="3302923" y="4003618"/>
+            <a:ext cx="3365242" cy="229978"/>
           </a:xfrm>
           <a:prstGeom prst="rect">
             <a:avLst/>
@@ -3086,7 +3952,7 @@
           <a:bodyPr vert="horz" lIns="91440" tIns="45720" rIns="91440" bIns="45720" rtlCol="0" anchor="ctr"/>
           <a:lstStyle>
             <a:lvl1pPr algn="ctr">
-              <a:defRPr sz="981">
+              <a:defRPr sz="756">
                 <a:solidFill>
                   <a:schemeClr val="tx1">
                     <a:tint val="82000"/>
@@ -3112,8 +3978,8 @@
         </p:nvSpPr>
         <p:spPr>
           <a:xfrm>
-            <a:off x="8610600" y="5198377"/>
-            <a:ext cx="2743200" cy="298608"/>
+            <a:off x="7042081" y="4003618"/>
+            <a:ext cx="2243495" cy="229978"/>
           </a:xfrm>
           <a:prstGeom prst="rect">
             <a:avLst/>
@@ -3123,7 +3989,7 @@
           <a:bodyPr vert="horz" lIns="91440" tIns="45720" rIns="91440" bIns="45720" rtlCol="0" anchor="ctr"/>
           <a:lstStyle>
             <a:lvl1pPr algn="r">
-              <a:defRPr sz="981">
+              <a:defRPr sz="756">
                 <a:solidFill>
                   <a:schemeClr val="tx1">
                     <a:tint val="82000"/>
@@ -3144,27 +4010,27 @@
     </p:spTree>
     <p:extLst>
       <p:ext uri="{BB962C8B-B14F-4D97-AF65-F5344CB8AC3E}">
-        <p14:creationId xmlns:p14="http://schemas.microsoft.com/office/powerpoint/2010/main" val="2567449288"/>
+        <p14:creationId xmlns:p14="http://schemas.microsoft.com/office/powerpoint/2010/main" val="1669798052"/>
       </p:ext>
     </p:extLst>
   </p:cSld>
   <p:clrMap bg1="lt1" tx1="dk1" bg2="lt2" tx2="dk2" accent1="accent1" accent2="accent2" accent3="accent3" accent4="accent4" accent5="accent5" accent6="accent6" hlink="hlink" folHlink="folHlink"/>
   <p:sldLayoutIdLst>
-    <p:sldLayoutId id="2147483661" r:id="rId1"/>
-    <p:sldLayoutId id="2147483662" r:id="rId2"/>
-    <p:sldLayoutId id="2147483663" r:id="rId3"/>
-    <p:sldLayoutId id="2147483664" r:id="rId4"/>
-    <p:sldLayoutId id="2147483665" r:id="rId5"/>
-    <p:sldLayoutId id="2147483666" r:id="rId6"/>
-    <p:sldLayoutId id="2147483667" r:id="rId7"/>
-    <p:sldLayoutId id="2147483668" r:id="rId8"/>
-    <p:sldLayoutId id="2147483669" r:id="rId9"/>
-    <p:sldLayoutId id="2147483670" r:id="rId10"/>
-    <p:sldLayoutId id="2147483671" r:id="rId11"/>
+    <p:sldLayoutId id="2147483685" r:id="rId1"/>
+    <p:sldLayoutId id="2147483686" r:id="rId2"/>
+    <p:sldLayoutId id="2147483687" r:id="rId3"/>
+    <p:sldLayoutId id="2147483688" r:id="rId4"/>
+    <p:sldLayoutId id="2147483689" r:id="rId5"/>
+    <p:sldLayoutId id="2147483690" r:id="rId6"/>
+    <p:sldLayoutId id="2147483691" r:id="rId7"/>
+    <p:sldLayoutId id="2147483692" r:id="rId8"/>
+    <p:sldLayoutId id="2147483693" r:id="rId9"/>
+    <p:sldLayoutId id="2147483694" r:id="rId10"/>
+    <p:sldLayoutId id="2147483695" r:id="rId11"/>
   </p:sldLayoutIdLst>
   <p:txStyles>
     <p:titleStyle>
-      <a:lvl1pPr algn="l" defTabSz="747796" rtl="0" eaLnBrk="1" latinLnBrk="0" hangingPunct="1">
+      <a:lvl1pPr algn="l" defTabSz="575981" rtl="0" eaLnBrk="1" latinLnBrk="0" hangingPunct="1">
         <a:lnSpc>
           <a:spcPct val="90000"/>
         </a:lnSpc>
@@ -3172,7 +4038,7 @@
           <a:spcPct val="0"/>
         </a:spcBef>
         <a:buNone/>
-        <a:defRPr sz="3598" kern="1200">
+        <a:defRPr sz="2772" kern="1200">
           <a:solidFill>
             <a:schemeClr val="tx1"/>
           </a:solidFill>
@@ -3183,16 +4049,16 @@
       </a:lvl1pPr>
     </p:titleStyle>
     <p:bodyStyle>
-      <a:lvl1pPr marL="186949" indent="-186949" algn="l" defTabSz="747796" rtl="0" eaLnBrk="1" latinLnBrk="0" hangingPunct="1">
+      <a:lvl1pPr marL="143995" indent="-143995" algn="l" defTabSz="575981" rtl="0" eaLnBrk="1" latinLnBrk="0" hangingPunct="1">
         <a:lnSpc>
           <a:spcPct val="90000"/>
         </a:lnSpc>
         <a:spcBef>
-          <a:spcPts val="818"/>
+          <a:spcPts val="630"/>
         </a:spcBef>
         <a:buFont typeface="Arial" panose="020B0604020202020204" pitchFamily="34" charset="0"/>
         <a:buChar char="•"/>
-        <a:defRPr sz="2290" kern="1200">
+        <a:defRPr sz="1764" kern="1200">
           <a:solidFill>
             <a:schemeClr val="tx1"/>
           </a:solidFill>
@@ -3201,16 +4067,16 @@
           <a:cs typeface="+mn-cs"/>
         </a:defRPr>
       </a:lvl1pPr>
-      <a:lvl2pPr marL="560847" indent="-186949" algn="l" defTabSz="747796" rtl="0" eaLnBrk="1" latinLnBrk="0" hangingPunct="1">
+      <a:lvl2pPr marL="431985" indent="-143995" algn="l" defTabSz="575981" rtl="0" eaLnBrk="1" latinLnBrk="0" hangingPunct="1">
         <a:lnSpc>
           <a:spcPct val="90000"/>
         </a:lnSpc>
         <a:spcBef>
-          <a:spcPts val="409"/>
+          <a:spcPts val="315"/>
         </a:spcBef>
         <a:buFont typeface="Arial" panose="020B0604020202020204" pitchFamily="34" charset="0"/>
         <a:buChar char="•"/>
-        <a:defRPr sz="1963" kern="1200">
+        <a:defRPr sz="1512" kern="1200">
           <a:solidFill>
             <a:schemeClr val="tx1"/>
           </a:solidFill>
@@ -3219,16 +4085,16 @@
           <a:cs typeface="+mn-cs"/>
         </a:defRPr>
       </a:lvl2pPr>
-      <a:lvl3pPr marL="934745" indent="-186949" algn="l" defTabSz="747796" rtl="0" eaLnBrk="1" latinLnBrk="0" hangingPunct="1">
+      <a:lvl3pPr marL="719976" indent="-143995" algn="l" defTabSz="575981" rtl="0" eaLnBrk="1" latinLnBrk="0" hangingPunct="1">
         <a:lnSpc>
           <a:spcPct val="90000"/>
         </a:lnSpc>
         <a:spcBef>
-          <a:spcPts val="409"/>
+          <a:spcPts val="315"/>
         </a:spcBef>
         <a:buFont typeface="Arial" panose="020B0604020202020204" pitchFamily="34" charset="0"/>
         <a:buChar char="•"/>
-        <a:defRPr sz="1636" kern="1200">
+        <a:defRPr sz="1260" kern="1200">
           <a:solidFill>
             <a:schemeClr val="tx1"/>
           </a:solidFill>
@@ -3237,16 +4103,16 @@
           <a:cs typeface="+mn-cs"/>
         </a:defRPr>
       </a:lvl3pPr>
-      <a:lvl4pPr marL="1308644" indent="-186949" algn="l" defTabSz="747796" rtl="0" eaLnBrk="1" latinLnBrk="0" hangingPunct="1">
+      <a:lvl4pPr marL="1007966" indent="-143995" algn="l" defTabSz="575981" rtl="0" eaLnBrk="1" latinLnBrk="0" hangingPunct="1">
         <a:lnSpc>
           <a:spcPct val="90000"/>
         </a:lnSpc>
         <a:spcBef>
-          <a:spcPts val="409"/>
+          <a:spcPts val="315"/>
         </a:spcBef>
         <a:buFont typeface="Arial" panose="020B0604020202020204" pitchFamily="34" charset="0"/>
         <a:buChar char="•"/>
-        <a:defRPr sz="1472" kern="1200">
+        <a:defRPr sz="1134" kern="1200">
           <a:solidFill>
             <a:schemeClr val="tx1"/>
           </a:solidFill>
@@ -3255,16 +4121,16 @@
           <a:cs typeface="+mn-cs"/>
         </a:defRPr>
       </a:lvl4pPr>
-      <a:lvl5pPr marL="1682542" indent="-186949" algn="l" defTabSz="747796" rtl="0" eaLnBrk="1" latinLnBrk="0" hangingPunct="1">
+      <a:lvl5pPr marL="1295956" indent="-143995" algn="l" defTabSz="575981" rtl="0" eaLnBrk="1" latinLnBrk="0" hangingPunct="1">
         <a:lnSpc>
           <a:spcPct val="90000"/>
         </a:lnSpc>
         <a:spcBef>
-          <a:spcPts val="409"/>
+          <a:spcPts val="315"/>
         </a:spcBef>
         <a:buFont typeface="Arial" panose="020B0604020202020204" pitchFamily="34" charset="0"/>
         <a:buChar char="•"/>
-        <a:defRPr sz="1472" kern="1200">
+        <a:defRPr sz="1134" kern="1200">
           <a:solidFill>
             <a:schemeClr val="tx1"/>
           </a:solidFill>
@@ -3273,16 +4139,16 @@
           <a:cs typeface="+mn-cs"/>
         </a:defRPr>
       </a:lvl5pPr>
-      <a:lvl6pPr marL="2056440" indent="-186949" algn="l" defTabSz="747796" rtl="0" eaLnBrk="1" latinLnBrk="0" hangingPunct="1">
+      <a:lvl6pPr marL="1583947" indent="-143995" algn="l" defTabSz="575981" rtl="0" eaLnBrk="1" latinLnBrk="0" hangingPunct="1">
         <a:lnSpc>
           <a:spcPct val="90000"/>
         </a:lnSpc>
         <a:spcBef>
-          <a:spcPts val="409"/>
+          <a:spcPts val="315"/>
         </a:spcBef>
         <a:buFont typeface="Arial" panose="020B0604020202020204" pitchFamily="34" charset="0"/>
         <a:buChar char="•"/>
-        <a:defRPr sz="1472" kern="1200">
+        <a:defRPr sz="1134" kern="1200">
           <a:solidFill>
             <a:schemeClr val="tx1"/>
           </a:solidFill>
@@ -3291,16 +4157,16 @@
           <a:cs typeface="+mn-cs"/>
         </a:defRPr>
       </a:lvl6pPr>
-      <a:lvl7pPr marL="2430338" indent="-186949" algn="l" defTabSz="747796" rtl="0" eaLnBrk="1" latinLnBrk="0" hangingPunct="1">
+      <a:lvl7pPr marL="1871937" indent="-143995" algn="l" defTabSz="575981" rtl="0" eaLnBrk="1" latinLnBrk="0" hangingPunct="1">
         <a:lnSpc>
           <a:spcPct val="90000"/>
         </a:lnSpc>
         <a:spcBef>
-          <a:spcPts val="409"/>
+          <a:spcPts val="315"/>
         </a:spcBef>
         <a:buFont typeface="Arial" panose="020B0604020202020204" pitchFamily="34" charset="0"/>
         <a:buChar char="•"/>
-        <a:defRPr sz="1472" kern="1200">
+        <a:defRPr sz="1134" kern="1200">
           <a:solidFill>
             <a:schemeClr val="tx1"/>
           </a:solidFill>
@@ -3309,16 +4175,16 @@
           <a:cs typeface="+mn-cs"/>
         </a:defRPr>
       </a:lvl7pPr>
-      <a:lvl8pPr marL="2804236" indent="-186949" algn="l" defTabSz="747796" rtl="0" eaLnBrk="1" latinLnBrk="0" hangingPunct="1">
+      <a:lvl8pPr marL="2159927" indent="-143995" algn="l" defTabSz="575981" rtl="0" eaLnBrk="1" latinLnBrk="0" hangingPunct="1">
         <a:lnSpc>
           <a:spcPct val="90000"/>
         </a:lnSpc>
         <a:spcBef>
-          <a:spcPts val="409"/>
+          <a:spcPts val="315"/>
         </a:spcBef>
         <a:buFont typeface="Arial" panose="020B0604020202020204" pitchFamily="34" charset="0"/>
         <a:buChar char="•"/>
-        <a:defRPr sz="1472" kern="1200">
+        <a:defRPr sz="1134" kern="1200">
           <a:solidFill>
             <a:schemeClr val="tx1"/>
           </a:solidFill>
@@ -3327,16 +4193,16 @@
           <a:cs typeface="+mn-cs"/>
         </a:defRPr>
       </a:lvl8pPr>
-      <a:lvl9pPr marL="3178134" indent="-186949" algn="l" defTabSz="747796" rtl="0" eaLnBrk="1" latinLnBrk="0" hangingPunct="1">
+      <a:lvl9pPr marL="2447917" indent="-143995" algn="l" defTabSz="575981" rtl="0" eaLnBrk="1" latinLnBrk="0" hangingPunct="1">
         <a:lnSpc>
           <a:spcPct val="90000"/>
         </a:lnSpc>
         <a:spcBef>
-          <a:spcPts val="409"/>
+          <a:spcPts val="315"/>
         </a:spcBef>
         <a:buFont typeface="Arial" panose="020B0604020202020204" pitchFamily="34" charset="0"/>
         <a:buChar char="•"/>
-        <a:defRPr sz="1472" kern="1200">
+        <a:defRPr sz="1134" kern="1200">
           <a:solidFill>
             <a:schemeClr val="tx1"/>
           </a:solidFill>
@@ -3350,8 +4216,8 @@
       <a:defPPr>
         <a:defRPr lang="en-US"/>
       </a:defPPr>
-      <a:lvl1pPr marL="0" algn="l" defTabSz="747796" rtl="0" eaLnBrk="1" latinLnBrk="0" hangingPunct="1">
-        <a:defRPr sz="1472" kern="1200">
+      <a:lvl1pPr marL="0" algn="l" defTabSz="575981" rtl="0" eaLnBrk="1" latinLnBrk="0" hangingPunct="1">
+        <a:defRPr sz="1134" kern="1200">
           <a:solidFill>
             <a:schemeClr val="tx1"/>
           </a:solidFill>
@@ -3360,8 +4226,8 @@
           <a:cs typeface="+mn-cs"/>
         </a:defRPr>
       </a:lvl1pPr>
-      <a:lvl2pPr marL="373898" algn="l" defTabSz="747796" rtl="0" eaLnBrk="1" latinLnBrk="0" hangingPunct="1">
-        <a:defRPr sz="1472" kern="1200">
+      <a:lvl2pPr marL="287990" algn="l" defTabSz="575981" rtl="0" eaLnBrk="1" latinLnBrk="0" hangingPunct="1">
+        <a:defRPr sz="1134" kern="1200">
           <a:solidFill>
             <a:schemeClr val="tx1"/>
           </a:solidFill>
@@ -3370,8 +4236,8 @@
           <a:cs typeface="+mn-cs"/>
         </a:defRPr>
       </a:lvl2pPr>
-      <a:lvl3pPr marL="747796" algn="l" defTabSz="747796" rtl="0" eaLnBrk="1" latinLnBrk="0" hangingPunct="1">
-        <a:defRPr sz="1472" kern="1200">
+      <a:lvl3pPr marL="575981" algn="l" defTabSz="575981" rtl="0" eaLnBrk="1" latinLnBrk="0" hangingPunct="1">
+        <a:defRPr sz="1134" kern="1200">
           <a:solidFill>
             <a:schemeClr val="tx1"/>
           </a:solidFill>
@@ -3380,8 +4246,8 @@
           <a:cs typeface="+mn-cs"/>
         </a:defRPr>
       </a:lvl3pPr>
-      <a:lvl4pPr marL="1121694" algn="l" defTabSz="747796" rtl="0" eaLnBrk="1" latinLnBrk="0" hangingPunct="1">
-        <a:defRPr sz="1472" kern="1200">
+      <a:lvl4pPr marL="863971" algn="l" defTabSz="575981" rtl="0" eaLnBrk="1" latinLnBrk="0" hangingPunct="1">
+        <a:defRPr sz="1134" kern="1200">
           <a:solidFill>
             <a:schemeClr val="tx1"/>
           </a:solidFill>
@@ -3390,8 +4256,8 @@
           <a:cs typeface="+mn-cs"/>
         </a:defRPr>
       </a:lvl4pPr>
-      <a:lvl5pPr marL="1495593" algn="l" defTabSz="747796" rtl="0" eaLnBrk="1" latinLnBrk="0" hangingPunct="1">
-        <a:defRPr sz="1472" kern="1200">
+      <a:lvl5pPr marL="1151961" algn="l" defTabSz="575981" rtl="0" eaLnBrk="1" latinLnBrk="0" hangingPunct="1">
+        <a:defRPr sz="1134" kern="1200">
           <a:solidFill>
             <a:schemeClr val="tx1"/>
           </a:solidFill>
@@ -3400,8 +4266,8 @@
           <a:cs typeface="+mn-cs"/>
         </a:defRPr>
       </a:lvl5pPr>
-      <a:lvl6pPr marL="1869491" algn="l" defTabSz="747796" rtl="0" eaLnBrk="1" latinLnBrk="0" hangingPunct="1">
-        <a:defRPr sz="1472" kern="1200">
+      <a:lvl6pPr marL="1439951" algn="l" defTabSz="575981" rtl="0" eaLnBrk="1" latinLnBrk="0" hangingPunct="1">
+        <a:defRPr sz="1134" kern="1200">
           <a:solidFill>
             <a:schemeClr val="tx1"/>
           </a:solidFill>
@@ -3410,8 +4276,8 @@
           <a:cs typeface="+mn-cs"/>
         </a:defRPr>
       </a:lvl6pPr>
-      <a:lvl7pPr marL="2243389" algn="l" defTabSz="747796" rtl="0" eaLnBrk="1" latinLnBrk="0" hangingPunct="1">
-        <a:defRPr sz="1472" kern="1200">
+      <a:lvl7pPr marL="1727942" algn="l" defTabSz="575981" rtl="0" eaLnBrk="1" latinLnBrk="0" hangingPunct="1">
+        <a:defRPr sz="1134" kern="1200">
           <a:solidFill>
             <a:schemeClr val="tx1"/>
           </a:solidFill>
@@ -3420,8 +4286,8 @@
           <a:cs typeface="+mn-cs"/>
         </a:defRPr>
       </a:lvl7pPr>
-      <a:lvl8pPr marL="2617287" algn="l" defTabSz="747796" rtl="0" eaLnBrk="1" latinLnBrk="0" hangingPunct="1">
-        <a:defRPr sz="1472" kern="1200">
+      <a:lvl8pPr marL="2015932" algn="l" defTabSz="575981" rtl="0" eaLnBrk="1" latinLnBrk="0" hangingPunct="1">
+        <a:defRPr sz="1134" kern="1200">
           <a:solidFill>
             <a:schemeClr val="tx1"/>
           </a:solidFill>
@@ -3430,8 +4296,8 @@
           <a:cs typeface="+mn-cs"/>
         </a:defRPr>
       </a:lvl8pPr>
-      <a:lvl9pPr marL="2991185" algn="l" defTabSz="747796" rtl="0" eaLnBrk="1" latinLnBrk="0" hangingPunct="1">
-        <a:defRPr sz="1472" kern="1200">
+      <a:lvl9pPr marL="2303922" algn="l" defTabSz="575981" rtl="0" eaLnBrk="1" latinLnBrk="0" hangingPunct="1">
+        <a:defRPr sz="1134" kern="1200">
           <a:solidFill>
             <a:schemeClr val="tx1"/>
           </a:solidFill>
@@ -3470,10 +4336,10 @@
       </p:grpSpPr>
       <p:grpSp>
         <p:nvGrpSpPr>
-          <p:cNvPr id="48" name="Group 47">
+          <p:cNvPr id="22" name="Group 21">
             <a:extLst>
               <a:ext uri="{FF2B5EF4-FFF2-40B4-BE49-F238E27FC236}">
-                <a16:creationId xmlns:a16="http://schemas.microsoft.com/office/drawing/2014/main" id="{2994C83C-4054-F153-4E3E-A00C801418A8}"/>
+                <a16:creationId xmlns:a16="http://schemas.microsoft.com/office/drawing/2014/main" id="{2F437EA7-D324-F190-DCE8-BE1E67653815}"/>
               </a:ext>
             </a:extLst>
           </p:cNvPr>
@@ -3482,18 +4348,18 @@
         </p:nvGrpSpPr>
         <p:grpSpPr>
           <a:xfrm>
-            <a:off x="6306050" y="262726"/>
-            <a:ext cx="2700654" cy="5083187"/>
-            <a:chOff x="6313808" y="596541"/>
-            <a:chExt cx="2700654" cy="5083187"/>
+            <a:off x="5146246" y="81182"/>
+            <a:ext cx="2219784" cy="4151852"/>
+            <a:chOff x="5146246" y="725707"/>
+            <a:chExt cx="2219784" cy="4151852"/>
           </a:xfrm>
         </p:grpSpPr>
         <p:grpSp>
           <p:nvGrpSpPr>
-            <p:cNvPr id="15" name="Group 14">
+            <p:cNvPr id="14" name="Group 13">
               <a:extLst>
                 <a:ext uri="{FF2B5EF4-FFF2-40B4-BE49-F238E27FC236}">
-                  <a16:creationId xmlns:a16="http://schemas.microsoft.com/office/drawing/2014/main" id="{6FDAF13A-D98A-2A24-C919-E4C439842305}"/>
+                  <a16:creationId xmlns:a16="http://schemas.microsoft.com/office/drawing/2014/main" id="{E88C62F9-2CEB-C0F3-B96E-5F3B4EAD0CEE}"/>
                 </a:ext>
               </a:extLst>
             </p:cNvPr>
@@ -3502,10 +4368,10 @@
           </p:nvGrpSpPr>
           <p:grpSpPr>
             <a:xfrm>
-              <a:off x="6481568" y="2043477"/>
-              <a:ext cx="2368912" cy="2325838"/>
-              <a:chOff x="8713596" y="1678948"/>
-              <a:chExt cx="2368912" cy="2325838"/>
+              <a:off x="5294532" y="1854991"/>
+              <a:ext cx="1937388" cy="1907235"/>
+              <a:chOff x="5294532" y="1854991"/>
+              <a:chExt cx="1937388" cy="1907235"/>
             </a:xfrm>
           </p:grpSpPr>
           <p:pic>
@@ -3530,8 +4396,8 @@
             </p:blipFill>
             <p:spPr>
               <a:xfrm>
-                <a:off x="8713596" y="1678948"/>
-                <a:ext cx="2343568" cy="999875"/>
+                <a:off x="5294532" y="2944490"/>
+                <a:ext cx="1916661" cy="817736"/>
               </a:xfrm>
               <a:prstGeom prst="rect">
                 <a:avLst/>
@@ -3540,10 +4406,10 @@
           </p:pic>
           <p:pic>
             <p:nvPicPr>
-              <p:cNvPr id="12" name="Picture 11" descr="A close-up of a globe&#10;&#10;AI-generated content may be incorrect.">
+              <p:cNvPr id="13" name="Picture 12" descr="A close-up of a globe&#10;&#10;AI-generated content may be incorrect.">
                 <a:extLst>
                   <a:ext uri="{FF2B5EF4-FFF2-40B4-BE49-F238E27FC236}">
-                    <a16:creationId xmlns:a16="http://schemas.microsoft.com/office/drawing/2014/main" id="{44384A69-19BB-4A95-01F6-072E4D5BDE28}"/>
+                    <a16:creationId xmlns:a16="http://schemas.microsoft.com/office/drawing/2014/main" id="{DB022340-FA5F-8274-2888-F2D3B0059FB5}"/>
                   </a:ext>
                 </a:extLst>
               </p:cNvPr>
@@ -3560,8 +4426,8 @@
             </p:blipFill>
             <p:spPr>
               <a:xfrm>
-                <a:off x="8738940" y="2885081"/>
-                <a:ext cx="2343568" cy="1119705"/>
+                <a:off x="5315259" y="1854991"/>
+                <a:ext cx="1916661" cy="915738"/>
               </a:xfrm>
               <a:prstGeom prst="rect">
                 <a:avLst/>
@@ -3583,8 +4449,8 @@
           </p:nvSpPr>
           <p:spPr>
             <a:xfrm>
-              <a:off x="6313808" y="596543"/>
-              <a:ext cx="2700654" cy="646331"/>
+              <a:off x="5157331" y="725709"/>
+              <a:ext cx="2208699" cy="523220"/>
             </a:xfrm>
             <a:prstGeom prst="rect">
               <a:avLst/>
@@ -3605,20 +4471,20 @@
             </a:bodyPr>
             <a:lstStyle/>
             <a:p>
-              <a:pPr algn="ctr" defTabSz="457200"/>
+              <a:pPr algn="ctr" defTabSz="373898"/>
               <a:r>
-                <a:rPr lang="zh-CN" altLang="en-US" b="1" kern="0" dirty="0"/>
+                <a:rPr lang="zh-CN" altLang="en-US" sz="1400" b="1" kern="0" dirty="0"/>
                 <a:t>太阳能光伏发电模型</a:t>
               </a:r>
-              <a:endParaRPr lang="en-GB" altLang="zh-CN" b="1" kern="0" dirty="0"/>
+              <a:endParaRPr lang="en-GB" altLang="zh-CN" sz="1400" b="1" kern="0" dirty="0"/>
             </a:p>
             <a:p>
-              <a:pPr algn="ctr" defTabSz="457200"/>
+              <a:pPr algn="ctr" defTabSz="373898"/>
               <a:r>
-                <a:rPr lang="zh-CN" altLang="en-US" b="1" kern="0" dirty="0"/>
+                <a:rPr lang="zh-CN" altLang="en-US" sz="1400" b="1" kern="0" dirty="0"/>
                 <a:t>健康效应评估模型</a:t>
               </a:r>
-              <a:endParaRPr lang="en-GB" altLang="zh-CN" b="1" kern="0" dirty="0"/>
+              <a:endParaRPr lang="en-GB" altLang="zh-CN" sz="1400" b="1" kern="0" dirty="0"/>
             </a:p>
           </p:txBody>
         </p:sp>
@@ -3636,8 +4502,8 @@
           </p:nvSpPr>
           <p:spPr>
             <a:xfrm>
-              <a:off x="6313809" y="5033397"/>
-              <a:ext cx="2700652" cy="646331"/>
+              <a:off x="5146246" y="4354339"/>
+              <a:ext cx="2208697" cy="523220"/>
             </a:xfrm>
             <a:prstGeom prst="rect">
               <a:avLst/>
@@ -3658,16 +4524,24 @@
             </a:bodyPr>
             <a:lstStyle/>
             <a:p>
-              <a:pPr algn="ctr" defTabSz="457200"/>
+              <a:pPr algn="ctr" defTabSz="373898"/>
               <a:r>
-                <a:rPr lang="zh-CN" altLang="en-US" b="1" kern="0"/>
-                <a:t>能源健康效应</a:t>
+                <a:rPr lang="zh-CN" altLang="en-US" sz="1400" b="1" kern="0" dirty="0"/>
+                <a:t>过早死亡人数</a:t>
               </a:r>
-              <a:endParaRPr lang="en-GB" altLang="zh-CN" b="1" kern="0" dirty="0"/>
+              <a:endParaRPr lang="en-GB" altLang="zh-CN" sz="1400" b="1" kern="0" dirty="0"/>
             </a:p>
             <a:p>
-              <a:pPr algn="ctr" defTabSz="457200"/>
-              <a:endParaRPr lang="en-GB" altLang="zh-CN" b="1" kern="0" dirty="0"/>
+              <a:pPr algn="ctr" defTabSz="373898"/>
+              <a:r>
+                <a:rPr lang="zh-CN" altLang="en-GB" sz="1400" b="1" kern="0" dirty="0"/>
+                <a:t>太阳能</a:t>
+              </a:r>
+              <a:r>
+                <a:rPr lang="zh-CN" altLang="en-US" sz="1400" b="1" kern="0" dirty="0"/>
+                <a:t>光伏发电损失</a:t>
+              </a:r>
+              <a:endParaRPr lang="en-GB" altLang="zh-CN" sz="1400" b="1" kern="0" dirty="0"/>
             </a:p>
           </p:txBody>
         </p:sp>
@@ -3685,8 +4559,8 @@
           </p:nvSpPr>
           <p:spPr>
             <a:xfrm>
-              <a:off x="6313808" y="596541"/>
-              <a:ext cx="2700653" cy="5068291"/>
+              <a:off x="5157331" y="725707"/>
+              <a:ext cx="2208698" cy="4145044"/>
             </a:xfrm>
             <a:prstGeom prst="rect">
               <a:avLst/>
@@ -3721,7 +4595,7 @@
             <a:lstStyle/>
             <a:p>
               <a:pPr algn="ctr"/>
-              <a:endParaRPr lang="en-US"/>
+              <a:endParaRPr lang="en-US" sz="1472"/>
             </a:p>
           </p:txBody>
         </p:sp>
@@ -3740,8 +4614,8 @@
         </p:nvGrpSpPr>
         <p:grpSpPr>
           <a:xfrm>
-            <a:off x="3173559" y="262727"/>
-            <a:ext cx="2700654" cy="5068290"/>
+            <a:off x="2595460" y="81183"/>
+            <a:ext cx="2208699" cy="4145043"/>
             <a:chOff x="3177533" y="596542"/>
             <a:chExt cx="2700654" cy="5068290"/>
           </a:xfrm>
@@ -3861,7 +4735,7 @@
               <p:spPr>
                 <a:xfrm>
                   <a:off x="7127310" y="3792228"/>
-                  <a:ext cx="1144246" cy="369332"/>
+                  <a:ext cx="1144246" cy="389893"/>
                 </a:xfrm>
                 <a:prstGeom prst="rect">
                   <a:avLst/>
@@ -3883,7 +4757,7 @@
                 <a:p>
                   <a:pPr algn="ctr"/>
                   <a:r>
-                    <a:rPr lang="en-US" dirty="0">
+                    <a:rPr lang="en-US" sz="1400" dirty="0">
                       <a:latin typeface="Arial" panose="020B0604020202020204" pitchFamily="34" charset="0"/>
                       <a:cs typeface="Arial" panose="020B0604020202020204" pitchFamily="34" charset="0"/>
                     </a:rPr>
@@ -3909,7 +4783,7 @@
           <p:spPr>
             <a:xfrm>
               <a:off x="3177533" y="596543"/>
-              <a:ext cx="2700654" cy="646331"/>
+              <a:ext cx="2700654" cy="639760"/>
             </a:xfrm>
             <a:prstGeom prst="rect">
               <a:avLst/>
@@ -3930,24 +4804,24 @@
             </a:bodyPr>
             <a:lstStyle/>
             <a:p>
-              <a:pPr algn="ctr" defTabSz="457200"/>
+              <a:pPr algn="ctr" defTabSz="373898"/>
               <a:r>
-                <a:rPr lang="zh-CN" altLang="en-GB" b="1" kern="0" dirty="0"/>
+                <a:rPr lang="zh-CN" altLang="en-GB" sz="1400" b="1" kern="0" dirty="0"/>
                 <a:t>大气化学</a:t>
               </a:r>
               <a:r>
-                <a:rPr lang="zh-CN" altLang="en-US" b="1" kern="0" dirty="0"/>
+                <a:rPr lang="zh-CN" altLang="en-US" sz="1400" b="1" kern="0" dirty="0"/>
                 <a:t>传输模型</a:t>
               </a:r>
-              <a:endParaRPr lang="en-GB" altLang="zh-CN" b="1" kern="0" dirty="0"/>
+              <a:endParaRPr lang="en-GB" altLang="zh-CN" sz="1400" b="1" kern="0" dirty="0"/>
             </a:p>
             <a:p>
-              <a:pPr algn="ctr" defTabSz="457200"/>
+              <a:pPr algn="ctr" defTabSz="373898"/>
               <a:r>
-                <a:rPr lang="zh-CN" altLang="en-US" b="1" kern="0" dirty="0"/>
+                <a:rPr lang="zh-CN" altLang="en-US" sz="1400" b="1" kern="0" dirty="0"/>
                 <a:t>辐射传输模型</a:t>
               </a:r>
-              <a:endParaRPr lang="en-GB" altLang="zh-CN" b="1" kern="0" dirty="0"/>
+              <a:endParaRPr lang="en-GB" altLang="zh-CN" sz="1400" b="1" kern="0" dirty="0"/>
             </a:p>
           </p:txBody>
         </p:sp>
@@ -3965,8 +4839,8 @@
           </p:nvSpPr>
           <p:spPr>
             <a:xfrm>
-              <a:off x="3177533" y="5012095"/>
-              <a:ext cx="2700652" cy="646331"/>
+              <a:off x="3177533" y="5018503"/>
+              <a:ext cx="2700652" cy="639759"/>
             </a:xfrm>
             <a:prstGeom prst="rect">
               <a:avLst/>
@@ -3987,16 +4861,24 @@
             </a:bodyPr>
             <a:lstStyle/>
             <a:p>
-              <a:pPr algn="ctr" defTabSz="457200"/>
+              <a:pPr algn="ctr" defTabSz="373898"/>
               <a:r>
-                <a:rPr lang="zh-CN" altLang="en-US" b="1" kern="0" dirty="0"/>
-                <a:t>污染物浓度及其辐射效应</a:t>
+                <a:rPr lang="zh-CN" altLang="en-US" sz="1400" b="1" kern="0" dirty="0"/>
+                <a:t>大气污染物浓度</a:t>
               </a:r>
-              <a:endParaRPr lang="en-GB" altLang="zh-CN" b="1" kern="0" dirty="0"/>
+              <a:endParaRPr lang="en-GB" altLang="zh-CN" sz="1400" b="1" kern="0" dirty="0"/>
             </a:p>
             <a:p>
-              <a:pPr algn="ctr" defTabSz="457200"/>
-              <a:endParaRPr lang="en-GB" altLang="zh-CN" b="1" kern="0" dirty="0"/>
+              <a:pPr algn="ctr" defTabSz="373898"/>
+              <a:r>
+                <a:rPr lang="zh-CN" altLang="en-US" sz="1400" b="1" kern="0"/>
+                <a:t>及其辐射</a:t>
+              </a:r>
+              <a:r>
+                <a:rPr lang="zh-CN" altLang="en-US" sz="1400" b="1" kern="0" dirty="0"/>
+                <a:t>效应</a:t>
+              </a:r>
+              <a:endParaRPr lang="en-GB" altLang="zh-CN" sz="1400" b="1" kern="0" dirty="0"/>
             </a:p>
           </p:txBody>
         </p:sp>
@@ -4050,17 +4932,17 @@
             <a:lstStyle/>
             <a:p>
               <a:pPr algn="ctr"/>
-              <a:endParaRPr lang="en-US"/>
+              <a:endParaRPr lang="en-US" sz="1472"/>
             </a:p>
           </p:txBody>
         </p:sp>
       </p:grpSp>
       <p:grpSp>
         <p:nvGrpSpPr>
-          <p:cNvPr id="53" name="Group 52">
+          <p:cNvPr id="21" name="Group 20">
             <a:extLst>
               <a:ext uri="{FF2B5EF4-FFF2-40B4-BE49-F238E27FC236}">
-                <a16:creationId xmlns:a16="http://schemas.microsoft.com/office/drawing/2014/main" id="{41D873E6-2210-B5AD-BA4C-37894CB9A0E7}"/>
+                <a16:creationId xmlns:a16="http://schemas.microsoft.com/office/drawing/2014/main" id="{F0E8C558-6F1C-4035-8DCB-523A74430986}"/>
               </a:ext>
             </a:extLst>
           </p:cNvPr>
@@ -4069,12 +4951,351 @@
         </p:nvGrpSpPr>
         <p:grpSpPr>
           <a:xfrm>
-            <a:off x="38546" y="262726"/>
-            <a:ext cx="2703174" cy="5068290"/>
-            <a:chOff x="41260" y="596541"/>
-            <a:chExt cx="2703174" cy="5068290"/>
+            <a:off x="29463" y="81181"/>
+            <a:ext cx="2218068" cy="4149216"/>
+            <a:chOff x="29463" y="725706"/>
+            <a:chExt cx="2218068" cy="4149216"/>
           </a:xfrm>
         </p:grpSpPr>
+        <p:grpSp>
+          <p:nvGrpSpPr>
+            <p:cNvPr id="20" name="Group 19">
+              <a:extLst>
+                <a:ext uri="{FF2B5EF4-FFF2-40B4-BE49-F238E27FC236}">
+                  <a16:creationId xmlns:a16="http://schemas.microsoft.com/office/drawing/2014/main" id="{93100638-5B02-B883-8B55-5B0B9E4B9A67}"/>
+                </a:ext>
+              </a:extLst>
+            </p:cNvPr>
+            <p:cNvGrpSpPr/>
+            <p:nvPr/>
+          </p:nvGrpSpPr>
+          <p:grpSpPr>
+            <a:xfrm>
+              <a:off x="29463" y="1380982"/>
+              <a:ext cx="2218068" cy="2838666"/>
+              <a:chOff x="29463" y="1454430"/>
+              <a:chExt cx="2218068" cy="2838666"/>
+            </a:xfrm>
+          </p:grpSpPr>
+          <p:pic>
+            <p:nvPicPr>
+              <p:cNvPr id="9" name="Picture 8" descr="A graph of different colored lines&#10;&#10;AI-generated content may be incorrect.">
+                <a:extLst>
+                  <a:ext uri="{FF2B5EF4-FFF2-40B4-BE49-F238E27FC236}">
+                    <a16:creationId xmlns:a16="http://schemas.microsoft.com/office/drawing/2014/main" id="{F741769C-D5AA-7480-B87B-21EB5C91A35F}"/>
+                  </a:ext>
+                </a:extLst>
+              </p:cNvPr>
+              <p:cNvPicPr>
+                <a:picLocks noChangeAspect="1"/>
+              </p:cNvPicPr>
+              <p:nvPr/>
+            </p:nvPicPr>
+            <p:blipFill>
+              <a:blip r:embed="rId7"/>
+              <a:stretch>
+                <a:fillRect/>
+              </a:stretch>
+            </p:blipFill>
+            <p:spPr>
+              <a:xfrm>
+                <a:off x="31525" y="1454430"/>
+                <a:ext cx="2216006" cy="1187542"/>
+              </a:xfrm>
+              <a:prstGeom prst="rect">
+                <a:avLst/>
+              </a:prstGeom>
+            </p:spPr>
+          </p:pic>
+          <p:pic>
+            <p:nvPicPr>
+              <p:cNvPr id="11" name="Picture 4">
+                <a:extLst>
+                  <a:ext uri="{FF2B5EF4-FFF2-40B4-BE49-F238E27FC236}">
+                    <a16:creationId xmlns:a16="http://schemas.microsoft.com/office/drawing/2014/main" id="{7CF1955A-01A2-F126-9BCE-81C4BC5EFA72}"/>
+                  </a:ext>
+                </a:extLst>
+              </p:cNvPr>
+              <p:cNvPicPr>
+                <a:picLocks noChangeAspect="1" noChangeArrowheads="1"/>
+              </p:cNvPicPr>
+              <p:nvPr/>
+            </p:nvPicPr>
+            <p:blipFill>
+              <a:blip r:embed="rId8">
+                <a:extLst>
+                  <a:ext uri="{28A0092B-C50C-407E-A947-70E740481C1C}">
+                    <a14:useLocalDpi xmlns:a14="http://schemas.microsoft.com/office/drawing/2010/main" val="0"/>
+                  </a:ext>
+                </a:extLst>
+              </a:blip>
+              <a:srcRect/>
+              <a:stretch>
+                <a:fillRect/>
+              </a:stretch>
+            </p:blipFill>
+            <p:spPr bwMode="auto">
+              <a:xfrm>
+                <a:off x="41031" y="2969106"/>
+                <a:ext cx="2196995" cy="1323990"/>
+              </a:xfrm>
+              <a:prstGeom prst="rect">
+                <a:avLst/>
+              </a:prstGeom>
+              <a:noFill/>
+              <a:extLst>
+                <a:ext uri="{909E8E84-426E-40DD-AFC4-6F175D3DCCD1}">
+                  <a14:hiddenFill xmlns:a14="http://schemas.microsoft.com/office/drawing/2010/main">
+                    <a:solidFill>
+                      <a:srgbClr val="FFFFFF"/>
+                    </a:solidFill>
+                  </a14:hiddenFill>
+                </a:ext>
+              </a:extLst>
+            </p:spPr>
+          </p:pic>
+          <mc:AlternateContent xmlns:mc="http://schemas.openxmlformats.org/markup-compatibility/2006" xmlns:a14="http://schemas.microsoft.com/office/drawing/2010/main">
+            <mc:Choice Requires="a14">
+              <p:sp>
+                <p:nvSpPr>
+                  <p:cNvPr id="17" name="TextBox 16">
+                    <a:extLst>
+                      <a:ext uri="{FF2B5EF4-FFF2-40B4-BE49-F238E27FC236}">
+                        <a16:creationId xmlns:a16="http://schemas.microsoft.com/office/drawing/2014/main" id="{C7777CCE-2A99-24E3-1D0F-D0941AAFF4F2}"/>
+                      </a:ext>
+                    </a:extLst>
+                  </p:cNvPr>
+                  <p:cNvSpPr txBox="1"/>
+                  <p:nvPr/>
+                </p:nvSpPr>
+                <p:spPr>
+                  <a:xfrm>
+                    <a:off x="29463" y="2642449"/>
+                    <a:ext cx="2209534" cy="326180"/>
+                  </a:xfrm>
+                  <a:prstGeom prst="rect">
+                    <a:avLst/>
+                  </a:prstGeom>
+                  <a:noFill/>
+                  <a:ln>
+                    <a:noFill/>
+                  </a:ln>
+                </p:spPr>
+                <p:txBody>
+                  <a:bodyPr wrap="square" rtlCol="0">
+                    <a:spAutoFit/>
+                  </a:bodyPr>
+                  <a:lstStyle/>
+                  <a:p>
+                    <a:pPr algn="ctr"/>
+                    <a14:m>
+                      <m:oMathPara xmlns:m="http://schemas.openxmlformats.org/officeDocument/2006/math">
+                        <m:oMathParaPr>
+                          <m:jc m:val="centerGroup"/>
+                        </m:oMathParaPr>
+                        <m:oMath xmlns:m="http://schemas.openxmlformats.org/officeDocument/2006/math">
+                          <m:sSup>
+                            <m:sSupPr>
+                              <m:ctrlPr>
+                                <a:rPr lang="en-US" sz="1400" i="1">
+                                  <a:latin typeface="Cambria Math" panose="02040503050406030204" pitchFamily="18" charset="0"/>
+                                  <a:cs typeface="Arial" panose="020B0604020202020204" pitchFamily="34" charset="0"/>
+                                </a:rPr>
+                              </m:ctrlPr>
+                            </m:sSupPr>
+                            <m:e>
+                              <m:r>
+                                <m:rPr>
+                                  <m:sty m:val="p"/>
+                                </m:rPr>
+                                <a:rPr lang="en-US" sz="1400" i="1">
+                                  <a:latin typeface="Cambria Math" panose="02040503050406030204" pitchFamily="18" charset="0"/>
+                                  <a:cs typeface="Arial" panose="020B0604020202020204" pitchFamily="34" charset="0"/>
+                                </a:rPr>
+                                <m:t>E</m:t>
+                              </m:r>
+                            </m:e>
+                            <m:sup>
+                              <m:r>
+                                <a:rPr lang="en-GB" sz="1400" i="1">
+                                  <a:latin typeface="Cambria Math" panose="02040503050406030204" pitchFamily="18" charset="0"/>
+                                  <a:cs typeface="Arial" panose="020B0604020202020204" pitchFamily="34" charset="0"/>
+                                </a:rPr>
+                                <m:t>′</m:t>
+                              </m:r>
+                            </m:sup>
+                          </m:sSup>
+                          <m:r>
+                            <a:rPr lang="en-GB" sz="1400" i="1">
+                              <a:latin typeface="Cambria Math" panose="02040503050406030204" pitchFamily="18" charset="0"/>
+                              <a:cs typeface="Arial" panose="020B0604020202020204" pitchFamily="34" charset="0"/>
+                            </a:rPr>
+                            <m:t>=</m:t>
+                          </m:r>
+                          <m:acc>
+                            <m:accPr>
+                              <m:chr m:val="̂"/>
+                              <m:ctrlPr>
+                                <a:rPr lang="en-GB" sz="1400" i="1">
+                                  <a:latin typeface="Cambria Math" panose="02040503050406030204" pitchFamily="18" charset="0"/>
+                                  <a:cs typeface="Arial" panose="020B0604020202020204" pitchFamily="34" charset="0"/>
+                                </a:rPr>
+                              </m:ctrlPr>
+                            </m:accPr>
+                            <m:e>
+                              <m:r>
+                                <a:rPr lang="en-GB" sz="1400" i="1">
+                                  <a:latin typeface="Cambria Math" panose="02040503050406030204" pitchFamily="18" charset="0"/>
+                                  <a:cs typeface="Arial" panose="020B0604020202020204" pitchFamily="34" charset="0"/>
+                                </a:rPr>
+                                <m:t>𝑓</m:t>
+                              </m:r>
+                            </m:e>
+                          </m:acc>
+                          <m:sSup>
+                            <m:sSupPr>
+                              <m:ctrlPr>
+                                <a:rPr lang="en-US" sz="1400" i="1">
+                                  <a:latin typeface="Cambria Math" panose="02040503050406030204" pitchFamily="18" charset="0"/>
+                                  <a:cs typeface="Arial" panose="020B0604020202020204" pitchFamily="34" charset="0"/>
+                                </a:rPr>
+                              </m:ctrlPr>
+                            </m:sSupPr>
+                            <m:e>
+                              <m:r>
+                                <a:rPr lang="en-GB" sz="1400" i="1">
+                                  <a:latin typeface="Cambria Math" panose="02040503050406030204" pitchFamily="18" charset="0"/>
+                                  <a:cs typeface="Arial" panose="020B0604020202020204" pitchFamily="34" charset="0"/>
+                                </a:rPr>
+                                <m:t>(</m:t>
+                              </m:r>
+                              <m:r>
+                                <a:rPr lang="en-GB" sz="1400" i="1">
+                                  <a:latin typeface="Cambria Math" panose="02040503050406030204" pitchFamily="18" charset="0"/>
+                                  <a:cs typeface="Arial" panose="020B0604020202020204" pitchFamily="34" charset="0"/>
+                                </a:rPr>
+                                <m:t>𝐼</m:t>
+                              </m:r>
+                              <m:r>
+                                <a:rPr lang="en-GB" sz="1400" i="1">
+                                  <a:latin typeface="Cambria Math" panose="02040503050406030204" pitchFamily="18" charset="0"/>
+                                  <a:cs typeface="Arial" panose="020B0604020202020204" pitchFamily="34" charset="0"/>
+                                </a:rPr>
+                                <m:t>−</m:t>
+                              </m:r>
+                              <m:r>
+                                <a:rPr lang="en-GB" sz="1400" i="1">
+                                  <a:latin typeface="Cambria Math" panose="02040503050406030204" pitchFamily="18" charset="0"/>
+                                  <a:cs typeface="Arial" panose="020B0604020202020204" pitchFamily="34" charset="0"/>
+                                </a:rPr>
+                                <m:t>𝐴</m:t>
+                              </m:r>
+                              <m:r>
+                                <a:rPr lang="en-GB" sz="1400" i="1">
+                                  <a:latin typeface="Cambria Math" panose="02040503050406030204" pitchFamily="18" charset="0"/>
+                                  <a:cs typeface="Arial" panose="020B0604020202020204" pitchFamily="34" charset="0"/>
+                                </a:rPr>
+                                <m:t>)</m:t>
+                              </m:r>
+                            </m:e>
+                            <m:sup>
+                              <m:r>
+                                <a:rPr lang="en-GB" sz="1400" i="1">
+                                  <a:latin typeface="Cambria Math" panose="02040503050406030204" pitchFamily="18" charset="0"/>
+                                  <a:cs typeface="Arial" panose="020B0604020202020204" pitchFamily="34" charset="0"/>
+                                </a:rPr>
+                                <m:t>−1</m:t>
+                              </m:r>
+                            </m:sup>
+                          </m:sSup>
+                          <m:sSup>
+                            <m:sSupPr>
+                              <m:ctrlPr>
+                                <a:rPr lang="en-US" sz="1400" i="1">
+                                  <a:latin typeface="Cambria Math" panose="02040503050406030204" pitchFamily="18" charset="0"/>
+                                  <a:cs typeface="Arial" panose="020B0604020202020204" pitchFamily="34" charset="0"/>
+                                </a:rPr>
+                              </m:ctrlPr>
+                            </m:sSupPr>
+                            <m:e>
+                              <m:r>
+                                <a:rPr lang="en-GB" sz="1400" i="1">
+                                  <a:latin typeface="Cambria Math" panose="02040503050406030204" pitchFamily="18" charset="0"/>
+                                  <a:cs typeface="Arial" panose="020B0604020202020204" pitchFamily="34" charset="0"/>
+                                </a:rPr>
+                                <m:t>𝑦</m:t>
+                              </m:r>
+                            </m:e>
+                            <m:sup>
+                              <m:r>
+                                <a:rPr lang="en-GB" sz="1400" i="1">
+                                  <a:latin typeface="Cambria Math" panose="02040503050406030204" pitchFamily="18" charset="0"/>
+                                  <a:cs typeface="Arial" panose="020B0604020202020204" pitchFamily="34" charset="0"/>
+                                </a:rPr>
+                                <m:t>−1</m:t>
+                              </m:r>
+                            </m:sup>
+                          </m:sSup>
+                        </m:oMath>
+                      </m:oMathPara>
+                    </a14:m>
+                    <a:endParaRPr lang="en-US" sz="1400" dirty="0">
+                      <a:latin typeface="Arial" panose="020B0604020202020204" pitchFamily="34" charset="0"/>
+                      <a:cs typeface="Arial" panose="020B0604020202020204" pitchFamily="34" charset="0"/>
+                    </a:endParaRPr>
+                  </a:p>
+                </p:txBody>
+              </p:sp>
+            </mc:Choice>
+            <mc:Fallback xmlns="">
+              <p:sp>
+                <p:nvSpPr>
+                  <p:cNvPr id="17" name="TextBox 16">
+                    <a:extLst>
+                      <a:ext uri="{FF2B5EF4-FFF2-40B4-BE49-F238E27FC236}">
+                        <a16:creationId xmlns:a16="http://schemas.microsoft.com/office/drawing/2014/main" id="{C7777CCE-2A99-24E3-1D0F-D0941AAFF4F2}"/>
+                      </a:ext>
+                    </a:extLst>
+                  </p:cNvPr>
+                  <p:cNvSpPr txBox="1">
+                    <a:spLocks noRot="1" noChangeAspect="1" noMove="1" noResize="1" noEditPoints="1" noAdjustHandles="1" noChangeArrowheads="1" noChangeShapeType="1" noTextEdit="1"/>
+                  </p:cNvSpPr>
+                  <p:nvPr/>
+                </p:nvSpPr>
+                <p:spPr>
+                  <a:xfrm>
+                    <a:off x="29463" y="2642449"/>
+                    <a:ext cx="2209534" cy="326180"/>
+                  </a:xfrm>
+                  <a:prstGeom prst="rect">
+                    <a:avLst/>
+                  </a:prstGeom>
+                  <a:blipFill>
+                    <a:blip r:embed="rId9"/>
+                    <a:stretch>
+                      <a:fillRect b="-7407"/>
+                    </a:stretch>
+                  </a:blipFill>
+                  <a:ln>
+                    <a:noFill/>
+                  </a:ln>
+                </p:spPr>
+                <p:txBody>
+                  <a:bodyPr/>
+                  <a:lstStyle/>
+                  <a:p>
+                    <a:r>
+                      <a:rPr lang="en-US">
+                        <a:noFill/>
+                      </a:rPr>
+                      <a:t> </a:t>
+                    </a:r>
+                  </a:p>
+                </p:txBody>
+              </p:sp>
+            </mc:Fallback>
+          </mc:AlternateContent>
+        </p:grpSp>
         <p:sp>
           <p:nvSpPr>
             <p:cNvPr id="45" name="TextBox 44">
@@ -4089,8 +5310,8 @@
           </p:nvSpPr>
           <p:spPr>
             <a:xfrm>
-              <a:off x="41260" y="596543"/>
-              <a:ext cx="2700654" cy="646331"/>
+              <a:off x="31525" y="725708"/>
+              <a:ext cx="2208699" cy="523220"/>
             </a:xfrm>
             <a:prstGeom prst="rect">
               <a:avLst/>
@@ -4111,24 +5332,20 @@
             </a:bodyPr>
             <a:lstStyle/>
             <a:p>
-              <a:pPr algn="ctr" defTabSz="457200"/>
+              <a:pPr algn="ctr" defTabSz="373898"/>
               <a:r>
-                <a:rPr lang="zh-CN" altLang="en-US" b="1" kern="0" dirty="0"/>
-                <a:t>排放清单模型</a:t>
+                <a:rPr lang="zh-CN" altLang="en-US" sz="1400" b="1" kern="0" dirty="0"/>
+                <a:t>排放清单和投入产出模型</a:t>
               </a:r>
-              <a:endParaRPr lang="en-GB" altLang="zh-CN" b="1" kern="0" dirty="0"/>
+              <a:endParaRPr lang="en-GB" altLang="zh-CN" sz="1400" b="1" kern="0" dirty="0"/>
             </a:p>
             <a:p>
-              <a:pPr algn="ctr" defTabSz="457200"/>
+              <a:pPr algn="ctr" defTabSz="373898"/>
               <a:r>
-                <a:rPr lang="zh-CN" altLang="en-GB" b="1" kern="0" dirty="0"/>
-                <a:t>投入产出</a:t>
+                <a:rPr lang="zh-CN" altLang="en-US" sz="1400" b="1" kern="0" dirty="0"/>
+                <a:t>再分析气象资料</a:t>
               </a:r>
-              <a:r>
-                <a:rPr lang="zh-CN" altLang="en-US" b="1" kern="0" dirty="0"/>
-                <a:t>模型</a:t>
-              </a:r>
-              <a:endParaRPr lang="en-GB" altLang="zh-CN" b="1" kern="0" dirty="0"/>
+              <a:endParaRPr lang="en-GB" altLang="zh-CN" sz="1400" b="1" kern="0" dirty="0"/>
             </a:p>
           </p:txBody>
         </p:sp>
@@ -4146,8 +5363,8 @@
           </p:nvSpPr>
           <p:spPr>
             <a:xfrm>
-              <a:off x="43782" y="5018500"/>
-              <a:ext cx="2700652" cy="646331"/>
+              <a:off x="33588" y="4351702"/>
+              <a:ext cx="2208697" cy="523220"/>
             </a:xfrm>
             <a:prstGeom prst="rect">
               <a:avLst/>
@@ -4168,24 +5385,20 @@
             </a:bodyPr>
             <a:lstStyle/>
             <a:p>
-              <a:pPr algn="ctr" defTabSz="457200"/>
+              <a:pPr algn="ctr" defTabSz="373898"/>
               <a:r>
-                <a:rPr lang="zh-CN" altLang="en-US" b="1" kern="0" dirty="0"/>
-                <a:t>生产端排放清单</a:t>
+                <a:rPr lang="zh-CN" altLang="en-US" sz="1400" b="1" kern="0" dirty="0"/>
+                <a:t>生产和消费端排放清单</a:t>
               </a:r>
-              <a:endParaRPr lang="en-GB" altLang="zh-CN" b="1" kern="0" dirty="0"/>
+              <a:endParaRPr lang="en-GB" altLang="zh-CN" sz="1400" b="1" kern="0" dirty="0"/>
             </a:p>
             <a:p>
-              <a:pPr algn="ctr" defTabSz="457200"/>
+              <a:pPr algn="ctr" defTabSz="373898"/>
               <a:r>
-                <a:rPr lang="zh-CN" altLang="en-GB" b="1" kern="0" dirty="0"/>
-                <a:t>消费</a:t>
+                <a:rPr lang="zh-CN" altLang="en-US" sz="1400" b="1" kern="0" dirty="0"/>
+                <a:t>离线气象场</a:t>
               </a:r>
-              <a:r>
-                <a:rPr lang="zh-CN" altLang="en-US" b="1" kern="0" dirty="0"/>
-                <a:t>端排放清单</a:t>
-              </a:r>
-              <a:endParaRPr lang="en-GB" altLang="zh-CN" b="1" kern="0" dirty="0"/>
+              <a:endParaRPr lang="en-GB" altLang="zh-CN" sz="1400" b="1" kern="0" dirty="0"/>
             </a:p>
           </p:txBody>
         </p:sp>
@@ -4203,8 +5416,8 @@
           </p:nvSpPr>
           <p:spPr>
             <a:xfrm>
-              <a:off x="41260" y="596541"/>
-              <a:ext cx="2700653" cy="5068290"/>
+              <a:off x="31525" y="725706"/>
+              <a:ext cx="2208698" cy="4145043"/>
             </a:xfrm>
             <a:prstGeom prst="rect">
               <a:avLst/>
@@ -4239,90 +5452,10 @@
             <a:lstStyle/>
             <a:p>
               <a:pPr algn="ctr"/>
-              <a:endParaRPr lang="en-US"/>
+              <a:endParaRPr lang="en-US" sz="1472"/>
             </a:p>
           </p:txBody>
         </p:sp>
-        <p:grpSp>
-          <p:nvGrpSpPr>
-            <p:cNvPr id="25" name="Group 24">
-              <a:extLst>
-                <a:ext uri="{FF2B5EF4-FFF2-40B4-BE49-F238E27FC236}">
-                  <a16:creationId xmlns:a16="http://schemas.microsoft.com/office/drawing/2014/main" id="{4406F021-0E03-596F-67B9-4F6855EBECC6}"/>
-                </a:ext>
-              </a:extLst>
-            </p:cNvPr>
-            <p:cNvGrpSpPr/>
-            <p:nvPr/>
-          </p:nvGrpSpPr>
-          <p:grpSpPr>
-            <a:xfrm>
-              <a:off x="218303" y="1519649"/>
-              <a:ext cx="2345068" cy="3287548"/>
-              <a:chOff x="218303" y="1343492"/>
-              <a:chExt cx="2345068" cy="3287548"/>
-            </a:xfrm>
-          </p:grpSpPr>
-          <p:pic>
-            <p:nvPicPr>
-              <p:cNvPr id="10" name="Picture 9" descr="A white bus with smoke coming out of it&#10;&#10;AI-generated content may be incorrect.">
-                <a:extLst>
-                  <a:ext uri="{FF2B5EF4-FFF2-40B4-BE49-F238E27FC236}">
-                    <a16:creationId xmlns:a16="http://schemas.microsoft.com/office/drawing/2014/main" id="{D2BE00DF-8707-891C-53FA-60E4BAB6D36B}"/>
-                  </a:ext>
-                </a:extLst>
-              </p:cNvPr>
-              <p:cNvPicPr>
-                <a:picLocks noChangeAspect="1"/>
-              </p:cNvPicPr>
-              <p:nvPr/>
-            </p:nvPicPr>
-            <p:blipFill>
-              <a:blip r:embed="rId7"/>
-              <a:stretch>
-                <a:fillRect/>
-              </a:stretch>
-            </p:blipFill>
-            <p:spPr>
-              <a:xfrm>
-                <a:off x="219804" y="1343492"/>
-                <a:ext cx="2343567" cy="1757676"/>
-              </a:xfrm>
-              <a:prstGeom prst="rect">
-                <a:avLst/>
-              </a:prstGeom>
-            </p:spPr>
-          </p:pic>
-          <p:pic>
-            <p:nvPicPr>
-              <p:cNvPr id="6" name="Picture 5" descr="A close-up of a logo&#10;&#10;AI-generated content may be incorrect.">
-                <a:extLst>
-                  <a:ext uri="{FF2B5EF4-FFF2-40B4-BE49-F238E27FC236}">
-                    <a16:creationId xmlns:a16="http://schemas.microsoft.com/office/drawing/2014/main" id="{61D95559-F04F-B9A9-951E-ABB33C6B3959}"/>
-                  </a:ext>
-                </a:extLst>
-              </p:cNvPr>
-              <p:cNvPicPr>
-                <a:picLocks noChangeAspect="1"/>
-              </p:cNvPicPr>
-              <p:nvPr/>
-            </p:nvPicPr>
-            <p:blipFill>
-              <a:blip r:embed="rId8"/>
-              <a:srcRect t="10892" b="10892"/>
-              <a:stretch/>
-            </p:blipFill>
-            <p:spPr>
-              <a:xfrm>
-                <a:off x="218303" y="2796802"/>
-                <a:ext cx="2345068" cy="1834238"/>
-              </a:xfrm>
-              <a:prstGeom prst="rect">
-                <a:avLst/>
-              </a:prstGeom>
-            </p:spPr>
-          </p:pic>
-        </p:grpSp>
       </p:grpSp>
       <p:grpSp>
         <p:nvGrpSpPr>
@@ -4338,8 +5471,8 @@
         </p:nvGrpSpPr>
         <p:grpSpPr>
           <a:xfrm>
-            <a:off x="9447372" y="262726"/>
-            <a:ext cx="2706082" cy="5068291"/>
+            <a:off x="7726425" y="81182"/>
+            <a:ext cx="2213138" cy="4145044"/>
             <a:chOff x="9450086" y="596541"/>
             <a:chExt cx="2706082" cy="5068291"/>
           </a:xfrm>
@@ -4359,7 +5492,7 @@
           <p:spPr>
             <a:xfrm>
               <a:off x="9455514" y="596543"/>
-              <a:ext cx="2700654" cy="646331"/>
+              <a:ext cx="2700654" cy="639760"/>
             </a:xfrm>
             <a:prstGeom prst="rect">
               <a:avLst/>
@@ -4380,74 +5513,20 @@
             </a:bodyPr>
             <a:lstStyle/>
             <a:p>
-              <a:pPr algn="ctr" defTabSz="457200"/>
+              <a:pPr algn="ctr" defTabSz="373898"/>
               <a:r>
-                <a:rPr lang="zh-CN" altLang="en-GB" b="1" kern="0" dirty="0"/>
+                <a:rPr lang="zh-CN" altLang="en-GB" sz="1400" b="1" kern="0" dirty="0"/>
                 <a:t>卫星遥感</a:t>
               </a:r>
-              <a:endParaRPr lang="en-GB" altLang="zh-CN" b="1" kern="0" dirty="0"/>
+              <a:endParaRPr lang="en-GB" altLang="zh-CN" sz="1400" b="1" kern="0" dirty="0"/>
             </a:p>
             <a:p>
-              <a:pPr algn="ctr" defTabSz="457200"/>
+              <a:pPr algn="ctr" defTabSz="373898"/>
               <a:r>
-                <a:rPr lang="zh-CN" altLang="en-US" b="1" kern="0" dirty="0"/>
+                <a:rPr lang="zh-CN" altLang="en-US" sz="1400" b="1" kern="0" dirty="0"/>
                 <a:t>观测反演和目标检测</a:t>
               </a:r>
-              <a:endParaRPr lang="en-GB" altLang="zh-CN" b="1" kern="0" dirty="0"/>
-            </a:p>
-          </p:txBody>
-        </p:sp>
-        <p:sp>
-          <p:nvSpPr>
-            <p:cNvPr id="60" name="Rectangle 59">
-              <a:extLst>
-                <a:ext uri="{FF2B5EF4-FFF2-40B4-BE49-F238E27FC236}">
-                  <a16:creationId xmlns:a16="http://schemas.microsoft.com/office/drawing/2014/main" id="{38D8ADD4-FD38-32E8-5E10-7F1AEC8506AD}"/>
-                </a:ext>
-              </a:extLst>
-            </p:cNvPr>
-            <p:cNvSpPr/>
-            <p:nvPr/>
-          </p:nvSpPr>
-          <p:spPr>
-            <a:xfrm>
-              <a:off x="9455514" y="596541"/>
-              <a:ext cx="2700653" cy="5068291"/>
-            </a:xfrm>
-            <a:prstGeom prst="rect">
-              <a:avLst/>
-            </a:prstGeom>
-            <a:noFill/>
-            <a:ln w="12700">
-              <a:solidFill>
-                <a:schemeClr val="bg1">
-                  <a:lumMod val="50000"/>
-                </a:schemeClr>
-              </a:solidFill>
-            </a:ln>
-          </p:spPr>
-          <p:style>
-            <a:lnRef idx="2">
-              <a:schemeClr val="accent1">
-                <a:shade val="15000"/>
-              </a:schemeClr>
-            </a:lnRef>
-            <a:fillRef idx="1">
-              <a:schemeClr val="accent1"/>
-            </a:fillRef>
-            <a:effectRef idx="0">
-              <a:schemeClr val="accent1"/>
-            </a:effectRef>
-            <a:fontRef idx="minor">
-              <a:schemeClr val="lt1"/>
-            </a:fontRef>
-          </p:style>
-          <p:txBody>
-            <a:bodyPr rtlCol="0" anchor="ctr"/>
-            <a:lstStyle/>
-            <a:p>
-              <a:pPr algn="ctr"/>
-              <a:endParaRPr lang="en-US"/>
+              <a:endParaRPr lang="en-GB" altLang="zh-CN" sz="1400" b="1" kern="0" dirty="0"/>
             </a:p>
           </p:txBody>
         </p:sp>
@@ -4466,7 +5545,7 @@
             <p:nvPr/>
           </p:nvPicPr>
           <p:blipFill>
-            <a:blip r:embed="rId9">
+            <a:blip r:embed="rId10">
               <a:extLst>
                 <a:ext uri="{28A0092B-C50C-407E-A947-70E740481C1C}">
                   <a14:useLocalDpi xmlns:a14="http://schemas.microsoft.com/office/drawing/2010/main" val="0"/>
@@ -4513,7 +5592,7 @@
             <p:nvPr/>
           </p:nvPicPr>
           <p:blipFill>
-            <a:blip r:embed="rId10"/>
+            <a:blip r:embed="rId11"/>
             <a:stretch>
               <a:fillRect/>
             </a:stretch>
@@ -4588,36 +5667,14 @@
             <a:bodyPr rtlCol="0" anchor="ctr"/>
             <a:lstStyle/>
             <a:p>
-              <a:pPr marL="0" marR="0" lvl="0" indent="0" algn="ctr" defTabSz="914400" eaLnBrk="1" fontAlgn="auto" latinLnBrk="0" hangingPunct="1">
-                <a:lnSpc>
-                  <a:spcPct val="100000"/>
-                </a:lnSpc>
-                <a:spcBef>
-                  <a:spcPts val="0"/>
-                </a:spcBef>
-                <a:spcAft>
-                  <a:spcPts val="0"/>
-                </a:spcAft>
-                <a:buClrTx/>
-                <a:buSzTx/>
-                <a:buFontTx/>
-                <a:buNone/>
-                <a:tabLst/>
+              <a:pPr algn="ctr" defTabSz="747796">
                 <a:defRPr/>
               </a:pPr>
-              <a:endParaRPr kumimoji="0" lang="en-US" sz="1800" b="0" i="0" u="none" strike="noStrike" kern="0" cap="none" spc="0" normalizeH="0" baseline="0" noProof="0">
-                <a:ln>
-                  <a:noFill/>
-                </a:ln>
+              <a:endParaRPr lang="en-US" sz="1472" kern="0">
                 <a:solidFill>
                   <a:prstClr val="white"/>
                 </a:solidFill>
-                <a:effectLst/>
-                <a:uLnTx/>
-                <a:uFillTx/>
                 <a:latin typeface="Calibri"/>
-                <a:ea typeface="+mn-ea"/>
-                <a:cs typeface="+mn-cs"/>
               </a:endParaRPr>
             </a:p>
           </p:txBody>
@@ -4637,7 +5694,7 @@
             <p:nvPr/>
           </p:nvPicPr>
           <p:blipFill>
-            <a:blip r:embed="rId11"/>
+            <a:blip r:embed="rId12"/>
             <a:stretch>
               <a:fillRect/>
             </a:stretch>
@@ -4667,7 +5724,7 @@
             <p:nvPr/>
           </p:nvPicPr>
           <p:blipFill>
-            <a:blip r:embed="rId12"/>
+            <a:blip r:embed="rId13"/>
             <a:srcRect l="13078" t="31638" r="13078" b="31638"/>
             <a:stretch/>
           </p:blipFill>
@@ -4741,36 +5798,14 @@
             <a:bodyPr rtlCol="0" anchor="ctr"/>
             <a:lstStyle/>
             <a:p>
-              <a:pPr marL="0" marR="0" lvl="0" indent="0" algn="ctr" defTabSz="914400" eaLnBrk="1" fontAlgn="auto" latinLnBrk="0" hangingPunct="1">
-                <a:lnSpc>
-                  <a:spcPct val="100000"/>
-                </a:lnSpc>
-                <a:spcBef>
-                  <a:spcPts val="0"/>
-                </a:spcBef>
-                <a:spcAft>
-                  <a:spcPts val="0"/>
-                </a:spcAft>
-                <a:buClrTx/>
-                <a:buSzTx/>
-                <a:buFontTx/>
-                <a:buNone/>
-                <a:tabLst/>
+              <a:pPr algn="ctr" defTabSz="747796">
                 <a:defRPr/>
               </a:pPr>
-              <a:endParaRPr kumimoji="0" lang="en-US" sz="1800" b="0" i="0" u="none" strike="noStrike" kern="0" cap="none" spc="0" normalizeH="0" baseline="0" noProof="0">
-                <a:ln>
-                  <a:noFill/>
-                </a:ln>
+              <a:endParaRPr lang="en-US" sz="1472" kern="0">
                 <a:solidFill>
                   <a:prstClr val="white"/>
                 </a:solidFill>
-                <a:effectLst/>
-                <a:uLnTx/>
-                <a:uFillTx/>
                 <a:latin typeface="Calibri"/>
-                <a:ea typeface="+mn-ea"/>
-                <a:cs typeface="+mn-cs"/>
               </a:endParaRPr>
             </a:p>
           </p:txBody>
@@ -4811,36 +5846,14 @@
             <a:bodyPr rtlCol="0" anchor="ctr"/>
             <a:lstStyle/>
             <a:p>
-              <a:pPr marL="0" marR="0" lvl="0" indent="0" algn="ctr" defTabSz="914400" eaLnBrk="1" fontAlgn="auto" latinLnBrk="0" hangingPunct="1">
-                <a:lnSpc>
-                  <a:spcPct val="100000"/>
-                </a:lnSpc>
-                <a:spcBef>
-                  <a:spcPts val="0"/>
-                </a:spcBef>
-                <a:spcAft>
-                  <a:spcPts val="0"/>
-                </a:spcAft>
-                <a:buClrTx/>
-                <a:buSzTx/>
-                <a:buFontTx/>
-                <a:buNone/>
-                <a:tabLst/>
+              <a:pPr algn="ctr" defTabSz="747796">
                 <a:defRPr/>
               </a:pPr>
-              <a:endParaRPr kumimoji="0" lang="en-US" sz="1800" b="0" i="0" u="none" strike="noStrike" kern="0" cap="none" spc="0" normalizeH="0" baseline="0" noProof="0">
-                <a:ln>
-                  <a:noFill/>
-                </a:ln>
+              <a:endParaRPr lang="en-US" sz="1472" kern="0">
                 <a:solidFill>
                   <a:prstClr val="white"/>
                 </a:solidFill>
-                <a:effectLst/>
-                <a:uLnTx/>
-                <a:uFillTx/>
                 <a:latin typeface="Calibri"/>
-                <a:ea typeface="+mn-ea"/>
-                <a:cs typeface="+mn-cs"/>
               </a:endParaRPr>
             </a:p>
           </p:txBody>
@@ -4881,36 +5894,14 @@
             <a:bodyPr rtlCol="0" anchor="ctr"/>
             <a:lstStyle/>
             <a:p>
-              <a:pPr marL="0" marR="0" lvl="0" indent="0" algn="ctr" defTabSz="914400" eaLnBrk="1" fontAlgn="auto" latinLnBrk="0" hangingPunct="1">
-                <a:lnSpc>
-                  <a:spcPct val="100000"/>
-                </a:lnSpc>
-                <a:spcBef>
-                  <a:spcPts val="0"/>
-                </a:spcBef>
-                <a:spcAft>
-                  <a:spcPts val="0"/>
-                </a:spcAft>
-                <a:buClrTx/>
-                <a:buSzTx/>
-                <a:buFontTx/>
-                <a:buNone/>
-                <a:tabLst/>
+              <a:pPr algn="ctr" defTabSz="747796">
                 <a:defRPr/>
               </a:pPr>
-              <a:endParaRPr kumimoji="0" lang="en-US" sz="1800" b="0" i="0" u="none" strike="noStrike" kern="0" cap="none" spc="0" normalizeH="0" baseline="0" noProof="0">
-                <a:ln>
-                  <a:noFill/>
-                </a:ln>
+              <a:endParaRPr lang="en-US" sz="1472" kern="0">
                 <a:solidFill>
                   <a:prstClr val="white"/>
                 </a:solidFill>
-                <a:effectLst/>
-                <a:uLnTx/>
-                <a:uFillTx/>
                 <a:latin typeface="Calibri"/>
-                <a:ea typeface="+mn-ea"/>
-                <a:cs typeface="+mn-cs"/>
               </a:endParaRPr>
             </a:p>
           </p:txBody>
@@ -4951,36 +5942,14 @@
             <a:bodyPr rtlCol="0" anchor="ctr"/>
             <a:lstStyle/>
             <a:p>
-              <a:pPr marL="0" marR="0" lvl="0" indent="0" algn="ctr" defTabSz="914400" eaLnBrk="1" fontAlgn="auto" latinLnBrk="0" hangingPunct="1">
-                <a:lnSpc>
-                  <a:spcPct val="100000"/>
-                </a:lnSpc>
-                <a:spcBef>
-                  <a:spcPts val="0"/>
-                </a:spcBef>
-                <a:spcAft>
-                  <a:spcPts val="0"/>
-                </a:spcAft>
-                <a:buClrTx/>
-                <a:buSzTx/>
-                <a:buFontTx/>
-                <a:buNone/>
-                <a:tabLst/>
+              <a:pPr algn="ctr" defTabSz="747796">
                 <a:defRPr/>
               </a:pPr>
-              <a:endParaRPr kumimoji="0" lang="en-US" sz="1800" b="0" i="0" u="none" strike="noStrike" kern="0" cap="none" spc="0" normalizeH="0" baseline="0" noProof="0">
-                <a:ln>
-                  <a:noFill/>
-                </a:ln>
+              <a:endParaRPr lang="en-US" sz="1472" kern="0">
                 <a:solidFill>
                   <a:prstClr val="white"/>
                 </a:solidFill>
-                <a:effectLst/>
-                <a:uLnTx/>
-                <a:uFillTx/>
                 <a:latin typeface="Calibri"/>
-                <a:ea typeface="+mn-ea"/>
-                <a:cs typeface="+mn-cs"/>
               </a:endParaRPr>
             </a:p>
           </p:txBody>
@@ -5021,36 +5990,14 @@
             <a:bodyPr rtlCol="0" anchor="ctr"/>
             <a:lstStyle/>
             <a:p>
-              <a:pPr marL="0" marR="0" lvl="0" indent="0" algn="ctr" defTabSz="914400" eaLnBrk="1" fontAlgn="auto" latinLnBrk="0" hangingPunct="1">
-                <a:lnSpc>
-                  <a:spcPct val="100000"/>
-                </a:lnSpc>
-                <a:spcBef>
-                  <a:spcPts val="0"/>
-                </a:spcBef>
-                <a:spcAft>
-                  <a:spcPts val="0"/>
-                </a:spcAft>
-                <a:buClrTx/>
-                <a:buSzTx/>
-                <a:buFontTx/>
-                <a:buNone/>
-                <a:tabLst/>
+              <a:pPr algn="ctr" defTabSz="747796">
                 <a:defRPr/>
               </a:pPr>
-              <a:endParaRPr kumimoji="0" lang="en-US" sz="1800" b="0" i="0" u="none" strike="noStrike" kern="0" cap="none" spc="0" normalizeH="0" baseline="0" noProof="0">
-                <a:ln>
-                  <a:noFill/>
-                </a:ln>
+              <a:endParaRPr lang="en-US" sz="1472" kern="0">
                 <a:solidFill>
                   <a:prstClr val="white"/>
                 </a:solidFill>
-                <a:effectLst/>
-                <a:uLnTx/>
-                <a:uFillTx/>
                 <a:latin typeface="Calibri"/>
-                <a:ea typeface="+mn-ea"/>
-                <a:cs typeface="+mn-cs"/>
               </a:endParaRPr>
             </a:p>
           </p:txBody>
@@ -5091,36 +6038,14 @@
             <a:bodyPr rtlCol="0" anchor="ctr"/>
             <a:lstStyle/>
             <a:p>
-              <a:pPr marL="0" marR="0" lvl="0" indent="0" algn="ctr" defTabSz="914400" eaLnBrk="1" fontAlgn="auto" latinLnBrk="0" hangingPunct="1">
-                <a:lnSpc>
-                  <a:spcPct val="100000"/>
-                </a:lnSpc>
-                <a:spcBef>
-                  <a:spcPts val="0"/>
-                </a:spcBef>
-                <a:spcAft>
-                  <a:spcPts val="0"/>
-                </a:spcAft>
-                <a:buClrTx/>
-                <a:buSzTx/>
-                <a:buFontTx/>
-                <a:buNone/>
-                <a:tabLst/>
+              <a:pPr algn="ctr" defTabSz="747796">
                 <a:defRPr/>
               </a:pPr>
-              <a:endParaRPr kumimoji="0" lang="en-US" sz="1800" b="0" i="0" u="none" strike="noStrike" kern="0" cap="none" spc="0" normalizeH="0" baseline="0" noProof="0">
-                <a:ln>
-                  <a:noFill/>
-                </a:ln>
+              <a:endParaRPr lang="en-US" sz="1472" kern="0">
                 <a:solidFill>
                   <a:prstClr val="white"/>
                 </a:solidFill>
-                <a:effectLst/>
-                <a:uLnTx/>
-                <a:uFillTx/>
                 <a:latin typeface="Calibri"/>
-                <a:ea typeface="+mn-ea"/>
-                <a:cs typeface="+mn-cs"/>
               </a:endParaRPr>
             </a:p>
           </p:txBody>
@@ -5161,36 +6086,14 @@
             <a:bodyPr rtlCol="0" anchor="ctr"/>
             <a:lstStyle/>
             <a:p>
-              <a:pPr marL="0" marR="0" lvl="0" indent="0" algn="ctr" defTabSz="914400" eaLnBrk="1" fontAlgn="auto" latinLnBrk="0" hangingPunct="1">
-                <a:lnSpc>
-                  <a:spcPct val="100000"/>
-                </a:lnSpc>
-                <a:spcBef>
-                  <a:spcPts val="0"/>
-                </a:spcBef>
-                <a:spcAft>
-                  <a:spcPts val="0"/>
-                </a:spcAft>
-                <a:buClrTx/>
-                <a:buSzTx/>
-                <a:buFontTx/>
-                <a:buNone/>
-                <a:tabLst/>
+              <a:pPr algn="ctr" defTabSz="747796">
                 <a:defRPr/>
               </a:pPr>
-              <a:endParaRPr kumimoji="0" lang="en-US" sz="1800" b="0" i="0" u="none" strike="noStrike" kern="0" cap="none" spc="0" normalizeH="0" baseline="0" noProof="0">
-                <a:ln>
-                  <a:noFill/>
-                </a:ln>
+              <a:endParaRPr lang="en-US" sz="1472" kern="0">
                 <a:solidFill>
                   <a:prstClr val="white"/>
                 </a:solidFill>
-                <a:effectLst/>
-                <a:uLnTx/>
-                <a:uFillTx/>
                 <a:latin typeface="Calibri"/>
-                <a:ea typeface="+mn-ea"/>
-                <a:cs typeface="+mn-cs"/>
               </a:endParaRPr>
             </a:p>
           </p:txBody>
@@ -5231,36 +6134,14 @@
             <a:bodyPr rtlCol="0" anchor="ctr"/>
             <a:lstStyle/>
             <a:p>
-              <a:pPr marL="0" marR="0" lvl="0" indent="0" algn="ctr" defTabSz="914400" eaLnBrk="1" fontAlgn="auto" latinLnBrk="0" hangingPunct="1">
-                <a:lnSpc>
-                  <a:spcPct val="100000"/>
-                </a:lnSpc>
-                <a:spcBef>
-                  <a:spcPts val="0"/>
-                </a:spcBef>
-                <a:spcAft>
-                  <a:spcPts val="0"/>
-                </a:spcAft>
-                <a:buClrTx/>
-                <a:buSzTx/>
-                <a:buFontTx/>
-                <a:buNone/>
-                <a:tabLst/>
+              <a:pPr algn="ctr" defTabSz="747796">
                 <a:defRPr/>
               </a:pPr>
-              <a:endParaRPr kumimoji="0" lang="en-US" sz="1800" b="0" i="0" u="none" strike="noStrike" kern="0" cap="none" spc="0" normalizeH="0" baseline="0" noProof="0">
-                <a:ln>
-                  <a:noFill/>
-                </a:ln>
+              <a:endParaRPr lang="en-US" sz="1472" kern="0">
                 <a:solidFill>
                   <a:prstClr val="white"/>
                 </a:solidFill>
-                <a:effectLst/>
-                <a:uLnTx/>
-                <a:uFillTx/>
                 <a:latin typeface="Calibri"/>
-                <a:ea typeface="+mn-ea"/>
-                <a:cs typeface="+mn-cs"/>
               </a:endParaRPr>
             </a:p>
           </p:txBody>
@@ -5301,36 +6182,14 @@
             <a:bodyPr rtlCol="0" anchor="ctr"/>
             <a:lstStyle/>
             <a:p>
-              <a:pPr marL="0" marR="0" lvl="0" indent="0" algn="ctr" defTabSz="914400" eaLnBrk="1" fontAlgn="auto" latinLnBrk="0" hangingPunct="1">
-                <a:lnSpc>
-                  <a:spcPct val="100000"/>
-                </a:lnSpc>
-                <a:spcBef>
-                  <a:spcPts val="0"/>
-                </a:spcBef>
-                <a:spcAft>
-                  <a:spcPts val="0"/>
-                </a:spcAft>
-                <a:buClrTx/>
-                <a:buSzTx/>
-                <a:buFontTx/>
-                <a:buNone/>
-                <a:tabLst/>
+              <a:pPr algn="ctr" defTabSz="747796">
                 <a:defRPr/>
               </a:pPr>
-              <a:endParaRPr kumimoji="0" lang="en-US" sz="1800" b="0" i="0" u="none" strike="noStrike" kern="0" cap="none" spc="0" normalizeH="0" baseline="0" noProof="0">
-                <a:ln>
-                  <a:noFill/>
-                </a:ln>
+              <a:endParaRPr lang="en-US" sz="1472" kern="0">
                 <a:solidFill>
                   <a:prstClr val="white"/>
                 </a:solidFill>
-                <a:effectLst/>
-                <a:uLnTx/>
-                <a:uFillTx/>
                 <a:latin typeface="Calibri"/>
-                <a:ea typeface="+mn-ea"/>
-                <a:cs typeface="+mn-cs"/>
               </a:endParaRPr>
             </a:p>
           </p:txBody>
@@ -5371,36 +6230,14 @@
             <a:bodyPr rtlCol="0" anchor="ctr"/>
             <a:lstStyle/>
             <a:p>
-              <a:pPr marL="0" marR="0" lvl="0" indent="0" algn="ctr" defTabSz="914400" eaLnBrk="1" fontAlgn="auto" latinLnBrk="0" hangingPunct="1">
-                <a:lnSpc>
-                  <a:spcPct val="100000"/>
-                </a:lnSpc>
-                <a:spcBef>
-                  <a:spcPts val="0"/>
-                </a:spcBef>
-                <a:spcAft>
-                  <a:spcPts val="0"/>
-                </a:spcAft>
-                <a:buClrTx/>
-                <a:buSzTx/>
-                <a:buFontTx/>
-                <a:buNone/>
-                <a:tabLst/>
+              <a:pPr algn="ctr" defTabSz="747796">
                 <a:defRPr/>
               </a:pPr>
-              <a:endParaRPr kumimoji="0" lang="en-US" sz="1800" b="0" i="0" u="none" strike="noStrike" kern="0" cap="none" spc="0" normalizeH="0" baseline="0" noProof="0">
-                <a:ln>
-                  <a:noFill/>
-                </a:ln>
+              <a:endParaRPr lang="en-US" sz="1472" kern="0">
                 <a:solidFill>
                   <a:prstClr val="white"/>
                 </a:solidFill>
-                <a:effectLst/>
-                <a:uLnTx/>
-                <a:uFillTx/>
                 <a:latin typeface="Calibri"/>
-                <a:ea typeface="+mn-ea"/>
-                <a:cs typeface="+mn-cs"/>
               </a:endParaRPr>
             </a:p>
           </p:txBody>
@@ -5441,36 +6278,14 @@
             <a:bodyPr rtlCol="0" anchor="ctr"/>
             <a:lstStyle/>
             <a:p>
-              <a:pPr marL="0" marR="0" lvl="0" indent="0" algn="ctr" defTabSz="914400" eaLnBrk="1" fontAlgn="auto" latinLnBrk="0" hangingPunct="1">
-                <a:lnSpc>
-                  <a:spcPct val="100000"/>
-                </a:lnSpc>
-                <a:spcBef>
-                  <a:spcPts val="0"/>
-                </a:spcBef>
-                <a:spcAft>
-                  <a:spcPts val="0"/>
-                </a:spcAft>
-                <a:buClrTx/>
-                <a:buSzTx/>
-                <a:buFontTx/>
-                <a:buNone/>
-                <a:tabLst/>
+              <a:pPr algn="ctr" defTabSz="747796">
                 <a:defRPr/>
               </a:pPr>
-              <a:endParaRPr kumimoji="0" lang="en-US" sz="1800" b="0" i="0" u="none" strike="noStrike" kern="0" cap="none" spc="0" normalizeH="0" baseline="0" noProof="0">
-                <a:ln>
-                  <a:noFill/>
-                </a:ln>
+              <a:endParaRPr lang="en-US" sz="1472" kern="0">
                 <a:solidFill>
                   <a:prstClr val="white"/>
                 </a:solidFill>
-                <a:effectLst/>
-                <a:uLnTx/>
-                <a:uFillTx/>
                 <a:latin typeface="Calibri"/>
-                <a:ea typeface="+mn-ea"/>
-                <a:cs typeface="+mn-cs"/>
               </a:endParaRPr>
             </a:p>
           </p:txBody>
@@ -5511,36 +6326,14 @@
             <a:bodyPr rtlCol="0" anchor="ctr"/>
             <a:lstStyle/>
             <a:p>
-              <a:pPr marL="0" marR="0" lvl="0" indent="0" algn="ctr" defTabSz="914400" eaLnBrk="1" fontAlgn="auto" latinLnBrk="0" hangingPunct="1">
-                <a:lnSpc>
-                  <a:spcPct val="100000"/>
-                </a:lnSpc>
-                <a:spcBef>
-                  <a:spcPts val="0"/>
-                </a:spcBef>
-                <a:spcAft>
-                  <a:spcPts val="0"/>
-                </a:spcAft>
-                <a:buClrTx/>
-                <a:buSzTx/>
-                <a:buFontTx/>
-                <a:buNone/>
-                <a:tabLst/>
+              <a:pPr algn="ctr" defTabSz="747796">
                 <a:defRPr/>
               </a:pPr>
-              <a:endParaRPr kumimoji="0" lang="en-US" sz="1800" b="0" i="0" u="none" strike="noStrike" kern="0" cap="none" spc="0" normalizeH="0" baseline="0" noProof="0">
-                <a:ln>
-                  <a:noFill/>
-                </a:ln>
+              <a:endParaRPr lang="en-US" sz="1472" kern="0">
                 <a:solidFill>
                   <a:prstClr val="white"/>
                 </a:solidFill>
-                <a:effectLst/>
-                <a:uLnTx/>
-                <a:uFillTx/>
                 <a:latin typeface="Calibri"/>
-                <a:ea typeface="+mn-ea"/>
-                <a:cs typeface="+mn-cs"/>
               </a:endParaRPr>
             </a:p>
           </p:txBody>
@@ -5581,36 +6374,14 @@
             <a:bodyPr rtlCol="0" anchor="ctr"/>
             <a:lstStyle/>
             <a:p>
-              <a:pPr marL="0" marR="0" lvl="0" indent="0" algn="ctr" defTabSz="914400" eaLnBrk="1" fontAlgn="auto" latinLnBrk="0" hangingPunct="1">
-                <a:lnSpc>
-                  <a:spcPct val="100000"/>
-                </a:lnSpc>
-                <a:spcBef>
-                  <a:spcPts val="0"/>
-                </a:spcBef>
-                <a:spcAft>
-                  <a:spcPts val="0"/>
-                </a:spcAft>
-                <a:buClrTx/>
-                <a:buSzTx/>
-                <a:buFontTx/>
-                <a:buNone/>
-                <a:tabLst/>
+              <a:pPr algn="ctr" defTabSz="747796">
                 <a:defRPr/>
               </a:pPr>
-              <a:endParaRPr kumimoji="0" lang="en-US" sz="1800" b="0" i="0" u="none" strike="noStrike" kern="0" cap="none" spc="0" normalizeH="0" baseline="0" noProof="0">
-                <a:ln>
-                  <a:noFill/>
-                </a:ln>
+              <a:endParaRPr lang="en-US" sz="1472" kern="0">
                 <a:solidFill>
                   <a:prstClr val="white"/>
                 </a:solidFill>
-                <a:effectLst/>
-                <a:uLnTx/>
-                <a:uFillTx/>
                 <a:latin typeface="Calibri"/>
-                <a:ea typeface="+mn-ea"/>
-                <a:cs typeface="+mn-cs"/>
               </a:endParaRPr>
             </a:p>
           </p:txBody>
@@ -5651,36 +6422,14 @@
             <a:bodyPr rtlCol="0" anchor="ctr"/>
             <a:lstStyle/>
             <a:p>
-              <a:pPr marL="0" marR="0" lvl="0" indent="0" algn="ctr" defTabSz="914400" eaLnBrk="1" fontAlgn="auto" latinLnBrk="0" hangingPunct="1">
-                <a:lnSpc>
-                  <a:spcPct val="100000"/>
-                </a:lnSpc>
-                <a:spcBef>
-                  <a:spcPts val="0"/>
-                </a:spcBef>
-                <a:spcAft>
-                  <a:spcPts val="0"/>
-                </a:spcAft>
-                <a:buClrTx/>
-                <a:buSzTx/>
-                <a:buFontTx/>
-                <a:buNone/>
-                <a:tabLst/>
+              <a:pPr algn="ctr" defTabSz="747796">
                 <a:defRPr/>
               </a:pPr>
-              <a:endParaRPr kumimoji="0" lang="en-US" sz="1800" b="0" i="0" u="none" strike="noStrike" kern="0" cap="none" spc="0" normalizeH="0" baseline="0" noProof="0">
-                <a:ln>
-                  <a:noFill/>
-                </a:ln>
+              <a:endParaRPr lang="en-US" sz="1472" kern="0">
                 <a:solidFill>
                   <a:prstClr val="white"/>
                 </a:solidFill>
-                <a:effectLst/>
-                <a:uLnTx/>
-                <a:uFillTx/>
                 <a:latin typeface="Calibri"/>
-                <a:ea typeface="+mn-ea"/>
-                <a:cs typeface="+mn-cs"/>
               </a:endParaRPr>
             </a:p>
           </p:txBody>
@@ -5721,36 +6470,14 @@
             <a:bodyPr rtlCol="0" anchor="ctr"/>
             <a:lstStyle/>
             <a:p>
-              <a:pPr marL="0" marR="0" lvl="0" indent="0" algn="ctr" defTabSz="914400" eaLnBrk="1" fontAlgn="auto" latinLnBrk="0" hangingPunct="1">
-                <a:lnSpc>
-                  <a:spcPct val="100000"/>
-                </a:lnSpc>
-                <a:spcBef>
-                  <a:spcPts val="0"/>
-                </a:spcBef>
-                <a:spcAft>
-                  <a:spcPts val="0"/>
-                </a:spcAft>
-                <a:buClrTx/>
-                <a:buSzTx/>
-                <a:buFontTx/>
-                <a:buNone/>
-                <a:tabLst/>
+              <a:pPr algn="ctr" defTabSz="747796">
                 <a:defRPr/>
               </a:pPr>
-              <a:endParaRPr kumimoji="0" lang="en-US" sz="1800" b="0" i="0" u="none" strike="noStrike" kern="0" cap="none" spc="0" normalizeH="0" baseline="0" noProof="0">
-                <a:ln>
-                  <a:noFill/>
-                </a:ln>
+              <a:endParaRPr lang="en-US" sz="1472" kern="0">
                 <a:solidFill>
                   <a:prstClr val="white"/>
                 </a:solidFill>
-                <a:effectLst/>
-                <a:uLnTx/>
-                <a:uFillTx/>
                 <a:latin typeface="Calibri"/>
-                <a:ea typeface="+mn-ea"/>
-                <a:cs typeface="+mn-cs"/>
               </a:endParaRPr>
             </a:p>
           </p:txBody>
@@ -5791,36 +6518,14 @@
             <a:bodyPr rtlCol="0" anchor="ctr"/>
             <a:lstStyle/>
             <a:p>
-              <a:pPr marL="0" marR="0" lvl="0" indent="0" algn="ctr" defTabSz="914400" eaLnBrk="1" fontAlgn="auto" latinLnBrk="0" hangingPunct="1">
-                <a:lnSpc>
-                  <a:spcPct val="100000"/>
-                </a:lnSpc>
-                <a:spcBef>
-                  <a:spcPts val="0"/>
-                </a:spcBef>
-                <a:spcAft>
-                  <a:spcPts val="0"/>
-                </a:spcAft>
-                <a:buClrTx/>
-                <a:buSzTx/>
-                <a:buFontTx/>
-                <a:buNone/>
-                <a:tabLst/>
+              <a:pPr algn="ctr" defTabSz="747796">
                 <a:defRPr/>
               </a:pPr>
-              <a:endParaRPr kumimoji="0" lang="en-US" sz="1800" b="0" i="0" u="none" strike="noStrike" kern="0" cap="none" spc="0" normalizeH="0" baseline="0" noProof="0">
-                <a:ln>
-                  <a:noFill/>
-                </a:ln>
+              <a:endParaRPr lang="en-US" sz="1472" kern="0">
                 <a:solidFill>
                   <a:prstClr val="white"/>
                 </a:solidFill>
-                <a:effectLst/>
-                <a:uLnTx/>
-                <a:uFillTx/>
                 <a:latin typeface="Calibri"/>
-                <a:ea typeface="+mn-ea"/>
-                <a:cs typeface="+mn-cs"/>
               </a:endParaRPr>
             </a:p>
           </p:txBody>
@@ -5861,36 +6566,14 @@
             <a:bodyPr rtlCol="0" anchor="ctr"/>
             <a:lstStyle/>
             <a:p>
-              <a:pPr marL="0" marR="0" lvl="0" indent="0" algn="ctr" defTabSz="914400" eaLnBrk="1" fontAlgn="auto" latinLnBrk="0" hangingPunct="1">
-                <a:lnSpc>
-                  <a:spcPct val="100000"/>
-                </a:lnSpc>
-                <a:spcBef>
-                  <a:spcPts val="0"/>
-                </a:spcBef>
-                <a:spcAft>
-                  <a:spcPts val="0"/>
-                </a:spcAft>
-                <a:buClrTx/>
-                <a:buSzTx/>
-                <a:buFontTx/>
-                <a:buNone/>
-                <a:tabLst/>
+              <a:pPr algn="ctr" defTabSz="747796">
                 <a:defRPr/>
               </a:pPr>
-              <a:endParaRPr kumimoji="0" lang="en-US" sz="1800" b="0" i="0" u="none" strike="noStrike" kern="0" cap="none" spc="0" normalizeH="0" baseline="0" noProof="0">
-                <a:ln>
-                  <a:noFill/>
-                </a:ln>
+              <a:endParaRPr lang="en-US" sz="1472" kern="0">
                 <a:solidFill>
                   <a:prstClr val="white"/>
                 </a:solidFill>
-                <a:effectLst/>
-                <a:uLnTx/>
-                <a:uFillTx/>
                 <a:latin typeface="Calibri"/>
-                <a:ea typeface="+mn-ea"/>
-                <a:cs typeface="+mn-cs"/>
               </a:endParaRPr>
             </a:p>
           </p:txBody>
@@ -5931,36 +6614,14 @@
             <a:bodyPr rtlCol="0" anchor="ctr"/>
             <a:lstStyle/>
             <a:p>
-              <a:pPr marL="0" marR="0" lvl="0" indent="0" algn="ctr" defTabSz="914400" eaLnBrk="1" fontAlgn="auto" latinLnBrk="0" hangingPunct="1">
-                <a:lnSpc>
-                  <a:spcPct val="100000"/>
-                </a:lnSpc>
-                <a:spcBef>
-                  <a:spcPts val="0"/>
-                </a:spcBef>
-                <a:spcAft>
-                  <a:spcPts val="0"/>
-                </a:spcAft>
-                <a:buClrTx/>
-                <a:buSzTx/>
-                <a:buFontTx/>
-                <a:buNone/>
-                <a:tabLst/>
+              <a:pPr algn="ctr" defTabSz="747796">
                 <a:defRPr/>
               </a:pPr>
-              <a:endParaRPr kumimoji="0" lang="en-US" sz="1800" b="0" i="0" u="none" strike="noStrike" kern="0" cap="none" spc="0" normalizeH="0" baseline="0" noProof="0">
-                <a:ln>
-                  <a:noFill/>
-                </a:ln>
+              <a:endParaRPr lang="en-US" sz="1472" kern="0">
                 <a:solidFill>
                   <a:prstClr val="white"/>
                 </a:solidFill>
-                <a:effectLst/>
-                <a:uLnTx/>
-                <a:uFillTx/>
                 <a:latin typeface="Calibri"/>
-                <a:ea typeface="+mn-ea"/>
-                <a:cs typeface="+mn-cs"/>
               </a:endParaRPr>
             </a:p>
           </p:txBody>
@@ -6001,36 +6662,14 @@
             <a:bodyPr rtlCol="0" anchor="ctr"/>
             <a:lstStyle/>
             <a:p>
-              <a:pPr marL="0" marR="0" lvl="0" indent="0" algn="ctr" defTabSz="914400" eaLnBrk="1" fontAlgn="auto" latinLnBrk="0" hangingPunct="1">
-                <a:lnSpc>
-                  <a:spcPct val="100000"/>
-                </a:lnSpc>
-                <a:spcBef>
-                  <a:spcPts val="0"/>
-                </a:spcBef>
-                <a:spcAft>
-                  <a:spcPts val="0"/>
-                </a:spcAft>
-                <a:buClrTx/>
-                <a:buSzTx/>
-                <a:buFontTx/>
-                <a:buNone/>
-                <a:tabLst/>
+              <a:pPr algn="ctr" defTabSz="747796">
                 <a:defRPr/>
               </a:pPr>
-              <a:endParaRPr kumimoji="0" lang="en-US" sz="1800" b="0" i="0" u="none" strike="noStrike" kern="0" cap="none" spc="0" normalizeH="0" baseline="0" noProof="0">
-                <a:ln>
-                  <a:noFill/>
-                </a:ln>
+              <a:endParaRPr lang="en-US" sz="1472" kern="0">
                 <a:solidFill>
                   <a:prstClr val="white"/>
                 </a:solidFill>
-                <a:effectLst/>
-                <a:uLnTx/>
-                <a:uFillTx/>
                 <a:latin typeface="Calibri"/>
-                <a:ea typeface="+mn-ea"/>
-                <a:cs typeface="+mn-cs"/>
               </a:endParaRPr>
             </a:p>
           </p:txBody>
@@ -6071,36 +6710,14 @@
             <a:bodyPr rtlCol="0" anchor="ctr"/>
             <a:lstStyle/>
             <a:p>
-              <a:pPr marL="0" marR="0" lvl="0" indent="0" algn="ctr" defTabSz="914400" eaLnBrk="1" fontAlgn="auto" latinLnBrk="0" hangingPunct="1">
-                <a:lnSpc>
-                  <a:spcPct val="100000"/>
-                </a:lnSpc>
-                <a:spcBef>
-                  <a:spcPts val="0"/>
-                </a:spcBef>
-                <a:spcAft>
-                  <a:spcPts val="0"/>
-                </a:spcAft>
-                <a:buClrTx/>
-                <a:buSzTx/>
-                <a:buFontTx/>
-                <a:buNone/>
-                <a:tabLst/>
+              <a:pPr algn="ctr" defTabSz="747796">
                 <a:defRPr/>
               </a:pPr>
-              <a:endParaRPr kumimoji="0" lang="en-US" sz="1800" b="0" i="0" u="none" strike="noStrike" kern="0" cap="none" spc="0" normalizeH="0" baseline="0" noProof="0">
-                <a:ln>
-                  <a:noFill/>
-                </a:ln>
+              <a:endParaRPr lang="en-US" sz="1472" kern="0">
                 <a:solidFill>
                   <a:prstClr val="white"/>
                 </a:solidFill>
-                <a:effectLst/>
-                <a:uLnTx/>
-                <a:uFillTx/>
                 <a:latin typeface="Calibri"/>
-                <a:ea typeface="+mn-ea"/>
-                <a:cs typeface="+mn-cs"/>
               </a:endParaRPr>
             </a:p>
           </p:txBody>
@@ -6141,36 +6758,14 @@
             <a:bodyPr rtlCol="0" anchor="ctr"/>
             <a:lstStyle/>
             <a:p>
-              <a:pPr marL="0" marR="0" lvl="0" indent="0" algn="ctr" defTabSz="914400" eaLnBrk="1" fontAlgn="auto" latinLnBrk="0" hangingPunct="1">
-                <a:lnSpc>
-                  <a:spcPct val="100000"/>
-                </a:lnSpc>
-                <a:spcBef>
-                  <a:spcPts val="0"/>
-                </a:spcBef>
-                <a:spcAft>
-                  <a:spcPts val="0"/>
-                </a:spcAft>
-                <a:buClrTx/>
-                <a:buSzTx/>
-                <a:buFontTx/>
-                <a:buNone/>
-                <a:tabLst/>
+              <a:pPr algn="ctr" defTabSz="747796">
                 <a:defRPr/>
               </a:pPr>
-              <a:endParaRPr kumimoji="0" lang="en-US" sz="1800" b="0" i="0" u="none" strike="noStrike" kern="0" cap="none" spc="0" normalizeH="0" baseline="0" noProof="0">
-                <a:ln>
-                  <a:noFill/>
-                </a:ln>
+              <a:endParaRPr lang="en-US" sz="1472" kern="0">
                 <a:solidFill>
                   <a:prstClr val="white"/>
                 </a:solidFill>
-                <a:effectLst/>
-                <a:uLnTx/>
-                <a:uFillTx/>
                 <a:latin typeface="Calibri"/>
-                <a:ea typeface="+mn-ea"/>
-                <a:cs typeface="+mn-cs"/>
               </a:endParaRPr>
             </a:p>
           </p:txBody>
@@ -6211,36 +6806,14 @@
             <a:bodyPr rtlCol="0" anchor="ctr"/>
             <a:lstStyle/>
             <a:p>
-              <a:pPr marL="0" marR="0" lvl="0" indent="0" algn="ctr" defTabSz="914400" eaLnBrk="1" fontAlgn="auto" latinLnBrk="0" hangingPunct="1">
-                <a:lnSpc>
-                  <a:spcPct val="100000"/>
-                </a:lnSpc>
-                <a:spcBef>
-                  <a:spcPts val="0"/>
-                </a:spcBef>
-                <a:spcAft>
-                  <a:spcPts val="0"/>
-                </a:spcAft>
-                <a:buClrTx/>
-                <a:buSzTx/>
-                <a:buFontTx/>
-                <a:buNone/>
-                <a:tabLst/>
+              <a:pPr algn="ctr" defTabSz="747796">
                 <a:defRPr/>
               </a:pPr>
-              <a:endParaRPr kumimoji="0" lang="en-US" sz="1800" b="0" i="0" u="none" strike="noStrike" kern="0" cap="none" spc="0" normalizeH="0" baseline="0" noProof="0">
-                <a:ln>
-                  <a:noFill/>
-                </a:ln>
+              <a:endParaRPr lang="en-US" sz="1472" kern="0">
                 <a:solidFill>
                   <a:prstClr val="white"/>
                 </a:solidFill>
-                <a:effectLst/>
-                <a:uLnTx/>
-                <a:uFillTx/>
                 <a:latin typeface="Calibri"/>
-                <a:ea typeface="+mn-ea"/>
-                <a:cs typeface="+mn-cs"/>
               </a:endParaRPr>
             </a:p>
           </p:txBody>
@@ -6281,36 +6854,14 @@
             <a:bodyPr rtlCol="0" anchor="ctr"/>
             <a:lstStyle/>
             <a:p>
-              <a:pPr marL="0" marR="0" lvl="0" indent="0" algn="ctr" defTabSz="914400" eaLnBrk="1" fontAlgn="auto" latinLnBrk="0" hangingPunct="1">
-                <a:lnSpc>
-                  <a:spcPct val="100000"/>
-                </a:lnSpc>
-                <a:spcBef>
-                  <a:spcPts val="0"/>
-                </a:spcBef>
-                <a:spcAft>
-                  <a:spcPts val="0"/>
-                </a:spcAft>
-                <a:buClrTx/>
-                <a:buSzTx/>
-                <a:buFontTx/>
-                <a:buNone/>
-                <a:tabLst/>
+              <a:pPr algn="ctr" defTabSz="747796">
                 <a:defRPr/>
               </a:pPr>
-              <a:endParaRPr kumimoji="0" lang="en-US" sz="1800" b="0" i="0" u="none" strike="noStrike" kern="0" cap="none" spc="0" normalizeH="0" baseline="0" noProof="0">
-                <a:ln>
-                  <a:noFill/>
-                </a:ln>
+              <a:endParaRPr lang="en-US" sz="1472" kern="0">
                 <a:solidFill>
                   <a:prstClr val="white"/>
                 </a:solidFill>
-                <a:effectLst/>
-                <a:uLnTx/>
-                <a:uFillTx/>
                 <a:latin typeface="Calibri"/>
-                <a:ea typeface="+mn-ea"/>
-                <a:cs typeface="+mn-cs"/>
               </a:endParaRPr>
             </a:p>
           </p:txBody>
@@ -6351,36 +6902,14 @@
             <a:bodyPr rtlCol="0" anchor="ctr"/>
             <a:lstStyle/>
             <a:p>
-              <a:pPr marL="0" marR="0" lvl="0" indent="0" algn="ctr" defTabSz="914400" eaLnBrk="1" fontAlgn="auto" latinLnBrk="0" hangingPunct="1">
-                <a:lnSpc>
-                  <a:spcPct val="100000"/>
-                </a:lnSpc>
-                <a:spcBef>
-                  <a:spcPts val="0"/>
-                </a:spcBef>
-                <a:spcAft>
-                  <a:spcPts val="0"/>
-                </a:spcAft>
-                <a:buClrTx/>
-                <a:buSzTx/>
-                <a:buFontTx/>
-                <a:buNone/>
-                <a:tabLst/>
+              <a:pPr algn="ctr" defTabSz="747796">
                 <a:defRPr/>
               </a:pPr>
-              <a:endParaRPr kumimoji="0" lang="en-US" sz="1800" b="0" i="0" u="none" strike="noStrike" kern="0" cap="none" spc="0" normalizeH="0" baseline="0" noProof="0">
-                <a:ln>
-                  <a:noFill/>
-                </a:ln>
+              <a:endParaRPr lang="en-US" sz="1472" kern="0">
                 <a:solidFill>
                   <a:prstClr val="white"/>
                 </a:solidFill>
-                <a:effectLst/>
-                <a:uLnTx/>
-                <a:uFillTx/>
                 <a:latin typeface="Calibri"/>
-                <a:ea typeface="+mn-ea"/>
-                <a:cs typeface="+mn-cs"/>
               </a:endParaRPr>
             </a:p>
           </p:txBody>
@@ -6421,36 +6950,14 @@
             <a:bodyPr rtlCol="0" anchor="ctr"/>
             <a:lstStyle/>
             <a:p>
-              <a:pPr marL="0" marR="0" lvl="0" indent="0" algn="ctr" defTabSz="914400" eaLnBrk="1" fontAlgn="auto" latinLnBrk="0" hangingPunct="1">
-                <a:lnSpc>
-                  <a:spcPct val="100000"/>
-                </a:lnSpc>
-                <a:spcBef>
-                  <a:spcPts val="0"/>
-                </a:spcBef>
-                <a:spcAft>
-                  <a:spcPts val="0"/>
-                </a:spcAft>
-                <a:buClrTx/>
-                <a:buSzTx/>
-                <a:buFontTx/>
-                <a:buNone/>
-                <a:tabLst/>
+              <a:pPr algn="ctr" defTabSz="747796">
                 <a:defRPr/>
               </a:pPr>
-              <a:endParaRPr kumimoji="0" lang="en-US" sz="1800" b="0" i="0" u="none" strike="noStrike" kern="0" cap="none" spc="0" normalizeH="0" baseline="0" noProof="0">
-                <a:ln>
-                  <a:noFill/>
-                </a:ln>
+              <a:endParaRPr lang="en-US" sz="1472" kern="0">
                 <a:solidFill>
                   <a:prstClr val="white"/>
                 </a:solidFill>
-                <a:effectLst/>
-                <a:uLnTx/>
-                <a:uFillTx/>
                 <a:latin typeface="Calibri"/>
-                <a:ea typeface="+mn-ea"/>
-                <a:cs typeface="+mn-cs"/>
               </a:endParaRPr>
             </a:p>
           </p:txBody>
@@ -6491,36 +6998,14 @@
             <a:bodyPr rtlCol="0" anchor="ctr"/>
             <a:lstStyle/>
             <a:p>
-              <a:pPr marL="0" marR="0" lvl="0" indent="0" algn="ctr" defTabSz="914400" eaLnBrk="1" fontAlgn="auto" latinLnBrk="0" hangingPunct="1">
-                <a:lnSpc>
-                  <a:spcPct val="100000"/>
-                </a:lnSpc>
-                <a:spcBef>
-                  <a:spcPts val="0"/>
-                </a:spcBef>
-                <a:spcAft>
-                  <a:spcPts val="0"/>
-                </a:spcAft>
-                <a:buClrTx/>
-                <a:buSzTx/>
-                <a:buFontTx/>
-                <a:buNone/>
-                <a:tabLst/>
+              <a:pPr algn="ctr" defTabSz="747796">
                 <a:defRPr/>
               </a:pPr>
-              <a:endParaRPr kumimoji="0" lang="en-US" sz="1800" b="0" i="0" u="none" strike="noStrike" kern="0" cap="none" spc="0" normalizeH="0" baseline="0" noProof="0">
-                <a:ln>
-                  <a:noFill/>
-                </a:ln>
+              <a:endParaRPr lang="en-US" sz="1472" kern="0">
                 <a:solidFill>
                   <a:prstClr val="white"/>
                 </a:solidFill>
-                <a:effectLst/>
-                <a:uLnTx/>
-                <a:uFillTx/>
                 <a:latin typeface="Calibri"/>
-                <a:ea typeface="+mn-ea"/>
-                <a:cs typeface="+mn-cs"/>
               </a:endParaRPr>
             </a:p>
           </p:txBody>
@@ -6561,36 +7046,14 @@
             <a:bodyPr rtlCol="0" anchor="ctr"/>
             <a:lstStyle/>
             <a:p>
-              <a:pPr marL="0" marR="0" lvl="0" indent="0" algn="ctr" defTabSz="914400" eaLnBrk="1" fontAlgn="auto" latinLnBrk="0" hangingPunct="1">
-                <a:lnSpc>
-                  <a:spcPct val="100000"/>
-                </a:lnSpc>
-                <a:spcBef>
-                  <a:spcPts val="0"/>
-                </a:spcBef>
-                <a:spcAft>
-                  <a:spcPts val="0"/>
-                </a:spcAft>
-                <a:buClrTx/>
-                <a:buSzTx/>
-                <a:buFontTx/>
-                <a:buNone/>
-                <a:tabLst/>
+              <a:pPr algn="ctr" defTabSz="747796">
                 <a:defRPr/>
               </a:pPr>
-              <a:endParaRPr kumimoji="0" lang="en-US" sz="1800" b="0" i="0" u="none" strike="noStrike" kern="0" cap="none" spc="0" normalizeH="0" baseline="0" noProof="0">
-                <a:ln>
-                  <a:noFill/>
-                </a:ln>
+              <a:endParaRPr lang="en-US" sz="1472" kern="0">
                 <a:solidFill>
                   <a:prstClr val="white"/>
                 </a:solidFill>
-                <a:effectLst/>
-                <a:uLnTx/>
-                <a:uFillTx/>
                 <a:latin typeface="Calibri"/>
-                <a:ea typeface="+mn-ea"/>
-                <a:cs typeface="+mn-cs"/>
               </a:endParaRPr>
             </a:p>
           </p:txBody>
@@ -6631,36 +7094,14 @@
             <a:bodyPr rtlCol="0" anchor="ctr"/>
             <a:lstStyle/>
             <a:p>
-              <a:pPr marL="0" marR="0" lvl="0" indent="0" algn="ctr" defTabSz="914400" eaLnBrk="1" fontAlgn="auto" latinLnBrk="0" hangingPunct="1">
-                <a:lnSpc>
-                  <a:spcPct val="100000"/>
-                </a:lnSpc>
-                <a:spcBef>
-                  <a:spcPts val="0"/>
-                </a:spcBef>
-                <a:spcAft>
-                  <a:spcPts val="0"/>
-                </a:spcAft>
-                <a:buClrTx/>
-                <a:buSzTx/>
-                <a:buFontTx/>
-                <a:buNone/>
-                <a:tabLst/>
+              <a:pPr algn="ctr" defTabSz="747796">
                 <a:defRPr/>
               </a:pPr>
-              <a:endParaRPr kumimoji="0" lang="en-US" sz="1800" b="0" i="0" u="none" strike="noStrike" kern="0" cap="none" spc="0" normalizeH="0" baseline="0" noProof="0">
-                <a:ln>
-                  <a:noFill/>
-                </a:ln>
+              <a:endParaRPr lang="en-US" sz="1472" kern="0">
                 <a:solidFill>
                   <a:prstClr val="white"/>
                 </a:solidFill>
-                <a:effectLst/>
-                <a:uLnTx/>
-                <a:uFillTx/>
                 <a:latin typeface="Calibri"/>
-                <a:ea typeface="+mn-ea"/>
-                <a:cs typeface="+mn-cs"/>
               </a:endParaRPr>
             </a:p>
           </p:txBody>
@@ -6701,36 +7142,14 @@
             <a:bodyPr rtlCol="0" anchor="ctr"/>
             <a:lstStyle/>
             <a:p>
-              <a:pPr marL="0" marR="0" lvl="0" indent="0" algn="ctr" defTabSz="914400" eaLnBrk="1" fontAlgn="auto" latinLnBrk="0" hangingPunct="1">
-                <a:lnSpc>
-                  <a:spcPct val="100000"/>
-                </a:lnSpc>
-                <a:spcBef>
-                  <a:spcPts val="0"/>
-                </a:spcBef>
-                <a:spcAft>
-                  <a:spcPts val="0"/>
-                </a:spcAft>
-                <a:buClrTx/>
-                <a:buSzTx/>
-                <a:buFontTx/>
-                <a:buNone/>
-                <a:tabLst/>
+              <a:pPr algn="ctr" defTabSz="747796">
                 <a:defRPr/>
               </a:pPr>
-              <a:endParaRPr kumimoji="0" lang="en-US" sz="1800" b="0" i="0" u="none" strike="noStrike" kern="0" cap="none" spc="0" normalizeH="0" baseline="0" noProof="0">
-                <a:ln>
-                  <a:noFill/>
-                </a:ln>
+              <a:endParaRPr lang="en-US" sz="1472" kern="0">
                 <a:solidFill>
                   <a:prstClr val="white"/>
                 </a:solidFill>
-                <a:effectLst/>
-                <a:uLnTx/>
-                <a:uFillTx/>
                 <a:latin typeface="Calibri"/>
-                <a:ea typeface="+mn-ea"/>
-                <a:cs typeface="+mn-cs"/>
               </a:endParaRPr>
             </a:p>
           </p:txBody>
@@ -6771,36 +7190,14 @@
             <a:bodyPr rtlCol="0" anchor="ctr"/>
             <a:lstStyle/>
             <a:p>
-              <a:pPr marL="0" marR="0" lvl="0" indent="0" algn="ctr" defTabSz="914400" eaLnBrk="1" fontAlgn="auto" latinLnBrk="0" hangingPunct="1">
-                <a:lnSpc>
-                  <a:spcPct val="100000"/>
-                </a:lnSpc>
-                <a:spcBef>
-                  <a:spcPts val="0"/>
-                </a:spcBef>
-                <a:spcAft>
-                  <a:spcPts val="0"/>
-                </a:spcAft>
-                <a:buClrTx/>
-                <a:buSzTx/>
-                <a:buFontTx/>
-                <a:buNone/>
-                <a:tabLst/>
+              <a:pPr algn="ctr" defTabSz="747796">
                 <a:defRPr/>
               </a:pPr>
-              <a:endParaRPr kumimoji="0" lang="en-US" sz="1800" b="0" i="0" u="none" strike="noStrike" kern="0" cap="none" spc="0" normalizeH="0" baseline="0" noProof="0">
-                <a:ln>
-                  <a:noFill/>
-                </a:ln>
+              <a:endParaRPr lang="en-US" sz="1472" kern="0">
                 <a:solidFill>
                   <a:prstClr val="white"/>
                 </a:solidFill>
-                <a:effectLst/>
-                <a:uLnTx/>
-                <a:uFillTx/>
                 <a:latin typeface="Calibri"/>
-                <a:ea typeface="+mn-ea"/>
-                <a:cs typeface="+mn-cs"/>
               </a:endParaRPr>
             </a:p>
           </p:txBody>
@@ -6841,36 +7238,14 @@
             <a:bodyPr rtlCol="0" anchor="ctr"/>
             <a:lstStyle/>
             <a:p>
-              <a:pPr marL="0" marR="0" lvl="0" indent="0" algn="ctr" defTabSz="914400" eaLnBrk="1" fontAlgn="auto" latinLnBrk="0" hangingPunct="1">
-                <a:lnSpc>
-                  <a:spcPct val="100000"/>
-                </a:lnSpc>
-                <a:spcBef>
-                  <a:spcPts val="0"/>
-                </a:spcBef>
-                <a:spcAft>
-                  <a:spcPts val="0"/>
-                </a:spcAft>
-                <a:buClrTx/>
-                <a:buSzTx/>
-                <a:buFontTx/>
-                <a:buNone/>
-                <a:tabLst/>
+              <a:pPr algn="ctr" defTabSz="747796">
                 <a:defRPr/>
               </a:pPr>
-              <a:endParaRPr kumimoji="0" lang="en-US" sz="1800" b="0" i="0" u="none" strike="noStrike" kern="0" cap="none" spc="0" normalizeH="0" baseline="0" noProof="0">
-                <a:ln>
-                  <a:noFill/>
-                </a:ln>
+              <a:endParaRPr lang="en-US" sz="1472" kern="0">
                 <a:solidFill>
                   <a:prstClr val="white"/>
                 </a:solidFill>
-                <a:effectLst/>
-                <a:uLnTx/>
-                <a:uFillTx/>
                 <a:latin typeface="Calibri"/>
-                <a:ea typeface="+mn-ea"/>
-                <a:cs typeface="+mn-cs"/>
               </a:endParaRPr>
             </a:p>
           </p:txBody>
@@ -6911,36 +7286,14 @@
             <a:bodyPr rtlCol="0" anchor="ctr"/>
             <a:lstStyle/>
             <a:p>
-              <a:pPr marL="0" marR="0" lvl="0" indent="0" algn="ctr" defTabSz="914400" eaLnBrk="1" fontAlgn="auto" latinLnBrk="0" hangingPunct="1">
-                <a:lnSpc>
-                  <a:spcPct val="100000"/>
-                </a:lnSpc>
-                <a:spcBef>
-                  <a:spcPts val="0"/>
-                </a:spcBef>
-                <a:spcAft>
-                  <a:spcPts val="0"/>
-                </a:spcAft>
-                <a:buClrTx/>
-                <a:buSzTx/>
-                <a:buFontTx/>
-                <a:buNone/>
-                <a:tabLst/>
+              <a:pPr algn="ctr" defTabSz="747796">
                 <a:defRPr/>
               </a:pPr>
-              <a:endParaRPr kumimoji="0" lang="en-US" sz="1800" b="0" i="0" u="none" strike="noStrike" kern="0" cap="none" spc="0" normalizeH="0" baseline="0" noProof="0">
-                <a:ln>
-                  <a:noFill/>
-                </a:ln>
+              <a:endParaRPr lang="en-US" sz="1472" kern="0">
                 <a:solidFill>
                   <a:prstClr val="white"/>
                 </a:solidFill>
-                <a:effectLst/>
-                <a:uLnTx/>
-                <a:uFillTx/>
                 <a:latin typeface="Calibri"/>
-                <a:ea typeface="+mn-ea"/>
-                <a:cs typeface="+mn-cs"/>
               </a:endParaRPr>
             </a:p>
           </p:txBody>
@@ -6981,36 +7334,14 @@
             <a:bodyPr rtlCol="0" anchor="ctr"/>
             <a:lstStyle/>
             <a:p>
-              <a:pPr marL="0" marR="0" lvl="0" indent="0" algn="ctr" defTabSz="914400" eaLnBrk="1" fontAlgn="auto" latinLnBrk="0" hangingPunct="1">
-                <a:lnSpc>
-                  <a:spcPct val="100000"/>
-                </a:lnSpc>
-                <a:spcBef>
-                  <a:spcPts val="0"/>
-                </a:spcBef>
-                <a:spcAft>
-                  <a:spcPts val="0"/>
-                </a:spcAft>
-                <a:buClrTx/>
-                <a:buSzTx/>
-                <a:buFontTx/>
-                <a:buNone/>
-                <a:tabLst/>
+              <a:pPr algn="ctr" defTabSz="747796">
                 <a:defRPr/>
               </a:pPr>
-              <a:endParaRPr kumimoji="0" lang="en-US" sz="1800" b="0" i="0" u="none" strike="noStrike" kern="0" cap="none" spc="0" normalizeH="0" baseline="0" noProof="0">
-                <a:ln>
-                  <a:noFill/>
-                </a:ln>
+              <a:endParaRPr lang="en-US" sz="1472" kern="0">
                 <a:solidFill>
                   <a:prstClr val="white"/>
                 </a:solidFill>
-                <a:effectLst/>
-                <a:uLnTx/>
-                <a:uFillTx/>
                 <a:latin typeface="Calibri"/>
-                <a:ea typeface="+mn-ea"/>
-                <a:cs typeface="+mn-cs"/>
               </a:endParaRPr>
             </a:p>
           </p:txBody>
@@ -7051,36 +7382,14 @@
             <a:bodyPr rtlCol="0" anchor="ctr"/>
             <a:lstStyle/>
             <a:p>
-              <a:pPr marL="0" marR="0" lvl="0" indent="0" algn="ctr" defTabSz="914400" eaLnBrk="1" fontAlgn="auto" latinLnBrk="0" hangingPunct="1">
-                <a:lnSpc>
-                  <a:spcPct val="100000"/>
-                </a:lnSpc>
-                <a:spcBef>
-                  <a:spcPts val="0"/>
-                </a:spcBef>
-                <a:spcAft>
-                  <a:spcPts val="0"/>
-                </a:spcAft>
-                <a:buClrTx/>
-                <a:buSzTx/>
-                <a:buFontTx/>
-                <a:buNone/>
-                <a:tabLst/>
+              <a:pPr algn="ctr" defTabSz="747796">
                 <a:defRPr/>
               </a:pPr>
-              <a:endParaRPr kumimoji="0" lang="en-US" sz="1800" b="0" i="0" u="none" strike="noStrike" kern="0" cap="none" spc="0" normalizeH="0" baseline="0" noProof="0">
-                <a:ln>
-                  <a:noFill/>
-                </a:ln>
+              <a:endParaRPr lang="en-US" sz="1472" kern="0">
                 <a:solidFill>
                   <a:prstClr val="white"/>
                 </a:solidFill>
-                <a:effectLst/>
-                <a:uLnTx/>
-                <a:uFillTx/>
                 <a:latin typeface="Calibri"/>
-                <a:ea typeface="+mn-ea"/>
-                <a:cs typeface="+mn-cs"/>
               </a:endParaRPr>
             </a:p>
           </p:txBody>
@@ -7121,36 +7430,14 @@
             <a:bodyPr rtlCol="0" anchor="ctr"/>
             <a:lstStyle/>
             <a:p>
-              <a:pPr marL="0" marR="0" lvl="0" indent="0" algn="ctr" defTabSz="914400" eaLnBrk="1" fontAlgn="auto" latinLnBrk="0" hangingPunct="1">
-                <a:lnSpc>
-                  <a:spcPct val="100000"/>
-                </a:lnSpc>
-                <a:spcBef>
-                  <a:spcPts val="0"/>
-                </a:spcBef>
-                <a:spcAft>
-                  <a:spcPts val="0"/>
-                </a:spcAft>
-                <a:buClrTx/>
-                <a:buSzTx/>
-                <a:buFontTx/>
-                <a:buNone/>
-                <a:tabLst/>
+              <a:pPr algn="ctr" defTabSz="747796">
                 <a:defRPr/>
               </a:pPr>
-              <a:endParaRPr kumimoji="0" lang="en-US" sz="1800" b="0" i="0" u="none" strike="noStrike" kern="0" cap="none" spc="0" normalizeH="0" baseline="0" noProof="0">
-                <a:ln>
-                  <a:noFill/>
-                </a:ln>
+              <a:endParaRPr lang="en-US" sz="1472" kern="0">
                 <a:solidFill>
                   <a:prstClr val="white"/>
                 </a:solidFill>
-                <a:effectLst/>
-                <a:uLnTx/>
-                <a:uFillTx/>
                 <a:latin typeface="Calibri"/>
-                <a:ea typeface="+mn-ea"/>
-                <a:cs typeface="+mn-cs"/>
               </a:endParaRPr>
             </a:p>
           </p:txBody>
@@ -7191,36 +7478,14 @@
             <a:bodyPr rtlCol="0" anchor="ctr"/>
             <a:lstStyle/>
             <a:p>
-              <a:pPr marL="0" marR="0" lvl="0" indent="0" algn="ctr" defTabSz="914400" eaLnBrk="1" fontAlgn="auto" latinLnBrk="0" hangingPunct="1">
-                <a:lnSpc>
-                  <a:spcPct val="100000"/>
-                </a:lnSpc>
-                <a:spcBef>
-                  <a:spcPts val="0"/>
-                </a:spcBef>
-                <a:spcAft>
-                  <a:spcPts val="0"/>
-                </a:spcAft>
-                <a:buClrTx/>
-                <a:buSzTx/>
-                <a:buFontTx/>
-                <a:buNone/>
-                <a:tabLst/>
+              <a:pPr algn="ctr" defTabSz="747796">
                 <a:defRPr/>
               </a:pPr>
-              <a:endParaRPr kumimoji="0" lang="en-US" sz="1800" b="0" i="0" u="none" strike="noStrike" kern="0" cap="none" spc="0" normalizeH="0" baseline="0" noProof="0">
-                <a:ln>
-                  <a:noFill/>
-                </a:ln>
+              <a:endParaRPr lang="en-US" sz="1472" kern="0">
                 <a:solidFill>
                   <a:prstClr val="white"/>
                 </a:solidFill>
-                <a:effectLst/>
-                <a:uLnTx/>
-                <a:uFillTx/>
                 <a:latin typeface="Calibri"/>
-                <a:ea typeface="+mn-ea"/>
-                <a:cs typeface="+mn-cs"/>
               </a:endParaRPr>
             </a:p>
           </p:txBody>
@@ -7261,36 +7526,14 @@
             <a:bodyPr rtlCol="0" anchor="ctr"/>
             <a:lstStyle/>
             <a:p>
-              <a:pPr marL="0" marR="0" lvl="0" indent="0" algn="ctr" defTabSz="914400" eaLnBrk="1" fontAlgn="auto" latinLnBrk="0" hangingPunct="1">
-                <a:lnSpc>
-                  <a:spcPct val="100000"/>
-                </a:lnSpc>
-                <a:spcBef>
-                  <a:spcPts val="0"/>
-                </a:spcBef>
-                <a:spcAft>
-                  <a:spcPts val="0"/>
-                </a:spcAft>
-                <a:buClrTx/>
-                <a:buSzTx/>
-                <a:buFontTx/>
-                <a:buNone/>
-                <a:tabLst/>
+              <a:pPr algn="ctr" defTabSz="747796">
                 <a:defRPr/>
               </a:pPr>
-              <a:endParaRPr kumimoji="0" lang="en-US" sz="1800" b="0" i="0" u="none" strike="noStrike" kern="0" cap="none" spc="0" normalizeH="0" baseline="0" noProof="0">
-                <a:ln>
-                  <a:noFill/>
-                </a:ln>
+              <a:endParaRPr lang="en-US" sz="1472" kern="0">
                 <a:solidFill>
                   <a:prstClr val="white"/>
                 </a:solidFill>
-                <a:effectLst/>
-                <a:uLnTx/>
-                <a:uFillTx/>
                 <a:latin typeface="Calibri"/>
-                <a:ea typeface="+mn-ea"/>
-                <a:cs typeface="+mn-cs"/>
               </a:endParaRPr>
             </a:p>
           </p:txBody>
@@ -7331,36 +7574,14 @@
             <a:bodyPr rtlCol="0" anchor="ctr"/>
             <a:lstStyle/>
             <a:p>
-              <a:pPr marL="0" marR="0" lvl="0" indent="0" algn="ctr" defTabSz="914400" eaLnBrk="1" fontAlgn="auto" latinLnBrk="0" hangingPunct="1">
-                <a:lnSpc>
-                  <a:spcPct val="100000"/>
-                </a:lnSpc>
-                <a:spcBef>
-                  <a:spcPts val="0"/>
-                </a:spcBef>
-                <a:spcAft>
-                  <a:spcPts val="0"/>
-                </a:spcAft>
-                <a:buClrTx/>
-                <a:buSzTx/>
-                <a:buFontTx/>
-                <a:buNone/>
-                <a:tabLst/>
+              <a:pPr algn="ctr" defTabSz="747796">
                 <a:defRPr/>
               </a:pPr>
-              <a:endParaRPr kumimoji="0" lang="en-US" sz="1800" b="0" i="0" u="none" strike="noStrike" kern="0" cap="none" spc="0" normalizeH="0" baseline="0" noProof="0">
-                <a:ln>
-                  <a:noFill/>
-                </a:ln>
+              <a:endParaRPr lang="en-US" sz="1472" kern="0">
                 <a:solidFill>
                   <a:prstClr val="white"/>
                 </a:solidFill>
-                <a:effectLst/>
-                <a:uLnTx/>
-                <a:uFillTx/>
                 <a:latin typeface="Calibri"/>
-                <a:ea typeface="+mn-ea"/>
-                <a:cs typeface="+mn-cs"/>
               </a:endParaRPr>
             </a:p>
           </p:txBody>
@@ -7401,36 +7622,14 @@
             <a:bodyPr rtlCol="0" anchor="ctr"/>
             <a:lstStyle/>
             <a:p>
-              <a:pPr marL="0" marR="0" lvl="0" indent="0" algn="ctr" defTabSz="914400" eaLnBrk="1" fontAlgn="auto" latinLnBrk="0" hangingPunct="1">
-                <a:lnSpc>
-                  <a:spcPct val="100000"/>
-                </a:lnSpc>
-                <a:spcBef>
-                  <a:spcPts val="0"/>
-                </a:spcBef>
-                <a:spcAft>
-                  <a:spcPts val="0"/>
-                </a:spcAft>
-                <a:buClrTx/>
-                <a:buSzTx/>
-                <a:buFontTx/>
-                <a:buNone/>
-                <a:tabLst/>
+              <a:pPr algn="ctr" defTabSz="747796">
                 <a:defRPr/>
               </a:pPr>
-              <a:endParaRPr kumimoji="0" lang="en-US" sz="1800" b="0" i="0" u="none" strike="noStrike" kern="0" cap="none" spc="0" normalizeH="0" baseline="0" noProof="0">
-                <a:ln>
-                  <a:noFill/>
-                </a:ln>
+              <a:endParaRPr lang="en-US" sz="1472" kern="0">
                 <a:solidFill>
                   <a:prstClr val="white"/>
                 </a:solidFill>
-                <a:effectLst/>
-                <a:uLnTx/>
-                <a:uFillTx/>
                 <a:latin typeface="Calibri"/>
-                <a:ea typeface="+mn-ea"/>
-                <a:cs typeface="+mn-cs"/>
               </a:endParaRPr>
             </a:p>
           </p:txBody>
@@ -7471,36 +7670,14 @@
             <a:bodyPr rtlCol="0" anchor="ctr"/>
             <a:lstStyle/>
             <a:p>
-              <a:pPr marL="0" marR="0" lvl="0" indent="0" algn="ctr" defTabSz="914400" eaLnBrk="1" fontAlgn="auto" latinLnBrk="0" hangingPunct="1">
-                <a:lnSpc>
-                  <a:spcPct val="100000"/>
-                </a:lnSpc>
-                <a:spcBef>
-                  <a:spcPts val="0"/>
-                </a:spcBef>
-                <a:spcAft>
-                  <a:spcPts val="0"/>
-                </a:spcAft>
-                <a:buClrTx/>
-                <a:buSzTx/>
-                <a:buFontTx/>
-                <a:buNone/>
-                <a:tabLst/>
+              <a:pPr algn="ctr" defTabSz="747796">
                 <a:defRPr/>
               </a:pPr>
-              <a:endParaRPr kumimoji="0" lang="en-US" sz="1800" b="0" i="0" u="none" strike="noStrike" kern="0" cap="none" spc="0" normalizeH="0" baseline="0" noProof="0">
-                <a:ln>
-                  <a:noFill/>
-                </a:ln>
+              <a:endParaRPr lang="en-US" sz="1472" kern="0">
                 <a:solidFill>
                   <a:prstClr val="white"/>
                 </a:solidFill>
-                <a:effectLst/>
-                <a:uLnTx/>
-                <a:uFillTx/>
                 <a:latin typeface="Calibri"/>
-                <a:ea typeface="+mn-ea"/>
-                <a:cs typeface="+mn-cs"/>
               </a:endParaRPr>
             </a:p>
           </p:txBody>
@@ -7541,36 +7718,14 @@
             <a:bodyPr rtlCol="0" anchor="ctr"/>
             <a:lstStyle/>
             <a:p>
-              <a:pPr marL="0" marR="0" lvl="0" indent="0" algn="ctr" defTabSz="914400" eaLnBrk="1" fontAlgn="auto" latinLnBrk="0" hangingPunct="1">
-                <a:lnSpc>
-                  <a:spcPct val="100000"/>
-                </a:lnSpc>
-                <a:spcBef>
-                  <a:spcPts val="0"/>
-                </a:spcBef>
-                <a:spcAft>
-                  <a:spcPts val="0"/>
-                </a:spcAft>
-                <a:buClrTx/>
-                <a:buSzTx/>
-                <a:buFontTx/>
-                <a:buNone/>
-                <a:tabLst/>
+              <a:pPr algn="ctr" defTabSz="747796">
                 <a:defRPr/>
               </a:pPr>
-              <a:endParaRPr kumimoji="0" lang="en-US" sz="1800" b="0" i="0" u="none" strike="noStrike" kern="0" cap="none" spc="0" normalizeH="0" baseline="0" noProof="0">
-                <a:ln>
-                  <a:noFill/>
-                </a:ln>
+              <a:endParaRPr lang="en-US" sz="1472" kern="0">
                 <a:solidFill>
                   <a:prstClr val="white"/>
                 </a:solidFill>
-                <a:effectLst/>
-                <a:uLnTx/>
-                <a:uFillTx/>
                 <a:latin typeface="Calibri"/>
-                <a:ea typeface="+mn-ea"/>
-                <a:cs typeface="+mn-cs"/>
               </a:endParaRPr>
             </a:p>
           </p:txBody>
@@ -7611,36 +7766,14 @@
             <a:bodyPr rtlCol="0" anchor="ctr"/>
             <a:lstStyle/>
             <a:p>
-              <a:pPr marL="0" marR="0" lvl="0" indent="0" algn="ctr" defTabSz="914400" eaLnBrk="1" fontAlgn="auto" latinLnBrk="0" hangingPunct="1">
-                <a:lnSpc>
-                  <a:spcPct val="100000"/>
-                </a:lnSpc>
-                <a:spcBef>
-                  <a:spcPts val="0"/>
-                </a:spcBef>
-                <a:spcAft>
-                  <a:spcPts val="0"/>
-                </a:spcAft>
-                <a:buClrTx/>
-                <a:buSzTx/>
-                <a:buFontTx/>
-                <a:buNone/>
-                <a:tabLst/>
+              <a:pPr algn="ctr" defTabSz="747796">
                 <a:defRPr/>
               </a:pPr>
-              <a:endParaRPr kumimoji="0" lang="en-US" sz="1800" b="0" i="0" u="none" strike="noStrike" kern="0" cap="none" spc="0" normalizeH="0" baseline="0" noProof="0">
-                <a:ln>
-                  <a:noFill/>
-                </a:ln>
+              <a:endParaRPr lang="en-US" sz="1472" kern="0">
                 <a:solidFill>
                   <a:prstClr val="white"/>
                 </a:solidFill>
-                <a:effectLst/>
-                <a:uLnTx/>
-                <a:uFillTx/>
                 <a:latin typeface="Calibri"/>
-                <a:ea typeface="+mn-ea"/>
-                <a:cs typeface="+mn-cs"/>
               </a:endParaRPr>
             </a:p>
           </p:txBody>
@@ -7681,36 +7814,14 @@
             <a:bodyPr rtlCol="0" anchor="ctr"/>
             <a:lstStyle/>
             <a:p>
-              <a:pPr marL="0" marR="0" lvl="0" indent="0" algn="ctr" defTabSz="914400" eaLnBrk="1" fontAlgn="auto" latinLnBrk="0" hangingPunct="1">
-                <a:lnSpc>
-                  <a:spcPct val="100000"/>
-                </a:lnSpc>
-                <a:spcBef>
-                  <a:spcPts val="0"/>
-                </a:spcBef>
-                <a:spcAft>
-                  <a:spcPts val="0"/>
-                </a:spcAft>
-                <a:buClrTx/>
-                <a:buSzTx/>
-                <a:buFontTx/>
-                <a:buNone/>
-                <a:tabLst/>
+              <a:pPr algn="ctr" defTabSz="747796">
                 <a:defRPr/>
               </a:pPr>
-              <a:endParaRPr kumimoji="0" lang="en-US" sz="1800" b="0" i="0" u="none" strike="noStrike" kern="0" cap="none" spc="0" normalizeH="0" baseline="0" noProof="0">
-                <a:ln>
-                  <a:noFill/>
-                </a:ln>
+              <a:endParaRPr lang="en-US" sz="1472" kern="0">
                 <a:solidFill>
                   <a:prstClr val="white"/>
                 </a:solidFill>
-                <a:effectLst/>
-                <a:uLnTx/>
-                <a:uFillTx/>
                 <a:latin typeface="Calibri"/>
-                <a:ea typeface="+mn-ea"/>
-                <a:cs typeface="+mn-cs"/>
               </a:endParaRPr>
             </a:p>
           </p:txBody>
@@ -7751,36 +7862,14 @@
             <a:bodyPr rtlCol="0" anchor="ctr"/>
             <a:lstStyle/>
             <a:p>
-              <a:pPr marL="0" marR="0" lvl="0" indent="0" algn="ctr" defTabSz="914400" eaLnBrk="1" fontAlgn="auto" latinLnBrk="0" hangingPunct="1">
-                <a:lnSpc>
-                  <a:spcPct val="100000"/>
-                </a:lnSpc>
-                <a:spcBef>
-                  <a:spcPts val="0"/>
-                </a:spcBef>
-                <a:spcAft>
-                  <a:spcPts val="0"/>
-                </a:spcAft>
-                <a:buClrTx/>
-                <a:buSzTx/>
-                <a:buFontTx/>
-                <a:buNone/>
-                <a:tabLst/>
+              <a:pPr algn="ctr" defTabSz="747796">
                 <a:defRPr/>
               </a:pPr>
-              <a:endParaRPr kumimoji="0" lang="en-US" sz="1800" b="0" i="0" u="none" strike="noStrike" kern="0" cap="none" spc="0" normalizeH="0" baseline="0" noProof="0">
-                <a:ln>
-                  <a:noFill/>
-                </a:ln>
+              <a:endParaRPr lang="en-US" sz="1472" kern="0">
                 <a:solidFill>
                   <a:prstClr val="white"/>
                 </a:solidFill>
-                <a:effectLst/>
-                <a:uLnTx/>
-                <a:uFillTx/>
                 <a:latin typeface="Calibri"/>
-                <a:ea typeface="+mn-ea"/>
-                <a:cs typeface="+mn-cs"/>
               </a:endParaRPr>
             </a:p>
           </p:txBody>
@@ -7821,36 +7910,14 @@
             <a:bodyPr rtlCol="0" anchor="ctr"/>
             <a:lstStyle/>
             <a:p>
-              <a:pPr marL="0" marR="0" lvl="0" indent="0" algn="ctr" defTabSz="914400" eaLnBrk="1" fontAlgn="auto" latinLnBrk="0" hangingPunct="1">
-                <a:lnSpc>
-                  <a:spcPct val="100000"/>
-                </a:lnSpc>
-                <a:spcBef>
-                  <a:spcPts val="0"/>
-                </a:spcBef>
-                <a:spcAft>
-                  <a:spcPts val="0"/>
-                </a:spcAft>
-                <a:buClrTx/>
-                <a:buSzTx/>
-                <a:buFontTx/>
-                <a:buNone/>
-                <a:tabLst/>
+              <a:pPr algn="ctr" defTabSz="747796">
                 <a:defRPr/>
               </a:pPr>
-              <a:endParaRPr kumimoji="0" lang="en-US" sz="1800" b="0" i="0" u="none" strike="noStrike" kern="0" cap="none" spc="0" normalizeH="0" baseline="0" noProof="0">
-                <a:ln>
-                  <a:noFill/>
-                </a:ln>
+              <a:endParaRPr lang="en-US" sz="1472" kern="0">
                 <a:solidFill>
                   <a:prstClr val="white"/>
                 </a:solidFill>
-                <a:effectLst/>
-                <a:uLnTx/>
-                <a:uFillTx/>
                 <a:latin typeface="Calibri"/>
-                <a:ea typeface="+mn-ea"/>
-                <a:cs typeface="+mn-cs"/>
               </a:endParaRPr>
             </a:p>
           </p:txBody>
@@ -7891,36 +7958,14 @@
             <a:bodyPr rtlCol="0" anchor="ctr"/>
             <a:lstStyle/>
             <a:p>
-              <a:pPr marL="0" marR="0" lvl="0" indent="0" algn="ctr" defTabSz="914400" eaLnBrk="1" fontAlgn="auto" latinLnBrk="0" hangingPunct="1">
-                <a:lnSpc>
-                  <a:spcPct val="100000"/>
-                </a:lnSpc>
-                <a:spcBef>
-                  <a:spcPts val="0"/>
-                </a:spcBef>
-                <a:spcAft>
-                  <a:spcPts val="0"/>
-                </a:spcAft>
-                <a:buClrTx/>
-                <a:buSzTx/>
-                <a:buFontTx/>
-                <a:buNone/>
-                <a:tabLst/>
+              <a:pPr algn="ctr" defTabSz="747796">
                 <a:defRPr/>
               </a:pPr>
-              <a:endParaRPr kumimoji="0" lang="en-US" sz="1800" b="0" i="0" u="none" strike="noStrike" kern="0" cap="none" spc="0" normalizeH="0" baseline="0" noProof="0">
-                <a:ln>
-                  <a:noFill/>
-                </a:ln>
+              <a:endParaRPr lang="en-US" sz="1472" kern="0">
                 <a:solidFill>
                   <a:prstClr val="white"/>
                 </a:solidFill>
-                <a:effectLst/>
-                <a:uLnTx/>
-                <a:uFillTx/>
                 <a:latin typeface="Calibri"/>
-                <a:ea typeface="+mn-ea"/>
-                <a:cs typeface="+mn-cs"/>
               </a:endParaRPr>
             </a:p>
           </p:txBody>
@@ -7961,36 +8006,14 @@
             <a:bodyPr rtlCol="0" anchor="ctr"/>
             <a:lstStyle/>
             <a:p>
-              <a:pPr marL="0" marR="0" lvl="0" indent="0" algn="ctr" defTabSz="914400" eaLnBrk="1" fontAlgn="auto" latinLnBrk="0" hangingPunct="1">
-                <a:lnSpc>
-                  <a:spcPct val="100000"/>
-                </a:lnSpc>
-                <a:spcBef>
-                  <a:spcPts val="0"/>
-                </a:spcBef>
-                <a:spcAft>
-                  <a:spcPts val="0"/>
-                </a:spcAft>
-                <a:buClrTx/>
-                <a:buSzTx/>
-                <a:buFontTx/>
-                <a:buNone/>
-                <a:tabLst/>
+              <a:pPr algn="ctr" defTabSz="747796">
                 <a:defRPr/>
               </a:pPr>
-              <a:endParaRPr kumimoji="0" lang="en-US" sz="1800" b="0" i="0" u="none" strike="noStrike" kern="0" cap="none" spc="0" normalizeH="0" baseline="0" noProof="0">
-                <a:ln>
-                  <a:noFill/>
-                </a:ln>
+              <a:endParaRPr lang="en-US" sz="1472" kern="0">
                 <a:solidFill>
                   <a:prstClr val="white"/>
                 </a:solidFill>
-                <a:effectLst/>
-                <a:uLnTx/>
-                <a:uFillTx/>
                 <a:latin typeface="Calibri"/>
-                <a:ea typeface="+mn-ea"/>
-                <a:cs typeface="+mn-cs"/>
               </a:endParaRPr>
             </a:p>
           </p:txBody>
@@ -8031,36 +8054,14 @@
             <a:bodyPr rtlCol="0" anchor="ctr"/>
             <a:lstStyle/>
             <a:p>
-              <a:pPr marL="0" marR="0" lvl="0" indent="0" algn="ctr" defTabSz="914400" eaLnBrk="1" fontAlgn="auto" latinLnBrk="0" hangingPunct="1">
-                <a:lnSpc>
-                  <a:spcPct val="100000"/>
-                </a:lnSpc>
-                <a:spcBef>
-                  <a:spcPts val="0"/>
-                </a:spcBef>
-                <a:spcAft>
-                  <a:spcPts val="0"/>
-                </a:spcAft>
-                <a:buClrTx/>
-                <a:buSzTx/>
-                <a:buFontTx/>
-                <a:buNone/>
-                <a:tabLst/>
+              <a:pPr algn="ctr" defTabSz="747796">
                 <a:defRPr/>
               </a:pPr>
-              <a:endParaRPr kumimoji="0" lang="en-US" sz="1800" b="0" i="0" u="none" strike="noStrike" kern="0" cap="none" spc="0" normalizeH="0" baseline="0" noProof="0">
-                <a:ln>
-                  <a:noFill/>
-                </a:ln>
+              <a:endParaRPr lang="en-US" sz="1472" kern="0">
                 <a:solidFill>
                   <a:prstClr val="white"/>
                 </a:solidFill>
-                <a:effectLst/>
-                <a:uLnTx/>
-                <a:uFillTx/>
                 <a:latin typeface="Calibri"/>
-                <a:ea typeface="+mn-ea"/>
-                <a:cs typeface="+mn-cs"/>
               </a:endParaRPr>
             </a:p>
           </p:txBody>
@@ -8101,36 +8102,14 @@
             <a:bodyPr rtlCol="0" anchor="ctr"/>
             <a:lstStyle/>
             <a:p>
-              <a:pPr marL="0" marR="0" lvl="0" indent="0" algn="ctr" defTabSz="914400" eaLnBrk="1" fontAlgn="auto" latinLnBrk="0" hangingPunct="1">
-                <a:lnSpc>
-                  <a:spcPct val="100000"/>
-                </a:lnSpc>
-                <a:spcBef>
-                  <a:spcPts val="0"/>
-                </a:spcBef>
-                <a:spcAft>
-                  <a:spcPts val="0"/>
-                </a:spcAft>
-                <a:buClrTx/>
-                <a:buSzTx/>
-                <a:buFontTx/>
-                <a:buNone/>
-                <a:tabLst/>
+              <a:pPr algn="ctr" defTabSz="747796">
                 <a:defRPr/>
               </a:pPr>
-              <a:endParaRPr kumimoji="0" lang="en-US" sz="1800" b="0" i="0" u="none" strike="noStrike" kern="0" cap="none" spc="0" normalizeH="0" baseline="0" noProof="0">
-                <a:ln>
-                  <a:noFill/>
-                </a:ln>
+              <a:endParaRPr lang="en-US" sz="1472" kern="0">
                 <a:solidFill>
                   <a:prstClr val="white"/>
                 </a:solidFill>
-                <a:effectLst/>
-                <a:uLnTx/>
-                <a:uFillTx/>
                 <a:latin typeface="Calibri"/>
-                <a:ea typeface="+mn-ea"/>
-                <a:cs typeface="+mn-cs"/>
               </a:endParaRPr>
             </a:p>
           </p:txBody>
@@ -8171,36 +8150,14 @@
             <a:bodyPr rtlCol="0" anchor="ctr"/>
             <a:lstStyle/>
             <a:p>
-              <a:pPr marL="0" marR="0" lvl="0" indent="0" algn="ctr" defTabSz="914400" eaLnBrk="1" fontAlgn="auto" latinLnBrk="0" hangingPunct="1">
-                <a:lnSpc>
-                  <a:spcPct val="100000"/>
-                </a:lnSpc>
-                <a:spcBef>
-                  <a:spcPts val="0"/>
-                </a:spcBef>
-                <a:spcAft>
-                  <a:spcPts val="0"/>
-                </a:spcAft>
-                <a:buClrTx/>
-                <a:buSzTx/>
-                <a:buFontTx/>
-                <a:buNone/>
-                <a:tabLst/>
+              <a:pPr algn="ctr" defTabSz="747796">
                 <a:defRPr/>
               </a:pPr>
-              <a:endParaRPr kumimoji="0" lang="en-US" sz="1800" b="0" i="0" u="none" strike="noStrike" kern="0" cap="none" spc="0" normalizeH="0" baseline="0" noProof="0">
-                <a:ln>
-                  <a:noFill/>
-                </a:ln>
+              <a:endParaRPr lang="en-US" sz="1472" kern="0">
                 <a:solidFill>
                   <a:prstClr val="white"/>
                 </a:solidFill>
-                <a:effectLst/>
-                <a:uLnTx/>
-                <a:uFillTx/>
                 <a:latin typeface="Calibri"/>
-                <a:ea typeface="+mn-ea"/>
-                <a:cs typeface="+mn-cs"/>
               </a:endParaRPr>
             </a:p>
           </p:txBody>
@@ -8241,36 +8198,14 @@
             <a:bodyPr rtlCol="0" anchor="ctr"/>
             <a:lstStyle/>
             <a:p>
-              <a:pPr marL="0" marR="0" lvl="0" indent="0" algn="ctr" defTabSz="914400" eaLnBrk="1" fontAlgn="auto" latinLnBrk="0" hangingPunct="1">
-                <a:lnSpc>
-                  <a:spcPct val="100000"/>
-                </a:lnSpc>
-                <a:spcBef>
-                  <a:spcPts val="0"/>
-                </a:spcBef>
-                <a:spcAft>
-                  <a:spcPts val="0"/>
-                </a:spcAft>
-                <a:buClrTx/>
-                <a:buSzTx/>
-                <a:buFontTx/>
-                <a:buNone/>
-                <a:tabLst/>
+              <a:pPr algn="ctr" defTabSz="747796">
                 <a:defRPr/>
               </a:pPr>
-              <a:endParaRPr kumimoji="0" lang="en-US" sz="1800" b="0" i="0" u="none" strike="noStrike" kern="0" cap="none" spc="0" normalizeH="0" baseline="0" noProof="0">
-                <a:ln>
-                  <a:noFill/>
-                </a:ln>
+              <a:endParaRPr lang="en-US" sz="1472" kern="0">
                 <a:solidFill>
                   <a:prstClr val="white"/>
                 </a:solidFill>
-                <a:effectLst/>
-                <a:uLnTx/>
-                <a:uFillTx/>
                 <a:latin typeface="Calibri"/>
-                <a:ea typeface="+mn-ea"/>
-                <a:cs typeface="+mn-cs"/>
               </a:endParaRPr>
             </a:p>
           </p:txBody>
@@ -8311,36 +8246,14 @@
             <a:bodyPr rtlCol="0" anchor="ctr"/>
             <a:lstStyle/>
             <a:p>
-              <a:pPr marL="0" marR="0" lvl="0" indent="0" algn="ctr" defTabSz="914400" eaLnBrk="1" fontAlgn="auto" latinLnBrk="0" hangingPunct="1">
-                <a:lnSpc>
-                  <a:spcPct val="100000"/>
-                </a:lnSpc>
-                <a:spcBef>
-                  <a:spcPts val="0"/>
-                </a:spcBef>
-                <a:spcAft>
-                  <a:spcPts val="0"/>
-                </a:spcAft>
-                <a:buClrTx/>
-                <a:buSzTx/>
-                <a:buFontTx/>
-                <a:buNone/>
-                <a:tabLst/>
+              <a:pPr algn="ctr" defTabSz="747796">
                 <a:defRPr/>
               </a:pPr>
-              <a:endParaRPr kumimoji="0" lang="en-US" sz="1800" b="0" i="0" u="none" strike="noStrike" kern="0" cap="none" spc="0" normalizeH="0" baseline="0" noProof="0">
-                <a:ln>
-                  <a:noFill/>
-                </a:ln>
+              <a:endParaRPr lang="en-US" sz="1472" kern="0">
                 <a:solidFill>
                   <a:prstClr val="white"/>
                 </a:solidFill>
-                <a:effectLst/>
-                <a:uLnTx/>
-                <a:uFillTx/>
                 <a:latin typeface="Calibri"/>
-                <a:ea typeface="+mn-ea"/>
-                <a:cs typeface="+mn-cs"/>
               </a:endParaRPr>
             </a:p>
           </p:txBody>
@@ -8381,36 +8294,14 @@
             <a:bodyPr rtlCol="0" anchor="ctr"/>
             <a:lstStyle/>
             <a:p>
-              <a:pPr marL="0" marR="0" lvl="0" indent="0" algn="ctr" defTabSz="914400" eaLnBrk="1" fontAlgn="auto" latinLnBrk="0" hangingPunct="1">
-                <a:lnSpc>
-                  <a:spcPct val="100000"/>
-                </a:lnSpc>
-                <a:spcBef>
-                  <a:spcPts val="0"/>
-                </a:spcBef>
-                <a:spcAft>
-                  <a:spcPts val="0"/>
-                </a:spcAft>
-                <a:buClrTx/>
-                <a:buSzTx/>
-                <a:buFontTx/>
-                <a:buNone/>
-                <a:tabLst/>
+              <a:pPr algn="ctr" defTabSz="747796">
                 <a:defRPr/>
               </a:pPr>
-              <a:endParaRPr kumimoji="0" lang="en-US" sz="1800" b="0" i="0" u="none" strike="noStrike" kern="0" cap="none" spc="0" normalizeH="0" baseline="0" noProof="0">
-                <a:ln>
-                  <a:noFill/>
-                </a:ln>
+              <a:endParaRPr lang="en-US" sz="1472" kern="0">
                 <a:solidFill>
                   <a:prstClr val="white"/>
                 </a:solidFill>
-                <a:effectLst/>
-                <a:uLnTx/>
-                <a:uFillTx/>
                 <a:latin typeface="Calibri"/>
-                <a:ea typeface="+mn-ea"/>
-                <a:cs typeface="+mn-cs"/>
               </a:endParaRPr>
             </a:p>
           </p:txBody>
@@ -8451,36 +8342,14 @@
             <a:bodyPr rtlCol="0" anchor="ctr"/>
             <a:lstStyle/>
             <a:p>
-              <a:pPr marL="0" marR="0" lvl="0" indent="0" algn="ctr" defTabSz="914400" eaLnBrk="1" fontAlgn="auto" latinLnBrk="0" hangingPunct="1">
-                <a:lnSpc>
-                  <a:spcPct val="100000"/>
-                </a:lnSpc>
-                <a:spcBef>
-                  <a:spcPts val="0"/>
-                </a:spcBef>
-                <a:spcAft>
-                  <a:spcPts val="0"/>
-                </a:spcAft>
-                <a:buClrTx/>
-                <a:buSzTx/>
-                <a:buFontTx/>
-                <a:buNone/>
-                <a:tabLst/>
+              <a:pPr algn="ctr" defTabSz="747796">
                 <a:defRPr/>
               </a:pPr>
-              <a:endParaRPr kumimoji="0" lang="en-US" sz="1800" b="0" i="0" u="none" strike="noStrike" kern="0" cap="none" spc="0" normalizeH="0" baseline="0" noProof="0">
-                <a:ln>
-                  <a:noFill/>
-                </a:ln>
+              <a:endParaRPr lang="en-US" sz="1472" kern="0">
                 <a:solidFill>
                   <a:prstClr val="white"/>
                 </a:solidFill>
-                <a:effectLst/>
-                <a:uLnTx/>
-                <a:uFillTx/>
                 <a:latin typeface="Calibri"/>
-                <a:ea typeface="+mn-ea"/>
-                <a:cs typeface="+mn-cs"/>
               </a:endParaRPr>
             </a:p>
           </p:txBody>
@@ -8499,8 +8368,8 @@
           </p:nvSpPr>
           <p:spPr>
             <a:xfrm>
-              <a:off x="9450086" y="5018501"/>
-              <a:ext cx="2700652" cy="646331"/>
+              <a:off x="9450086" y="5018006"/>
+              <a:ext cx="2700652" cy="639759"/>
             </a:xfrm>
             <a:prstGeom prst="rect">
               <a:avLst/>
@@ -8521,20 +8390,74 @@
             </a:bodyPr>
             <a:lstStyle/>
             <a:p>
-              <a:pPr algn="ctr" defTabSz="457200"/>
+              <a:pPr algn="ctr" defTabSz="373898"/>
               <a:r>
-                <a:rPr lang="zh-CN" altLang="en-US" b="1" kern="0" dirty="0"/>
+                <a:rPr lang="zh-CN" altLang="en-US" sz="1400" b="1" kern="0" dirty="0"/>
                 <a:t>近地面污染物浓度</a:t>
               </a:r>
-              <a:endParaRPr lang="en-GB" altLang="zh-CN" b="1" kern="0" dirty="0"/>
+              <a:endParaRPr lang="en-GB" altLang="zh-CN" sz="1400" b="1" kern="0" dirty="0"/>
             </a:p>
             <a:p>
-              <a:pPr algn="ctr" defTabSz="457200"/>
+              <a:pPr algn="ctr" defTabSz="373898"/>
               <a:r>
-                <a:rPr lang="zh-CN" altLang="en-US" b="1" kern="0" dirty="0"/>
+                <a:rPr lang="zh-CN" altLang="en-US" sz="1400" b="1" kern="0" dirty="0"/>
                 <a:t>太阳能光伏设施清单</a:t>
               </a:r>
-              <a:endParaRPr lang="en-GB" altLang="zh-CN" b="1" kern="0" dirty="0"/>
+              <a:endParaRPr lang="en-GB" altLang="zh-CN" sz="1400" b="1" kern="0" dirty="0"/>
+            </a:p>
+          </p:txBody>
+        </p:sp>
+        <p:sp>
+          <p:nvSpPr>
+            <p:cNvPr id="60" name="Rectangle 59">
+              <a:extLst>
+                <a:ext uri="{FF2B5EF4-FFF2-40B4-BE49-F238E27FC236}">
+                  <a16:creationId xmlns:a16="http://schemas.microsoft.com/office/drawing/2014/main" id="{38D8ADD4-FD38-32E8-5E10-7F1AEC8506AD}"/>
+                </a:ext>
+              </a:extLst>
+            </p:cNvPr>
+            <p:cNvSpPr/>
+            <p:nvPr/>
+          </p:nvSpPr>
+          <p:spPr>
+            <a:xfrm>
+              <a:off x="9455514" y="596541"/>
+              <a:ext cx="2700653" cy="5068291"/>
+            </a:xfrm>
+            <a:prstGeom prst="rect">
+              <a:avLst/>
+            </a:prstGeom>
+            <a:noFill/>
+            <a:ln w="12700">
+              <a:solidFill>
+                <a:schemeClr val="bg1">
+                  <a:lumMod val="50000"/>
+                </a:schemeClr>
+              </a:solidFill>
+            </a:ln>
+          </p:spPr>
+          <p:style>
+            <a:lnRef idx="2">
+              <a:schemeClr val="accent1">
+                <a:shade val="15000"/>
+              </a:schemeClr>
+            </a:lnRef>
+            <a:fillRef idx="1">
+              <a:schemeClr val="accent1"/>
+            </a:fillRef>
+            <a:effectRef idx="0">
+              <a:schemeClr val="accent1"/>
+            </a:effectRef>
+            <a:fontRef idx="minor">
+              <a:schemeClr val="lt1"/>
+            </a:fontRef>
+          </p:style>
+          <p:txBody>
+            <a:bodyPr rtlCol="0" anchor="ctr"/>
+            <a:lstStyle/>
+            <a:p>
+              <a:pPr algn="ctr"/>
+              <a:endParaRPr lang="en-US" sz="1472"/>
             </a:p>
           </p:txBody>
         </p:sp>
@@ -8553,14 +8476,16 @@
         </p:nvSpPr>
         <p:spPr>
           <a:xfrm>
-            <a:off x="2737700" y="2677470"/>
-            <a:ext cx="447595" cy="238803"/>
+            <a:off x="2238997" y="2056053"/>
+            <a:ext cx="366060" cy="195302"/>
           </a:xfrm>
           <a:prstGeom prst="rightArrow">
             <a:avLst/>
           </a:prstGeom>
           <a:solidFill>
-            <a:schemeClr val="accent2"/>
+            <a:schemeClr val="bg1">
+              <a:lumMod val="65000"/>
+            </a:schemeClr>
           </a:solidFill>
           <a:ln>
             <a:noFill/>
@@ -8587,7 +8512,7 @@
           <a:lstStyle/>
           <a:p>
             <a:pPr algn="ctr"/>
-            <a:endParaRPr lang="en-US"/>
+            <a:endParaRPr lang="en-US" sz="1472"/>
           </a:p>
         </p:txBody>
       </p:sp>
@@ -8605,14 +8530,16 @@
         </p:nvSpPr>
         <p:spPr>
           <a:xfrm>
-            <a:off x="5870318" y="2677470"/>
-            <a:ext cx="447595" cy="238803"/>
+            <a:off x="4800973" y="2056053"/>
+            <a:ext cx="366060" cy="195302"/>
           </a:xfrm>
           <a:prstGeom prst="rightArrow">
             <a:avLst/>
           </a:prstGeom>
           <a:solidFill>
-            <a:schemeClr val="accent2"/>
+            <a:schemeClr val="bg1">
+              <a:lumMod val="65000"/>
+            </a:schemeClr>
           </a:solidFill>
           <a:ln>
             <a:noFill/>
@@ -8639,7 +8566,7 @@
           <a:lstStyle/>
           <a:p>
             <a:pPr algn="ctr"/>
-            <a:endParaRPr lang="en-US"/>
+            <a:endParaRPr lang="en-US" sz="1472"/>
           </a:p>
         </p:txBody>
       </p:sp>
@@ -8657,14 +8584,16 @@
         </p:nvSpPr>
         <p:spPr>
           <a:xfrm flipH="1">
-            <a:off x="9003307" y="2677470"/>
-            <a:ext cx="447595" cy="238803"/>
+            <a:off x="7363252" y="2056053"/>
+            <a:ext cx="366060" cy="195302"/>
           </a:xfrm>
           <a:prstGeom prst="rightArrow">
             <a:avLst/>
           </a:prstGeom>
           <a:solidFill>
-            <a:schemeClr val="accent2"/>
+            <a:schemeClr val="bg1">
+              <a:lumMod val="65000"/>
+            </a:schemeClr>
           </a:solidFill>
           <a:ln>
             <a:noFill/>
@@ -8691,7 +8620,7 @@
           <a:lstStyle/>
           <a:p>
             <a:pPr algn="ctr"/>
-            <a:endParaRPr lang="en-US"/>
+            <a:endParaRPr lang="en-US" sz="1472"/>
           </a:p>
         </p:txBody>
       </p:sp>

--- a/downloads/group/interdisciplinary_framework.pptx
+++ b/downloads/group/interdisciplinary_framework.pptx
@@ -128,18 +128,18 @@
   <pc:docChgLst>
     <pc:chgData name="Fei Yao" userId="0f76fc2f-86db-4f00-832a-b92dc6cb86c5" providerId="ADAL" clId="{3542449D-0F28-5F63-A95F-E350D95EFEF5}"/>
     <pc:docChg chg="custSel delSld modSld modMainMaster modNotesMaster">
-      <pc:chgData name="Fei Yao" userId="0f76fc2f-86db-4f00-832a-b92dc6cb86c5" providerId="ADAL" clId="{3542449D-0F28-5F63-A95F-E350D95EFEF5}" dt="2026-01-17T17:27:34.718" v="324" actId="20577"/>
+      <pc:chgData name="Fei Yao" userId="0f76fc2f-86db-4f00-832a-b92dc6cb86c5" providerId="ADAL" clId="{3542449D-0F28-5F63-A95F-E350D95EFEF5}" dt="2026-01-18T10:23:14.892" v="337" actId="207"/>
       <pc:docMkLst>
         <pc:docMk/>
       </pc:docMkLst>
       <pc:sldChg chg="addSp delSp modSp mod modNotes">
-        <pc:chgData name="Fei Yao" userId="0f76fc2f-86db-4f00-832a-b92dc6cb86c5" providerId="ADAL" clId="{3542449D-0F28-5F63-A95F-E350D95EFEF5}" dt="2026-01-17T17:27:34.718" v="324" actId="20577"/>
+        <pc:chgData name="Fei Yao" userId="0f76fc2f-86db-4f00-832a-b92dc6cb86c5" providerId="ADAL" clId="{3542449D-0F28-5F63-A95F-E350D95EFEF5}" dt="2026-01-18T10:23:14.892" v="337" actId="207"/>
         <pc:sldMkLst>
           <pc:docMk/>
           <pc:sldMk cId="4040458237" sldId="257"/>
         </pc:sldMkLst>
         <pc:spChg chg="mod">
-          <ac:chgData name="Fei Yao" userId="0f76fc2f-86db-4f00-832a-b92dc6cb86c5" providerId="ADAL" clId="{3542449D-0F28-5F63-A95F-E350D95EFEF5}" dt="2026-01-17T17:05:07.571" v="61" actId="207"/>
+          <ac:chgData name="Fei Yao" userId="0f76fc2f-86db-4f00-832a-b92dc6cb86c5" providerId="ADAL" clId="{3542449D-0F28-5F63-A95F-E350D95EFEF5}" dt="2026-01-18T10:23:14.892" v="337" actId="207"/>
           <ac:spMkLst>
             <pc:docMk/>
             <pc:sldMk cId="4040458237" sldId="257"/>
@@ -147,7 +147,7 @@
           </ac:spMkLst>
         </pc:spChg>
         <pc:spChg chg="mod">
-          <ac:chgData name="Fei Yao" userId="0f76fc2f-86db-4f00-832a-b92dc6cb86c5" providerId="ADAL" clId="{3542449D-0F28-5F63-A95F-E350D95EFEF5}" dt="2026-01-17T17:05:07.571" v="61" actId="207"/>
+          <ac:chgData name="Fei Yao" userId="0f76fc2f-86db-4f00-832a-b92dc6cb86c5" providerId="ADAL" clId="{3542449D-0F28-5F63-A95F-E350D95EFEF5}" dt="2026-01-18T10:23:14.892" v="337" actId="207"/>
           <ac:spMkLst>
             <pc:docMk/>
             <pc:sldMk cId="4040458237" sldId="257"/>
@@ -155,7 +155,7 @@
           </ac:spMkLst>
         </pc:spChg>
         <pc:spChg chg="mod">
-          <ac:chgData name="Fei Yao" userId="0f76fc2f-86db-4f00-832a-b92dc6cb86c5" providerId="ADAL" clId="{3542449D-0F28-5F63-A95F-E350D95EFEF5}" dt="2026-01-17T17:05:07.571" v="61" actId="207"/>
+          <ac:chgData name="Fei Yao" userId="0f76fc2f-86db-4f00-832a-b92dc6cb86c5" providerId="ADAL" clId="{3542449D-0F28-5F63-A95F-E350D95EFEF5}" dt="2026-01-18T10:22:59.697" v="336" actId="207"/>
           <ac:spMkLst>
             <pc:docMk/>
             <pc:sldMk cId="4040458237" sldId="257"/>
@@ -163,7 +163,7 @@
           </ac:spMkLst>
         </pc:spChg>
         <pc:spChg chg="mod topLvl">
-          <ac:chgData name="Fei Yao" userId="0f76fc2f-86db-4f00-832a-b92dc6cb86c5" providerId="ADAL" clId="{3542449D-0F28-5F63-A95F-E350D95EFEF5}" dt="2026-01-17T17:19:35.749" v="305" actId="164"/>
+          <ac:chgData name="Fei Yao" userId="0f76fc2f-86db-4f00-832a-b92dc6cb86c5" providerId="ADAL" clId="{3542449D-0F28-5F63-A95F-E350D95EFEF5}" dt="2026-01-18T10:17:29.544" v="335" actId="1582"/>
           <ac:spMkLst>
             <pc:docMk/>
             <pc:sldMk cId="4040458237" sldId="257"/>
@@ -1110,7 +1110,7 @@
           <a:p>
             <a:fld id="{2D5B012D-04D8-C041-B97B-CC7FDEBE0565}" type="datetimeFigureOut">
               <a:rPr lang="en-US" smtClean="0"/>
-              <a:t>1/17/26</a:t>
+              <a:t>1/18/26</a:t>
             </a:fld>
             <a:endParaRPr lang="en-US"/>
           </a:p>
@@ -1598,7 +1598,7 @@
           <a:p>
             <a:fld id="{D1C87F3C-6FA4-D54F-AEDE-BC3ADE73DCD6}" type="datetimeFigureOut">
               <a:rPr lang="en-US" smtClean="0"/>
-              <a:t>1/17/26</a:t>
+              <a:t>1/18/26</a:t>
             </a:fld>
             <a:endParaRPr lang="en-US"/>
           </a:p>
@@ -1768,7 +1768,7 @@
           <a:p>
             <a:fld id="{D1C87F3C-6FA4-D54F-AEDE-BC3ADE73DCD6}" type="datetimeFigureOut">
               <a:rPr lang="en-US" smtClean="0"/>
-              <a:t>1/17/26</a:t>
+              <a:t>1/18/26</a:t>
             </a:fld>
             <a:endParaRPr lang="en-US"/>
           </a:p>
@@ -1948,7 +1948,7 @@
           <a:p>
             <a:fld id="{D1C87F3C-6FA4-D54F-AEDE-BC3ADE73DCD6}" type="datetimeFigureOut">
               <a:rPr lang="en-US" smtClean="0"/>
-              <a:t>1/17/26</a:t>
+              <a:t>1/18/26</a:t>
             </a:fld>
             <a:endParaRPr lang="en-US"/>
           </a:p>
@@ -2118,7 +2118,7 @@
           <a:p>
             <a:fld id="{D1C87F3C-6FA4-D54F-AEDE-BC3ADE73DCD6}" type="datetimeFigureOut">
               <a:rPr lang="en-US" smtClean="0"/>
-              <a:t>1/17/26</a:t>
+              <a:t>1/18/26</a:t>
             </a:fld>
             <a:endParaRPr lang="en-US"/>
           </a:p>
@@ -2364,7 +2364,7 @@
           <a:p>
             <a:fld id="{D1C87F3C-6FA4-D54F-AEDE-BC3ADE73DCD6}" type="datetimeFigureOut">
               <a:rPr lang="en-US" smtClean="0"/>
-              <a:t>1/17/26</a:t>
+              <a:t>1/18/26</a:t>
             </a:fld>
             <a:endParaRPr lang="en-US"/>
           </a:p>
@@ -2596,7 +2596,7 @@
           <a:p>
             <a:fld id="{D1C87F3C-6FA4-D54F-AEDE-BC3ADE73DCD6}" type="datetimeFigureOut">
               <a:rPr lang="en-US" smtClean="0"/>
-              <a:t>1/17/26</a:t>
+              <a:t>1/18/26</a:t>
             </a:fld>
             <a:endParaRPr lang="en-US"/>
           </a:p>
@@ -2963,7 +2963,7 @@
           <a:p>
             <a:fld id="{D1C87F3C-6FA4-D54F-AEDE-BC3ADE73DCD6}" type="datetimeFigureOut">
               <a:rPr lang="en-US" smtClean="0"/>
-              <a:t>1/17/26</a:t>
+              <a:t>1/18/26</a:t>
             </a:fld>
             <a:endParaRPr lang="en-US"/>
           </a:p>
@@ -3081,7 +3081,7 @@
           <a:p>
             <a:fld id="{D1C87F3C-6FA4-D54F-AEDE-BC3ADE73DCD6}" type="datetimeFigureOut">
               <a:rPr lang="en-US" smtClean="0"/>
-              <a:t>1/17/26</a:t>
+              <a:t>1/18/26</a:t>
             </a:fld>
             <a:endParaRPr lang="en-US"/>
           </a:p>
@@ -3176,7 +3176,7 @@
           <a:p>
             <a:fld id="{D1C87F3C-6FA4-D54F-AEDE-BC3ADE73DCD6}" type="datetimeFigureOut">
               <a:rPr lang="en-US" smtClean="0"/>
-              <a:t>1/17/26</a:t>
+              <a:t>1/18/26</a:t>
             </a:fld>
             <a:endParaRPr lang="en-US"/>
           </a:p>
@@ -3453,7 +3453,7 @@
           <a:p>
             <a:fld id="{D1C87F3C-6FA4-D54F-AEDE-BC3ADE73DCD6}" type="datetimeFigureOut">
               <a:rPr lang="en-US" smtClean="0"/>
-              <a:t>1/17/26</a:t>
+              <a:t>1/18/26</a:t>
             </a:fld>
             <a:endParaRPr lang="en-US"/>
           </a:p>
@@ -3710,7 +3710,7 @@
           <a:p>
             <a:fld id="{D1C87F3C-6FA4-D54F-AEDE-BC3ADE73DCD6}" type="datetimeFigureOut">
               <a:rPr lang="en-US" smtClean="0"/>
-              <a:t>1/17/26</a:t>
+              <a:t>1/18/26</a:t>
             </a:fld>
             <a:endParaRPr lang="en-US"/>
           </a:p>
@@ -3923,7 +3923,7 @@
           <a:p>
             <a:fld id="{D1C87F3C-6FA4-D54F-AEDE-BC3ADE73DCD6}" type="datetimeFigureOut">
               <a:rPr lang="en-US" smtClean="0"/>
-              <a:t>1/17/26</a:t>
+              <a:t>1/18/26</a:t>
             </a:fld>
             <a:endParaRPr lang="en-US"/>
           </a:p>
@@ -8483,9 +8483,7 @@
             <a:avLst/>
           </a:prstGeom>
           <a:solidFill>
-            <a:schemeClr val="bg1">
-              <a:lumMod val="65000"/>
-            </a:schemeClr>
+            <a:srgbClr val="4F6D8C"/>
           </a:solidFill>
           <a:ln>
             <a:noFill/>
@@ -8537,9 +8535,7 @@
             <a:avLst/>
           </a:prstGeom>
           <a:solidFill>
-            <a:schemeClr val="bg1">
-              <a:lumMod val="65000"/>
-            </a:schemeClr>
+            <a:srgbClr val="4F6D8C"/>
           </a:solidFill>
           <a:ln>
             <a:noFill/>
@@ -8591,9 +8587,7 @@
             <a:avLst/>
           </a:prstGeom>
           <a:solidFill>
-            <a:schemeClr val="bg1">
-              <a:lumMod val="65000"/>
-            </a:schemeClr>
+            <a:srgbClr val="C98A44"/>
           </a:solidFill>
           <a:ln>
             <a:noFill/>
